--- a/pptx/EOD-Ramayan-Vatika-Project-Finance.pptx
+++ b/pptx/EOD-Ramayan-Vatika-Project-Finance.pptx
@@ -882,6 +882,545 @@
     <c:autoTitleDeleted val="1"/>
     <c:plotArea>
       <c:layout/>
+      <c:barChart>
+        <c:barDir val="col"/>
+        <c:grouping val="stacked"/>
+        <c:varyColors val="0"/>
+        <c:ser>
+          <c:idx val="0"/>
+          <c:order val="0"/>
+          <c:tx>
+            <c:strRef>
+              <c:f>Sheet1!$B$1</c:f>
+              <c:strCache>
+                <c:ptCount val="1"/>
+                <c:pt idx="0">
+                  <c:v>Entry ticketing</c:v>
+                </c:pt>
+              </c:strCache>
+            </c:strRef>
+          </c:tx>
+          <c:spPr>
+            <a:solidFill>
+              <a:srgbClr val="2B66EA"/>
+            </a:solidFill>
+            <a:effectLst/>
+          </c:spPr>
+          <c:invertIfNegative val="0"/>
+          <c:dLbls>
+            <c:numFmt formatCode="0.00" sourceLinked="0"/>
+            <c:txPr>
+              <a:bodyPr/>
+              <a:lstStyle/>
+              <a:p>
+                <a:pPr>
+                  <a:defRPr b="0" i="0" strike="noStrike" sz="900" u="none">
+                    <a:solidFill>
+                      <a:srgbClr val="3B4660"/>
+                    </a:solidFill>
+                    <a:latin typeface="Calibri"/>
+                  </a:defRPr>
+                </a:pPr>
+              </a:p>
+            </c:txPr>
+            <c:dLblPos val="ctr"/>
+            <c:showLegendKey val="0"/>
+            <c:showVal val="1"/>
+            <c:showCatName val="0"/>
+            <c:showSerName val="0"/>
+            <c:showPercent val="0"/>
+            <c:showBubbleSize val="0"/>
+            <c:showLeaderLines val="0"/>
+          </c:dLbls>
+          <c:cat>
+            <c:multiLvlStrRef>
+              <c:f>Sheet1!$A$2:$A$11</c:f>
+              <c:multiLvlStrCache>
+                <c:ptCount val="10"/>
+                <c:lvl>
+                  <c:pt idx="0">
+                    <c:v>Yr 1</c:v>
+                  </c:pt>
+                  <c:pt idx="1">
+                    <c:v>Yr 2</c:v>
+                  </c:pt>
+                  <c:pt idx="2">
+                    <c:v>Yr 3</c:v>
+                  </c:pt>
+                  <c:pt idx="3">
+                    <c:v>Yr 4</c:v>
+                  </c:pt>
+                  <c:pt idx="4">
+                    <c:v>Yr 5</c:v>
+                  </c:pt>
+                  <c:pt idx="5">
+                    <c:v>Yr 6</c:v>
+                  </c:pt>
+                  <c:pt idx="6">
+                    <c:v>Yr 7</c:v>
+                  </c:pt>
+                  <c:pt idx="7">
+                    <c:v>Yr 8</c:v>
+                  </c:pt>
+                  <c:pt idx="8">
+                    <c:v>Yr 9</c:v>
+                  </c:pt>
+                  <c:pt idx="9">
+                    <c:v>Yr 10</c:v>
+                  </c:pt>
+                </c:lvl>
+              </c:multiLvlStrCache>
+            </c:multiLvlStrRef>
+          </c:cat>
+          <c:val>
+            <c:numRef>
+              <c:f>Sheet1!$B$2:$B$11</c:f>
+              <c:numCache>
+                <c:formatCode>General</c:formatCode>
+                <c:ptCount val="10"/>
+                <c:pt idx="0">
+                  <c:v>0.25</c:v>
+                </c:pt>
+                <c:pt idx="1">
+                  <c:v>0.32</c:v>
+                </c:pt>
+                <c:pt idx="2">
+                  <c:v>0.44</c:v>
+                </c:pt>
+                <c:pt idx="3">
+                  <c:v>0.49</c:v>
+                </c:pt>
+                <c:pt idx="4">
+                  <c:v>0.6</c:v>
+                </c:pt>
+                <c:pt idx="5">
+                  <c:v>0.64</c:v>
+                </c:pt>
+                <c:pt idx="6">
+                  <c:v>0.72</c:v>
+                </c:pt>
+                <c:pt idx="7">
+                  <c:v>0.76</c:v>
+                </c:pt>
+                <c:pt idx="8">
+                  <c:v>0.86</c:v>
+                </c:pt>
+                <c:pt idx="9">
+                  <c:v>0.89</c:v>
+                </c:pt>
+              </c:numCache>
+            </c:numRef>
+          </c:val>
+        </c:ser>
+        <c:ser>
+          <c:idx val="1"/>
+          <c:order val="1"/>
+          <c:tx>
+            <c:strRef>
+              <c:f>Sheet1!$C$1</c:f>
+              <c:strCache>
+                <c:ptCount val="1"/>
+                <c:pt idx="0">
+                  <c:v>Holographic &amp; laser show</c:v>
+                </c:pt>
+              </c:strCache>
+            </c:strRef>
+          </c:tx>
+          <c:spPr>
+            <a:solidFill>
+              <a:srgbClr val="C8553D"/>
+            </a:solidFill>
+            <a:effectLst/>
+          </c:spPr>
+          <c:invertIfNegative val="0"/>
+          <c:dLbls>
+            <c:numFmt formatCode="0.00" sourceLinked="0"/>
+            <c:txPr>
+              <a:bodyPr/>
+              <a:lstStyle/>
+              <a:p>
+                <a:pPr>
+                  <a:defRPr b="0" i="0" strike="noStrike" sz="900" u="none">
+                    <a:solidFill>
+                      <a:srgbClr val="3B4660"/>
+                    </a:solidFill>
+                    <a:latin typeface="Calibri"/>
+                  </a:defRPr>
+                </a:pPr>
+              </a:p>
+            </c:txPr>
+            <c:dLblPos val="ctr"/>
+            <c:showLegendKey val="0"/>
+            <c:showVal val="1"/>
+            <c:showCatName val="0"/>
+            <c:showSerName val="0"/>
+            <c:showPercent val="0"/>
+            <c:showBubbleSize val="0"/>
+            <c:showLeaderLines val="0"/>
+          </c:dLbls>
+          <c:cat>
+            <c:multiLvlStrRef>
+              <c:f>Sheet1!$A$2:$A$11</c:f>
+              <c:multiLvlStrCache>
+                <c:ptCount val="10"/>
+                <c:lvl>
+                  <c:pt idx="0">
+                    <c:v>Yr 1</c:v>
+                  </c:pt>
+                  <c:pt idx="1">
+                    <c:v>Yr 2</c:v>
+                  </c:pt>
+                  <c:pt idx="2">
+                    <c:v>Yr 3</c:v>
+                  </c:pt>
+                  <c:pt idx="3">
+                    <c:v>Yr 4</c:v>
+                  </c:pt>
+                  <c:pt idx="4">
+                    <c:v>Yr 5</c:v>
+                  </c:pt>
+                  <c:pt idx="5">
+                    <c:v>Yr 6</c:v>
+                  </c:pt>
+                  <c:pt idx="6">
+                    <c:v>Yr 7</c:v>
+                  </c:pt>
+                  <c:pt idx="7">
+                    <c:v>Yr 8</c:v>
+                  </c:pt>
+                  <c:pt idx="8">
+                    <c:v>Yr 9</c:v>
+                  </c:pt>
+                  <c:pt idx="9">
+                    <c:v>Yr 10</c:v>
+                  </c:pt>
+                </c:lvl>
+              </c:multiLvlStrCache>
+            </c:multiLvlStrRef>
+          </c:cat>
+          <c:val>
+            <c:numRef>
+              <c:f>Sheet1!$C$2:$C$11</c:f>
+              <c:numCache>
+                <c:formatCode>General</c:formatCode>
+                <c:ptCount val="10"/>
+                <c:pt idx="0">
+                  <c:v>0.88</c:v>
+                </c:pt>
+                <c:pt idx="1">
+                  <c:v>1.2</c:v>
+                </c:pt>
+                <c:pt idx="2">
+                  <c:v>1.59</c:v>
+                </c:pt>
+                <c:pt idx="3">
+                  <c:v>1.82</c:v>
+                </c:pt>
+                <c:pt idx="4">
+                  <c:v>2.08</c:v>
+                </c:pt>
+                <c:pt idx="5">
+                  <c:v>2.26</c:v>
+                </c:pt>
+                <c:pt idx="6">
+                  <c:v>2.56</c:v>
+                </c:pt>
+                <c:pt idx="7">
+                  <c:v>2.72</c:v>
+                </c:pt>
+                <c:pt idx="8">
+                  <c:v>2.97</c:v>
+                </c:pt>
+                <c:pt idx="9">
+                  <c:v>3.14</c:v>
+                </c:pt>
+              </c:numCache>
+            </c:numRef>
+          </c:val>
+        </c:ser>
+        <c:ser>
+          <c:idx val="2"/>
+          <c:order val="2"/>
+          <c:tx>
+            <c:strRef>
+              <c:f>Sheet1!$D$1</c:f>
+              <c:strCache>
+                <c:ptCount val="1"/>
+                <c:pt idx="0">
+                  <c:v>Food court</c:v>
+                </c:pt>
+              </c:strCache>
+            </c:strRef>
+          </c:tx>
+          <c:spPr>
+            <a:solidFill>
+              <a:srgbClr val="10B981"/>
+            </a:solidFill>
+            <a:effectLst/>
+          </c:spPr>
+          <c:invertIfNegative val="0"/>
+          <c:dLbls>
+            <c:numFmt formatCode="0.00" sourceLinked="0"/>
+            <c:txPr>
+              <a:bodyPr/>
+              <a:lstStyle/>
+              <a:p>
+                <a:pPr>
+                  <a:defRPr b="0" i="0" strike="noStrike" sz="900" u="none">
+                    <a:solidFill>
+                      <a:srgbClr val="3B4660"/>
+                    </a:solidFill>
+                    <a:latin typeface="Calibri"/>
+                  </a:defRPr>
+                </a:pPr>
+              </a:p>
+            </c:txPr>
+            <c:dLblPos val="ctr"/>
+            <c:showLegendKey val="0"/>
+            <c:showVal val="1"/>
+            <c:showCatName val="0"/>
+            <c:showSerName val="0"/>
+            <c:showPercent val="0"/>
+            <c:showBubbleSize val="0"/>
+            <c:showLeaderLines val="0"/>
+          </c:dLbls>
+          <c:cat>
+            <c:multiLvlStrRef>
+              <c:f>Sheet1!$A$2:$A$11</c:f>
+              <c:multiLvlStrCache>
+                <c:ptCount val="10"/>
+                <c:lvl>
+                  <c:pt idx="0">
+                    <c:v>Yr 1</c:v>
+                  </c:pt>
+                  <c:pt idx="1">
+                    <c:v>Yr 2</c:v>
+                  </c:pt>
+                  <c:pt idx="2">
+                    <c:v>Yr 3</c:v>
+                  </c:pt>
+                  <c:pt idx="3">
+                    <c:v>Yr 4</c:v>
+                  </c:pt>
+                  <c:pt idx="4">
+                    <c:v>Yr 5</c:v>
+                  </c:pt>
+                  <c:pt idx="5">
+                    <c:v>Yr 6</c:v>
+                  </c:pt>
+                  <c:pt idx="6">
+                    <c:v>Yr 7</c:v>
+                  </c:pt>
+                  <c:pt idx="7">
+                    <c:v>Yr 8</c:v>
+                  </c:pt>
+                  <c:pt idx="8">
+                    <c:v>Yr 9</c:v>
+                  </c:pt>
+                  <c:pt idx="9">
+                    <c:v>Yr 10</c:v>
+                  </c:pt>
+                </c:lvl>
+              </c:multiLvlStrCache>
+            </c:multiLvlStrRef>
+          </c:cat>
+          <c:val>
+            <c:numRef>
+              <c:f>Sheet1!$D$2:$D$11</c:f>
+              <c:numCache>
+                <c:formatCode>General</c:formatCode>
+                <c:ptCount val="10"/>
+                <c:pt idx="0">
+                  <c:v>0.16</c:v>
+                </c:pt>
+                <c:pt idx="1">
+                  <c:v>0.2</c:v>
+                </c:pt>
+                <c:pt idx="2">
+                  <c:v>0.24</c:v>
+                </c:pt>
+                <c:pt idx="3">
+                  <c:v>0.27</c:v>
+                </c:pt>
+                <c:pt idx="4">
+                  <c:v>0.3</c:v>
+                </c:pt>
+                <c:pt idx="5">
+                  <c:v>0.33</c:v>
+                </c:pt>
+                <c:pt idx="6">
+                  <c:v>0.35</c:v>
+                </c:pt>
+                <c:pt idx="7">
+                  <c:v>0.37</c:v>
+                </c:pt>
+                <c:pt idx="8">
+                  <c:v>0.39</c:v>
+                </c:pt>
+                <c:pt idx="9">
+                  <c:v>0.41</c:v>
+                </c:pt>
+              </c:numCache>
+            </c:numRef>
+          </c:val>
+        </c:ser>
+        <c:ser>
+          <c:idx val="3"/>
+          <c:order val="3"/>
+          <c:tx>
+            <c:strRef>
+              <c:f>Sheet1!$E$1</c:f>
+              <c:strCache>
+                <c:ptCount val="1"/>
+                <c:pt idx="0">
+                  <c:v>Parking, events, toy train, ancillary</c:v>
+                </c:pt>
+              </c:strCache>
+            </c:strRef>
+          </c:tx>
+          <c:spPr>
+            <a:solidFill>
+              <a:srgbClr val="8A93A6"/>
+            </a:solidFill>
+            <a:effectLst/>
+          </c:spPr>
+          <c:invertIfNegative val="0"/>
+          <c:dLbls>
+            <c:numFmt formatCode="0.00" sourceLinked="0"/>
+            <c:txPr>
+              <a:bodyPr/>
+              <a:lstStyle/>
+              <a:p>
+                <a:pPr>
+                  <a:defRPr b="0" i="0" strike="noStrike" sz="900" u="none">
+                    <a:solidFill>
+                      <a:srgbClr val="3B4660"/>
+                    </a:solidFill>
+                    <a:latin typeface="Calibri"/>
+                  </a:defRPr>
+                </a:pPr>
+              </a:p>
+            </c:txPr>
+            <c:dLblPos val="ctr"/>
+            <c:showLegendKey val="0"/>
+            <c:showVal val="1"/>
+            <c:showCatName val="0"/>
+            <c:showSerName val="0"/>
+            <c:showPercent val="0"/>
+            <c:showBubbleSize val="0"/>
+            <c:showLeaderLines val="0"/>
+          </c:dLbls>
+          <c:cat>
+            <c:multiLvlStrRef>
+              <c:f>Sheet1!$A$2:$A$11</c:f>
+              <c:multiLvlStrCache>
+                <c:ptCount val="10"/>
+                <c:lvl>
+                  <c:pt idx="0">
+                    <c:v>Yr 1</c:v>
+                  </c:pt>
+                  <c:pt idx="1">
+                    <c:v>Yr 2</c:v>
+                  </c:pt>
+                  <c:pt idx="2">
+                    <c:v>Yr 3</c:v>
+                  </c:pt>
+                  <c:pt idx="3">
+                    <c:v>Yr 4</c:v>
+                  </c:pt>
+                  <c:pt idx="4">
+                    <c:v>Yr 5</c:v>
+                  </c:pt>
+                  <c:pt idx="5">
+                    <c:v>Yr 6</c:v>
+                  </c:pt>
+                  <c:pt idx="6">
+                    <c:v>Yr 7</c:v>
+                  </c:pt>
+                  <c:pt idx="7">
+                    <c:v>Yr 8</c:v>
+                  </c:pt>
+                  <c:pt idx="8">
+                    <c:v>Yr 9</c:v>
+                  </c:pt>
+                  <c:pt idx="9">
+                    <c:v>Yr 10</c:v>
+                  </c:pt>
+                </c:lvl>
+              </c:multiLvlStrCache>
+            </c:multiLvlStrRef>
+          </c:cat>
+          <c:val>
+            <c:numRef>
+              <c:f>Sheet1!$E$2:$E$11</c:f>
+              <c:numCache>
+                <c:formatCode>General</c:formatCode>
+                <c:ptCount val="10"/>
+                <c:pt idx="0">
+                  <c:v>0.25</c:v>
+                </c:pt>
+                <c:pt idx="1">
+                  <c:v>0.44</c:v>
+                </c:pt>
+                <c:pt idx="2">
+                  <c:v>0.56</c:v>
+                </c:pt>
+                <c:pt idx="3">
+                  <c:v>0.64</c:v>
+                </c:pt>
+                <c:pt idx="4">
+                  <c:v>0.72</c:v>
+                </c:pt>
+                <c:pt idx="5">
+                  <c:v>0.77</c:v>
+                </c:pt>
+                <c:pt idx="6">
+                  <c:v>0.82</c:v>
+                </c:pt>
+                <c:pt idx="7">
+                  <c:v>0.86</c:v>
+                </c:pt>
+                <c:pt idx="8">
+                  <c:v>0.91</c:v>
+                </c:pt>
+                <c:pt idx="9">
+                  <c:v>0.95</c:v>
+                </c:pt>
+              </c:numCache>
+            </c:numRef>
+          </c:val>
+        </c:ser>
+        <c:dLbls>
+          <c:numFmt formatCode="0.00" sourceLinked="0"/>
+          <c:txPr>
+            <a:bodyPr/>
+            <a:lstStyle/>
+            <a:p>
+              <a:pPr>
+                <a:defRPr b="0" i="0" strike="noStrike" sz="900" u="none">
+                  <a:solidFill>
+                    <a:srgbClr val="3B4660"/>
+                  </a:solidFill>
+                  <a:latin typeface="Calibri"/>
+                </a:defRPr>
+              </a:pPr>
+            </a:p>
+          </c:txPr>
+          <c:dLblPos val="ctr"/>
+          <c:showLegendKey val="0"/>
+          <c:showVal val="1"/>
+          <c:showCatName val="0"/>
+          <c:showSerName val="0"/>
+          <c:showPercent val="0"/>
+          <c:showBubbleSize val="0"/>
+          <c:showLeaderLines val="0"/>
+        </c:dLbls>
+        <c:gapWidth val="45"/>
+        <c:overlap val="100"/>
+        <c:axId val="2094734554"/>
+        <c:axId val="2094734552"/>
+        <c:axId val="2094734556"/>
+      </c:barChart>
       <c:catAx>
         <c:axId val="2094734554"/>
         <c:scaling>
@@ -3853,7 +4392,7 @@
         <p:spPr>
           <a:xfrm>
             <a:off x="566928" y="2706624"/>
-            <a:ext cx="10241280" cy="928878"/>
+            <a:ext cx="10241280" cy="911352"/>
           </a:xfrm>
           <a:prstGeom prst="rect">
             <a:avLst/>
@@ -3894,7 +4433,7 @@
         </p:nvSpPr>
         <p:spPr>
           <a:xfrm>
-            <a:off x="566928" y="3781806"/>
+            <a:off x="566928" y="3764280"/>
             <a:ext cx="10241280" cy="694944"/>
           </a:xfrm>
           <a:prstGeom prst="rect">
@@ -4076,7 +4615,7 @@
             <a:r>
               <a:rPr lang="en-US" sz="1000" dirty="0">
                 <a:solidFill>
-                  <a:srgbClr val="7C889B"/>
+                  <a:srgbClr val="A8B2C4"/>
                 </a:solidFill>
                 <a:latin typeface="Calibri" pitchFamily="34" charset="0"/>
                 <a:ea typeface="Calibri" pitchFamily="34" charset="-122"/>
@@ -4196,7 +4735,7 @@
             <a:r>
               <a:rPr lang="en-US" sz="1000" dirty="0">
                 <a:solidFill>
-                  <a:srgbClr val="7C889B"/>
+                  <a:srgbClr val="A8B2C4"/>
                 </a:solidFill>
                 <a:latin typeface="Calibri" pitchFamily="34" charset="0"/>
                 <a:ea typeface="Calibri" pitchFamily="34" charset="-122"/>
@@ -4316,7 +4855,7 @@
             <a:r>
               <a:rPr lang="en-US" sz="1000" dirty="0">
                 <a:solidFill>
-                  <a:srgbClr val="7C889B"/>
+                  <a:srgbClr val="A8B2C4"/>
                 </a:solidFill>
                 <a:latin typeface="Calibri" pitchFamily="34" charset="0"/>
                 <a:ea typeface="Calibri" pitchFamily="34" charset="-122"/>
@@ -4436,7 +4975,7 @@
             <a:r>
               <a:rPr lang="en-US" sz="1000" dirty="0">
                 <a:solidFill>
-                  <a:srgbClr val="7C889B"/>
+                  <a:srgbClr val="A8B2C4"/>
                 </a:solidFill>
                 <a:latin typeface="Calibri" pitchFamily="34" charset="0"/>
                 <a:ea typeface="Calibri" pitchFamily="34" charset="-122"/>
@@ -4586,8 +5125,8 @@
         </p:nvSpPr>
         <p:spPr>
           <a:xfrm>
-            <a:off x="566928" y="1005840"/>
-            <a:ext cx="11057839" cy="512064"/>
+            <a:off x="566928" y="950976"/>
+            <a:ext cx="11057839" cy="462280"/>
           </a:xfrm>
           <a:prstGeom prst="rect">
             <a:avLst/>
@@ -4601,12 +5140,12 @@
           <a:p>
             <a:pPr indent="0" marL="0">
               <a:lnSpc>
-                <a:spcPts val="1900"/>
+                <a:spcPts val="1750"/>
               </a:lnSpc>
               <a:buNone/>
             </a:pPr>
             <a:r>
-              <a:rPr lang="en-US" sz="1350" dirty="0">
+              <a:rPr lang="en-US" sz="1250" dirty="0">
                 <a:solidFill>
                   <a:srgbClr val="3B4660"/>
                 </a:solidFill>
@@ -4616,7 +5155,7 @@
               </a:rPr>
               <a:t>Sized to the true capital requirement rather than the gross facility, and valued at exit on the discounted cash flow still to come over the balance of the concession.</a:t>
             </a:r>
-            <a:endParaRPr lang="en-US" sz="1350" dirty="0"/>
+            <a:endParaRPr lang="en-US" sz="1250" dirty="0"/>
           </a:p>
         </p:txBody>
       </p:sp>
@@ -4635,7 +5174,7 @@
           </p:nvPr>
         </p:nvGraphicFramePr>
         <p:xfrm>
-          <a:off x="566928" y="1627632"/>
+          <a:off x="566928" y="1541272"/>
           <a:ext cx="11057839" cy="914400"/>
         </p:xfrm>
         <a:graphic>
@@ -5486,12 +6025,12 @@
         </p:nvSpPr>
         <p:spPr>
           <a:xfrm>
-            <a:off x="566928" y="4041648"/>
-            <a:ext cx="11057839" cy="1411298"/>
+            <a:off x="566928" y="3900424"/>
+            <a:ext cx="11057839" cy="1737492"/>
           </a:xfrm>
           <a:prstGeom prst="roundRect">
             <a:avLst>
-              <a:gd name="adj" fmla="val 3240"/>
+              <a:gd name="adj" fmla="val 2631"/>
             </a:avLst>
           </a:prstGeom>
           <a:solidFill>
@@ -5513,8 +6052,8 @@
         </p:nvSpPr>
         <p:spPr>
           <a:xfrm>
-            <a:off x="804672" y="4187952"/>
-            <a:ext cx="2743200" cy="201168"/>
+            <a:off x="804672" y="4010152"/>
+            <a:ext cx="2743200" cy="182880"/>
           </a:xfrm>
           <a:prstGeom prst="rect">
             <a:avLst/>
@@ -5552,8 +6091,8 @@
         </p:nvSpPr>
         <p:spPr>
           <a:xfrm>
-            <a:off x="804672" y="4389120"/>
-            <a:ext cx="10582351" cy="294145"/>
+            <a:off x="804672" y="4193032"/>
+            <a:ext cx="10582351" cy="288595"/>
           </a:xfrm>
           <a:prstGeom prst="rect">
             <a:avLst/>
@@ -5580,7 +6119,7 @@
                 <a:ea typeface="Calibri" pitchFamily="34" charset="-122"/>
                 <a:cs typeface="Calibri" pitchFamily="34" charset="-120"/>
               </a:rPr>
-              <a:t>The arithmetic does not work at project level</a:t>
+              <a:t>The arithmetic does not work — and it needs BDA's consent</a:t>
             </a:r>
             <a:endParaRPr lang="en-US" sz="1900" dirty="0"/>
           </a:p>
@@ -5594,8 +6133,8 @@
         </p:nvSpPr>
         <p:spPr>
           <a:xfrm>
-            <a:off x="804672" y="4756417"/>
-            <a:ext cx="10582351" cy="623377"/>
+            <a:off x="804672" y="4536491"/>
+            <a:ext cx="10582351" cy="1028273"/>
           </a:xfrm>
           <a:prstGeom prst="rect">
             <a:avLst/>
@@ -5622,149 +6161,28 @@
                 <a:ea typeface="Calibri" pitchFamily="34" charset="-122"/>
                 <a:cs typeface="Calibri" pitchFamily="34" charset="-120"/>
               </a:rPr>
-              <a:t>At 70% of the project an investor earns 1.8%. Reaching a 22% hurdle would take 100% — the entire project and then some. There is no split of this concession that pays third-party equity a market return and leaves E-O-D a reason to operate it.</a:t>
+              <a:t>At 70% of the project an investor earns 1.8%; a 22% hurdle would take 100% — the whole project and then some.</a:t>
             </a:r>
             <a:endParaRPr lang="en-US" sz="1200" dirty="0"/>
           </a:p>
-        </p:txBody>
-      </p:sp>
-      <p:sp>
-        <p:nvSpPr>
-          <p:cNvPr id="11" name="Shape 8"/>
-          <p:cNvSpPr/>
-          <p:nvPr/>
-        </p:nvSpPr>
-        <p:spPr>
-          <a:xfrm>
-            <a:off x="566928" y="5654114"/>
-            <a:ext cx="11057839" cy="731520"/>
-          </a:xfrm>
-          <a:prstGeom prst="roundRect">
-            <a:avLst>
-              <a:gd name="adj" fmla="val 6250"/>
-            </a:avLst>
-          </a:prstGeom>
-          <a:solidFill>
-            <a:srgbClr val="FDF6EC"/>
-          </a:solidFill>
-          <a:ln w="15875">
-            <a:solidFill>
-              <a:srgbClr val="D97706"/>
-            </a:solidFill>
-            <a:prstDash val="solid"/>
-          </a:ln>
-        </p:spPr>
-      </p:sp>
-      <p:sp>
-        <p:nvSpPr>
-          <p:cNvPr id="12" name="Text 9"/>
-          <p:cNvSpPr/>
-          <p:nvPr/>
-        </p:nvSpPr>
-        <p:spPr>
-          <a:xfrm>
-            <a:off x="804672" y="5800418"/>
-            <a:ext cx="2743200" cy="201168"/>
-          </a:xfrm>
-          <a:prstGeom prst="rect">
-            <a:avLst/>
-          </a:prstGeom>
-          <a:noFill/>
-          <a:ln/>
-        </p:spPr>
-        <p:txBody>
-          <a:bodyPr wrap="square" lIns="0" tIns="0" rIns="0" bIns="0" rtlCol="0" anchor="ctr"/>
-          <a:lstStyle/>
           <a:p>
             <a:pPr indent="0" marL="0">
+              <a:lnSpc>
+                <a:spcPts val="1704"/>
+              </a:lnSpc>
               <a:buNone/>
             </a:pPr>
-            <a:r>
-              <a:rPr lang="en-US" sz="850" b="1" spc="160" kern="0" dirty="0">
-                <a:solidFill>
-                  <a:srgbClr val="D97706"/>
-                </a:solidFill>
-                <a:latin typeface="Calibri" pitchFamily="34" charset="0"/>
-                <a:ea typeface="Calibri" pitchFamily="34" charset="-122"/>
-                <a:cs typeface="Calibri" pitchFamily="34" charset="-120"/>
-              </a:rPr>
-              <a:t>VERDICT</a:t>
-            </a:r>
-            <a:endParaRPr lang="en-US" sz="850" dirty="0"/>
-          </a:p>
-        </p:txBody>
-      </p:sp>
-      <p:sp>
-        <p:nvSpPr>
-          <p:cNvPr id="13" name="Text 10"/>
-          <p:cNvSpPr/>
-          <p:nvPr/>
-        </p:nvSpPr>
-        <p:spPr>
-          <a:xfrm>
-            <a:off x="804672" y="6001586"/>
-            <a:ext cx="10582351" cy="232220"/>
-          </a:xfrm>
-          <a:prstGeom prst="rect">
-            <a:avLst/>
-          </a:prstGeom>
-          <a:noFill/>
-          <a:ln/>
-        </p:spPr>
-        <p:txBody>
-          <a:bodyPr wrap="square" lIns="0" tIns="0" rIns="0" bIns="0" rtlCol="0" anchor="t"/>
-          <a:lstStyle/>
+            <a:endParaRPr lang="en-US" sz="1200" dirty="0"/>
+          </a:p>
           <a:p>
             <a:pPr indent="0" marL="0">
               <a:lnSpc>
-                <a:spcPts val="1725"/>
+                <a:spcPts val="1704"/>
               </a:lnSpc>
               <a:buNone/>
             </a:pPr>
             <a:r>
-              <a:rPr lang="en-US" sz="1500" b="1" dirty="0">
-                <a:solidFill>
-                  <a:srgbClr val="0A1426"/>
-                </a:solidFill>
-                <a:latin typeface="Calibri" pitchFamily="34" charset="0"/>
-                <a:ea typeface="Calibri" pitchFamily="34" charset="-122"/>
-                <a:cs typeface="Calibri" pitchFamily="34" charset="-120"/>
-              </a:rPr>
-              <a:t>And it needs BDA's written consent</a:t>
-            </a:r>
-            <a:endParaRPr lang="en-US" sz="1500" dirty="0"/>
-          </a:p>
-        </p:txBody>
-      </p:sp>
-      <p:sp>
-        <p:nvSpPr>
-          <p:cNvPr id="14" name="Text 11"/>
-          <p:cNvSpPr/>
-          <p:nvPr/>
-        </p:nvSpPr>
-        <p:spPr>
-          <a:xfrm>
-            <a:off x="804672" y="6306957"/>
-            <a:ext cx="10582351" cy="182880"/>
-          </a:xfrm>
-          <a:prstGeom prst="rect">
-            <a:avLst/>
-          </a:prstGeom>
-          <a:noFill/>
-          <a:ln/>
-        </p:spPr>
-        <p:txBody>
-          <a:bodyPr wrap="square" lIns="0" tIns="0" rIns="0" bIns="0" rtlCol="0" anchor="t"/>
-          <a:lstStyle/>
-          <a:p>
-            <a:pPr indent="0" marL="0">
-              <a:lnSpc>
-                <a:spcPts val="1207"/>
-              </a:lnSpc>
-              <a:buNone/>
-            </a:pPr>
-            <a:r>
-              <a:rPr lang="en-US" sz="850" dirty="0">
+              <a:rPr lang="en-US" sz="1200" dirty="0">
                 <a:solidFill>
                   <a:srgbClr val="3B4660"/>
                 </a:solidFill>
@@ -5772,15 +6190,15 @@
                 <a:ea typeface="Calibri" pitchFamily="34" charset="-122"/>
                 <a:cs typeface="Calibri" pitchFamily="34" charset="-120"/>
               </a:rPr>
-              <a:t>Any equity structure that changes VAPPL's shareholding pattern requires BDA's prior written approval during the lock-in, with forfeiture of the performance security and blacklisting as the stated consequence of breach. The equity conversation starts at BDA's office, not the investor's.</a:t>
+              <a:t>Any structure that changes VAPPL's shareholding also needs BDA's prior written approval during the lock-in, with forfeiture of the performance security as the stated consequence. The equity conversation starts at BDA's office.</a:t>
             </a:r>
-            <a:endParaRPr lang="en-US" sz="850" dirty="0"/>
+            <a:endParaRPr lang="en-US" sz="1200" dirty="0"/>
           </a:p>
         </p:txBody>
       </p:sp>
       <p:sp>
         <p:nvSpPr>
-          <p:cNvPr id="15" name="Text 12"/>
+          <p:cNvPr id="11" name="Text 8"/>
           <p:cNvSpPr/>
           <p:nvPr/>
         </p:nvSpPr>
@@ -5955,8 +6373,8 @@
         </p:nvSpPr>
         <p:spPr>
           <a:xfrm>
-            <a:off x="566928" y="1005840"/>
-            <a:ext cx="11057839" cy="512064"/>
+            <a:off x="566928" y="950976"/>
+            <a:ext cx="11057839" cy="462280"/>
           </a:xfrm>
           <a:prstGeom prst="rect">
             <a:avLst/>
@@ -5970,12 +6388,12 @@
           <a:p>
             <a:pPr indent="0" marL="0">
               <a:lnSpc>
-                <a:spcPts val="1900"/>
+                <a:spcPts val="1750"/>
               </a:lnSpc>
               <a:buNone/>
             </a:pPr>
             <a:r>
-              <a:rPr lang="en-US" sz="1350" dirty="0">
+              <a:rPr lang="en-US" sz="1250" dirty="0">
                 <a:solidFill>
                   <a:srgbClr val="3B4660"/>
                 </a:solidFill>
@@ -5985,7 +6403,7 @@
               </a:rPr>
               <a:t>The RFP forbids any charge over the Vatika. That is not an obstacle to a CGTMSE facility — it is the reason to use one. The guarantee replaces the security the contract will not allow.</a:t>
             </a:r>
-            <a:endParaRPr lang="en-US" sz="1350" dirty="0"/>
+            <a:endParaRPr lang="en-US" sz="1250" dirty="0"/>
           </a:p>
         </p:txBody>
       </p:sp>
@@ -5996,8 +6414,8 @@
           <p:nvPr/>
         </p:nvGraphicFramePr>
         <p:xfrm>
-          <a:off x="566928" y="1627632"/>
-          <a:ext cx="11057839" cy="2377440"/>
+          <a:off x="566928" y="1541272"/>
+          <a:ext cx="11057839" cy="1874520"/>
         </p:xfrm>
         <a:graphic xmlns:a="http://schemas.openxmlformats.org/drawingml/2006/main">
           <a:graphicData uri="http://schemas.openxmlformats.org/drawingml/2006/chart">
@@ -6013,12 +6431,12 @@
         </p:nvSpPr>
         <p:spPr>
           <a:xfrm>
-            <a:off x="566928" y="4206240"/>
-            <a:ext cx="2599868" cy="1298448"/>
+            <a:off x="566928" y="3616960"/>
+            <a:ext cx="2599868" cy="1152144"/>
           </a:xfrm>
           <a:prstGeom prst="roundRect">
             <a:avLst>
-              <a:gd name="adj" fmla="val 4225"/>
+              <a:gd name="adj" fmla="val 4762"/>
             </a:avLst>
           </a:prstGeom>
           <a:solidFill>
@@ -6040,8 +6458,8 @@
         </p:nvSpPr>
         <p:spPr>
           <a:xfrm>
-            <a:off x="749808" y="4343400"/>
-            <a:ext cx="2234108" cy="219456"/>
+            <a:off x="749808" y="3735832"/>
+            <a:ext cx="2234108" cy="237744"/>
           </a:xfrm>
           <a:prstGeom prst="rect">
             <a:avLst/>
@@ -6050,14 +6468,14 @@
           <a:ln/>
         </p:spPr>
         <p:txBody>
-          <a:bodyPr wrap="square" lIns="0" tIns="0" rIns="0" bIns="0" rtlCol="0" anchor="ctr"/>
+          <a:bodyPr wrap="square" lIns="0" tIns="0" rIns="0" bIns="0" rtlCol="0" anchor="t"/>
           <a:lstStyle/>
           <a:p>
             <a:pPr indent="0" marL="0">
               <a:buNone/>
             </a:pPr>
             <a:r>
-              <a:rPr lang="en-US" sz="900" b="1" spc="120" kern="0" dirty="0">
+              <a:rPr lang="en-US" sz="850" b="1" spc="100" kern="0" dirty="0">
                 <a:solidFill>
                   <a:srgbClr val="6E7689"/>
                 </a:solidFill>
@@ -6067,7 +6485,7 @@
               </a:rPr>
               <a:t>TOTAL FACILITY</a:t>
             </a:r>
-            <a:endParaRPr lang="en-US" sz="900" dirty="0"/>
+            <a:endParaRPr lang="en-US" sz="850" dirty="0"/>
           </a:p>
         </p:txBody>
       </p:sp>
@@ -6079,7 +6497,7 @@
         </p:nvSpPr>
         <p:spPr>
           <a:xfrm>
-            <a:off x="749808" y="4572000"/>
+            <a:off x="749808" y="3982720"/>
             <a:ext cx="2234108" cy="457200"/>
           </a:xfrm>
           <a:prstGeom prst="rect">
@@ -6089,7 +6507,9 @@
           <a:ln/>
         </p:spPr>
         <p:txBody>
-          <a:bodyPr wrap="square" lIns="0" tIns="0" rIns="0" bIns="0" rtlCol="0" anchor="t"/>
+          <a:bodyPr wrap="square" lIns="0" tIns="0" rIns="0" bIns="0" rtlCol="0" anchor="t">
+            <a:normAutofit/>
+          </a:bodyPr>
           <a:lstStyle/>
           <a:p>
             <a:pPr indent="0" marL="0">
@@ -6118,8 +6538,8 @@
         </p:nvSpPr>
         <p:spPr>
           <a:xfrm>
-            <a:off x="749808" y="5047488"/>
-            <a:ext cx="2234108" cy="384048"/>
+            <a:off x="749808" y="4458208"/>
+            <a:ext cx="2234108" cy="237744"/>
           </a:xfrm>
           <a:prstGeom prst="rect">
             <a:avLst/>
@@ -6160,12 +6580,12 @@
         </p:nvSpPr>
         <p:spPr>
           <a:xfrm>
-            <a:off x="3386252" y="4206240"/>
-            <a:ext cx="2599868" cy="1298448"/>
+            <a:off x="3386252" y="3616960"/>
+            <a:ext cx="2599868" cy="1152144"/>
           </a:xfrm>
           <a:prstGeom prst="roundRect">
             <a:avLst>
-              <a:gd name="adj" fmla="val 4225"/>
+              <a:gd name="adj" fmla="val 4762"/>
             </a:avLst>
           </a:prstGeom>
           <a:solidFill>
@@ -6187,8 +6607,8 @@
         </p:nvSpPr>
         <p:spPr>
           <a:xfrm>
-            <a:off x="3569132" y="4343400"/>
-            <a:ext cx="2234108" cy="219456"/>
+            <a:off x="3569132" y="3735832"/>
+            <a:ext cx="2234108" cy="237744"/>
           </a:xfrm>
           <a:prstGeom prst="rect">
             <a:avLst/>
@@ -6197,14 +6617,14 @@
           <a:ln/>
         </p:spPr>
         <p:txBody>
-          <a:bodyPr wrap="square" lIns="0" tIns="0" rIns="0" bIns="0" rtlCol="0" anchor="ctr"/>
+          <a:bodyPr wrap="square" lIns="0" tIns="0" rIns="0" bIns="0" rtlCol="0" anchor="t"/>
           <a:lstStyle/>
           <a:p>
             <a:pPr indent="0" marL="0">
               <a:buNone/>
             </a:pPr>
             <a:r>
-              <a:rPr lang="en-US" sz="900" b="1" spc="120" kern="0" dirty="0">
+              <a:rPr lang="en-US" sz="850" b="1" spc="100" kern="0" dirty="0">
                 <a:solidFill>
                   <a:srgbClr val="6E7689"/>
                 </a:solidFill>
@@ -6214,7 +6634,7 @@
               </a:rPr>
               <a:t>ALL-IN RATE</a:t>
             </a:r>
-            <a:endParaRPr lang="en-US" sz="900" dirty="0"/>
+            <a:endParaRPr lang="en-US" sz="850" dirty="0"/>
           </a:p>
         </p:txBody>
       </p:sp>
@@ -6226,7 +6646,7 @@
         </p:nvSpPr>
         <p:spPr>
           <a:xfrm>
-            <a:off x="3569132" y="4572000"/>
+            <a:off x="3569132" y="3982720"/>
             <a:ext cx="2234108" cy="457200"/>
           </a:xfrm>
           <a:prstGeom prst="rect">
@@ -6236,7 +6656,9 @@
           <a:ln/>
         </p:spPr>
         <p:txBody>
-          <a:bodyPr wrap="square" lIns="0" tIns="0" rIns="0" bIns="0" rtlCol="0" anchor="t"/>
+          <a:bodyPr wrap="square" lIns="0" tIns="0" rIns="0" bIns="0" rtlCol="0" anchor="t">
+            <a:normAutofit/>
+          </a:bodyPr>
           <a:lstStyle/>
           <a:p>
             <a:pPr indent="0" marL="0">
@@ -6265,8 +6687,8 @@
         </p:nvSpPr>
         <p:spPr>
           <a:xfrm>
-            <a:off x="3569132" y="5047488"/>
-            <a:ext cx="2234108" cy="384048"/>
+            <a:off x="3569132" y="4458208"/>
+            <a:ext cx="2234108" cy="237744"/>
           </a:xfrm>
           <a:prstGeom prst="rect">
             <a:avLst/>
@@ -6307,12 +6729,12 @@
         </p:nvSpPr>
         <p:spPr>
           <a:xfrm>
-            <a:off x="6205576" y="4206240"/>
-            <a:ext cx="2599868" cy="1298448"/>
+            <a:off x="6205576" y="3616960"/>
+            <a:ext cx="2599868" cy="1152144"/>
           </a:xfrm>
           <a:prstGeom prst="roundRect">
             <a:avLst>
-              <a:gd name="adj" fmla="val 4225"/>
+              <a:gd name="adj" fmla="val 4762"/>
             </a:avLst>
           </a:prstGeom>
           <a:solidFill>
@@ -6334,8 +6756,8 @@
         </p:nvSpPr>
         <p:spPr>
           <a:xfrm>
-            <a:off x="6388456" y="4343400"/>
-            <a:ext cx="2234108" cy="219456"/>
+            <a:off x="6388456" y="3735832"/>
+            <a:ext cx="2234108" cy="237744"/>
           </a:xfrm>
           <a:prstGeom prst="rect">
             <a:avLst/>
@@ -6344,14 +6766,14 @@
           <a:ln/>
         </p:spPr>
         <p:txBody>
-          <a:bodyPr wrap="square" lIns="0" tIns="0" rIns="0" bIns="0" rtlCol="0" anchor="ctr"/>
+          <a:bodyPr wrap="square" lIns="0" tIns="0" rIns="0" bIns="0" rtlCol="0" anchor="t"/>
           <a:lstStyle/>
           <a:p>
             <a:pPr indent="0" marL="0">
               <a:buNone/>
             </a:pPr>
             <a:r>
-              <a:rPr lang="en-US" sz="900" b="1" spc="120" kern="0" dirty="0">
+              <a:rPr lang="en-US" sz="850" b="1" spc="100" kern="0" dirty="0">
                 <a:solidFill>
                   <a:srgbClr val="6E7689"/>
                 </a:solidFill>
@@ -6361,7 +6783,7 @@
               </a:rPr>
               <a:t>MINIMUM DSCR</a:t>
             </a:r>
-            <a:endParaRPr lang="en-US" sz="900" dirty="0"/>
+            <a:endParaRPr lang="en-US" sz="850" dirty="0"/>
           </a:p>
         </p:txBody>
       </p:sp>
@@ -6373,7 +6795,7 @@
         </p:nvSpPr>
         <p:spPr>
           <a:xfrm>
-            <a:off x="6388456" y="4572000"/>
+            <a:off x="6388456" y="3982720"/>
             <a:ext cx="2234108" cy="457200"/>
           </a:xfrm>
           <a:prstGeom prst="rect">
@@ -6383,7 +6805,9 @@
           <a:ln/>
         </p:spPr>
         <p:txBody>
-          <a:bodyPr wrap="square" lIns="0" tIns="0" rIns="0" bIns="0" rtlCol="0" anchor="t"/>
+          <a:bodyPr wrap="square" lIns="0" tIns="0" rIns="0" bIns="0" rtlCol="0" anchor="t">
+            <a:normAutofit/>
+          </a:bodyPr>
           <a:lstStyle/>
           <a:p>
             <a:pPr indent="0" marL="0">
@@ -6412,8 +6836,8 @@
         </p:nvSpPr>
         <p:spPr>
           <a:xfrm>
-            <a:off x="6388456" y="5047488"/>
-            <a:ext cx="2234108" cy="384048"/>
+            <a:off x="6388456" y="4458208"/>
+            <a:ext cx="2234108" cy="237744"/>
           </a:xfrm>
           <a:prstGeom prst="rect">
             <a:avLst/>
@@ -6454,12 +6878,12 @@
         </p:nvSpPr>
         <p:spPr>
           <a:xfrm>
-            <a:off x="9024899" y="4206240"/>
-            <a:ext cx="2599868" cy="1298448"/>
+            <a:off x="9024899" y="3616960"/>
+            <a:ext cx="2599868" cy="1152144"/>
           </a:xfrm>
           <a:prstGeom prst="roundRect">
             <a:avLst>
-              <a:gd name="adj" fmla="val 4225"/>
+              <a:gd name="adj" fmla="val 4762"/>
             </a:avLst>
           </a:prstGeom>
           <a:solidFill>
@@ -6481,8 +6905,8 @@
         </p:nvSpPr>
         <p:spPr>
           <a:xfrm>
-            <a:off x="9207779" y="4343400"/>
-            <a:ext cx="2234108" cy="219456"/>
+            <a:off x="9207779" y="3735832"/>
+            <a:ext cx="2234108" cy="237744"/>
           </a:xfrm>
           <a:prstGeom prst="rect">
             <a:avLst/>
@@ -6491,14 +6915,14 @@
           <a:ln/>
         </p:spPr>
         <p:txBody>
-          <a:bodyPr wrap="square" lIns="0" tIns="0" rIns="0" bIns="0" rtlCol="0" anchor="ctr"/>
+          <a:bodyPr wrap="square" lIns="0" tIns="0" rIns="0" bIns="0" rtlCol="0" anchor="t"/>
           <a:lstStyle/>
           <a:p>
             <a:pPr indent="0" marL="0">
               <a:buNone/>
             </a:pPr>
             <a:r>
-              <a:rPr lang="en-US" sz="900" b="1" spc="120" kern="0" dirty="0">
+              <a:rPr lang="en-US" sz="850" b="1" spc="100" kern="0" dirty="0">
                 <a:solidFill>
                   <a:srgbClr val="6E7689"/>
                 </a:solidFill>
@@ -6508,7 +6932,7 @@
               </a:rPr>
               <a:t>DEBT CAPACITY</a:t>
             </a:r>
-            <a:endParaRPr lang="en-US" sz="900" dirty="0"/>
+            <a:endParaRPr lang="en-US" sz="850" dirty="0"/>
           </a:p>
         </p:txBody>
       </p:sp>
@@ -6520,7 +6944,7 @@
         </p:nvSpPr>
         <p:spPr>
           <a:xfrm>
-            <a:off x="9207779" y="4572000"/>
+            <a:off x="9207779" y="3982720"/>
             <a:ext cx="2234108" cy="457200"/>
           </a:xfrm>
           <a:prstGeom prst="rect">
@@ -6530,7 +6954,9 @@
           <a:ln/>
         </p:spPr>
         <p:txBody>
-          <a:bodyPr wrap="square" lIns="0" tIns="0" rIns="0" bIns="0" rtlCol="0" anchor="t"/>
+          <a:bodyPr wrap="square" lIns="0" tIns="0" rIns="0" bIns="0" rtlCol="0" anchor="t">
+            <a:normAutofit/>
+          </a:bodyPr>
           <a:lstStyle/>
           <a:p>
             <a:pPr indent="0" marL="0">
@@ -6559,8 +6985,8 @@
         </p:nvSpPr>
         <p:spPr>
           <a:xfrm>
-            <a:off x="9207779" y="5047488"/>
-            <a:ext cx="2234108" cy="384048"/>
+            <a:off x="9207779" y="4458208"/>
+            <a:ext cx="2234108" cy="237744"/>
           </a:xfrm>
           <a:prstGeom prst="rect">
             <a:avLst/>
@@ -6601,12 +7027,12 @@
         </p:nvSpPr>
         <p:spPr>
           <a:xfrm>
-            <a:off x="566928" y="5760720"/>
-            <a:ext cx="11057839" cy="731520"/>
+            <a:off x="566928" y="5061712"/>
+            <a:ext cx="11057839" cy="1287363"/>
           </a:xfrm>
           <a:prstGeom prst="roundRect">
             <a:avLst>
-              <a:gd name="adj" fmla="val 6250"/>
+              <a:gd name="adj" fmla="val 3551"/>
             </a:avLst>
           </a:prstGeom>
           <a:solidFill>
@@ -6628,8 +7054,8 @@
         </p:nvSpPr>
         <p:spPr>
           <a:xfrm>
-            <a:off x="804672" y="5907024"/>
-            <a:ext cx="2743200" cy="201168"/>
+            <a:off x="804672" y="5171440"/>
+            <a:ext cx="2743200" cy="182880"/>
           </a:xfrm>
           <a:prstGeom prst="rect">
             <a:avLst/>
@@ -6667,8 +7093,8 @@
         </p:nvSpPr>
         <p:spPr>
           <a:xfrm>
-            <a:off x="804672" y="6108192"/>
-            <a:ext cx="10582351" cy="232220"/>
+            <a:off x="804672" y="5354320"/>
+            <a:ext cx="10582351" cy="288595"/>
           </a:xfrm>
           <a:prstGeom prst="rect">
             <a:avLst/>
@@ -6682,12 +7108,12 @@
           <a:p>
             <a:pPr indent="0" marL="0">
               <a:lnSpc>
-                <a:spcPts val="1725"/>
+                <a:spcPts val="2185"/>
               </a:lnSpc>
               <a:buNone/>
             </a:pPr>
             <a:r>
-              <a:rPr lang="en-US" sz="1500" b="1" dirty="0">
+              <a:rPr lang="en-US" sz="1900" b="1" dirty="0">
                 <a:solidFill>
                   <a:srgbClr val="0A1426"/>
                 </a:solidFill>
@@ -6697,7 +7123,7 @@
               </a:rPr>
               <a:t>The facility as briefed does not clear a bank's coverage test</a:t>
             </a:r>
-            <a:endParaRPr lang="en-US" sz="1500" dirty="0"/>
+            <a:endParaRPr lang="en-US" sz="1900" dirty="0"/>
           </a:p>
         </p:txBody>
       </p:sp>
@@ -6709,8 +7135,8 @@
         </p:nvSpPr>
         <p:spPr>
           <a:xfrm>
-            <a:off x="804672" y="6413563"/>
-            <a:ext cx="10582351" cy="182880"/>
+            <a:off x="804672" y="5697779"/>
+            <a:ext cx="10582351" cy="578145"/>
           </a:xfrm>
           <a:prstGeom prst="rect">
             <a:avLst/>
@@ -6724,12 +7150,12 @@
           <a:p>
             <a:pPr indent="0" marL="0">
               <a:lnSpc>
-                <a:spcPts val="1207"/>
+                <a:spcPts val="1704"/>
               </a:lnSpc>
               <a:buNone/>
             </a:pPr>
             <a:r>
-              <a:rPr lang="en-US" sz="850" dirty="0">
+              <a:rPr lang="en-US" sz="1200" dirty="0">
                 <a:solidFill>
                   <a:srgbClr val="3B4660"/>
                 </a:solidFill>
@@ -6737,9 +7163,9 @@
                 <a:ea typeface="Calibri" pitchFamily="34" charset="-122"/>
                 <a:cs typeface="Calibri" pitchFamily="34" charset="-120"/>
               </a:rPr>
-              <a:t>At ₹4.17 Cr the minimum post-moratorium DSCR is 1.09×; banks underwrite to 1.30× and prefer 1.50×. The workable structure is a sanctioned limit of ₹4.17 Cr with a committed component of ₹2.81 Cr and the balance uncommitted. Presenting two full years of opex to a credit committee as committed term money will get the proposal declined.</a:t>
+              <a:t>At ₹4.17 Cr the minimum post-moratorium DSCR is 1.09×; banks underwrite to 1.30×. The workable structure sanctions ₹4.17 Cr but commits ₹2.81 Cr. Two full years of opex presented as committed term money will be declined.</a:t>
             </a:r>
-            <a:endParaRPr lang="en-US" sz="850" dirty="0"/>
+            <a:endParaRPr lang="en-US" sz="1200" dirty="0"/>
           </a:p>
         </p:txBody>
       </p:sp>
@@ -6920,8 +7346,8 @@
         </p:nvSpPr>
         <p:spPr>
           <a:xfrm>
-            <a:off x="566928" y="1005840"/>
-            <a:ext cx="11057839" cy="512064"/>
+            <a:off x="566928" y="950976"/>
+            <a:ext cx="11057839" cy="231140"/>
           </a:xfrm>
           <a:prstGeom prst="rect">
             <a:avLst/>
@@ -6935,12 +7361,12 @@
           <a:p>
             <a:pPr indent="0" marL="0">
               <a:lnSpc>
-                <a:spcPts val="1900"/>
+                <a:spcPts val="1750"/>
               </a:lnSpc>
               <a:buNone/>
             </a:pPr>
             <a:r>
-              <a:rPr lang="en-US" sz="1350" dirty="0">
+              <a:rPr lang="en-US" sz="1250" dirty="0">
                 <a:solidFill>
                   <a:srgbClr val="3B4660"/>
                 </a:solidFill>
@@ -6950,7 +7376,7 @@
               </a:rPr>
               <a:t>Money in as debt, a coupon while the park ramps, compulsory conversion into equity on a fixed formula.</a:t>
             </a:r>
-            <a:endParaRPr lang="en-US" sz="1350" dirty="0"/>
+            <a:endParaRPr lang="en-US" sz="1250" dirty="0"/>
           </a:p>
         </p:txBody>
       </p:sp>
@@ -6969,7 +7395,7 @@
           </p:nvPr>
         </p:nvGraphicFramePr>
         <p:xfrm>
-          <a:off x="566928" y="1627632"/>
+          <a:off x="566928" y="1310132"/>
           <a:ext cx="11057839" cy="914400"/>
         </p:xfrm>
         <a:graphic>
@@ -7820,12 +8246,12 @@
         </p:nvSpPr>
         <p:spPr>
           <a:xfrm>
-            <a:off x="566928" y="4041648"/>
-            <a:ext cx="11057839" cy="2103120"/>
+            <a:off x="566928" y="3724148"/>
+            <a:ext cx="11057839" cy="2637749"/>
           </a:xfrm>
           <a:prstGeom prst="roundRect">
             <a:avLst>
-              <a:gd name="adj" fmla="val 2174"/>
+              <a:gd name="adj" fmla="val 1733"/>
             </a:avLst>
           </a:prstGeom>
           <a:solidFill>
@@ -7847,8 +8273,8 @@
         </p:nvSpPr>
         <p:spPr>
           <a:xfrm>
-            <a:off x="804672" y="4187952"/>
-            <a:ext cx="2743200" cy="201168"/>
+            <a:off x="804672" y="3833876"/>
+            <a:ext cx="2743200" cy="182880"/>
           </a:xfrm>
           <a:prstGeom prst="rect">
             <a:avLst/>
@@ -7886,8 +8312,8 @@
         </p:nvSpPr>
         <p:spPr>
           <a:xfrm>
-            <a:off x="804672" y="4389120"/>
-            <a:ext cx="10582351" cy="263182"/>
+            <a:off x="804672" y="4016756"/>
+            <a:ext cx="10582351" cy="288595"/>
           </a:xfrm>
           <a:prstGeom prst="rect">
             <a:avLst/>
@@ -7901,12 +8327,12 @@
           <a:p>
             <a:pPr indent="0" marL="0">
               <a:lnSpc>
-                <a:spcPts val="1955"/>
+                <a:spcPts val="2185"/>
               </a:lnSpc>
               <a:buNone/>
             </a:pPr>
             <a:r>
-              <a:rPr lang="en-US" sz="1700" b="1" dirty="0">
+              <a:rPr lang="en-US" sz="1900" b="1" dirty="0">
                 <a:solidFill>
                   <a:srgbClr val="0A1426"/>
                 </a:solidFill>
@@ -7916,7 +8342,7 @@
               </a:rPr>
               <a:t>Three separate reasons this is the worst of the three here</a:t>
             </a:r>
-            <a:endParaRPr lang="en-US" sz="1700" dirty="0"/>
+            <a:endParaRPr lang="en-US" sz="1900" dirty="0"/>
           </a:p>
         </p:txBody>
       </p:sp>
@@ -7928,8 +8354,8 @@
         </p:nvSpPr>
         <p:spPr>
           <a:xfrm>
-            <a:off x="804672" y="4725454"/>
-            <a:ext cx="10582351" cy="1346162"/>
+            <a:off x="804672" y="4360215"/>
+            <a:ext cx="10582351" cy="1928531"/>
           </a:xfrm>
           <a:prstGeom prst="rect">
             <a:avLst/>
@@ -7943,12 +8369,12 @@
           <a:p>
             <a:pPr indent="0" marL="0">
               <a:lnSpc>
-                <a:spcPts val="1420"/>
+                <a:spcPts val="1704"/>
               </a:lnSpc>
               <a:buNone/>
             </a:pPr>
             <a:r>
-              <a:rPr lang="en-US" sz="1000" dirty="0">
+              <a:rPr lang="en-US" sz="1200" dirty="0">
                 <a:solidFill>
                   <a:srgbClr val="3B4660"/>
                 </a:solidFill>
@@ -7958,26 +8384,26 @@
               </a:rPr>
               <a:t>Cash — the coupon falls due in years 1 to 4, precisely the years the project loses money at EBITDA. ₹0.75 Cr has to come from somewhere, and it is not coming from the gate.</a:t>
             </a:r>
-            <a:endParaRPr lang="en-US" sz="1000" dirty="0"/>
+            <a:endParaRPr lang="en-US" sz="1200" dirty="0"/>
           </a:p>
           <a:p>
             <a:pPr indent="0" marL="0">
               <a:lnSpc>
-                <a:spcPts val="1420"/>
+                <a:spcPts val="1704"/>
               </a:lnSpc>
               <a:buNone/>
             </a:pPr>
-            <a:endParaRPr lang="en-US" sz="1000" dirty="0"/>
+            <a:endParaRPr lang="en-US" sz="1200" dirty="0"/>
           </a:p>
           <a:p>
             <a:pPr indent="0" marL="0">
               <a:lnSpc>
-                <a:spcPts val="1420"/>
+                <a:spcPts val="1704"/>
               </a:lnSpc>
               <a:buNone/>
             </a:pPr>
             <a:r>
-              <a:rPr lang="en-US" sz="1000" dirty="0">
+              <a:rPr lang="en-US" sz="1200" dirty="0">
                 <a:solidFill>
                   <a:srgbClr val="3B4660"/>
                 </a:solidFill>
@@ -7987,26 +8413,26 @@
               </a:rPr>
               <a:t>Consent — conversion changes the shareholding pattern, which needs BDA's prior written approval inside the lock-in. An instrument that must convert on a fixed date, into a change a third party can refuse to approve, is a structural mismatch.</a:t>
             </a:r>
-            <a:endParaRPr lang="en-US" sz="1000" dirty="0"/>
+            <a:endParaRPr lang="en-US" sz="1200" dirty="0"/>
           </a:p>
           <a:p>
             <a:pPr indent="0" marL="0">
               <a:lnSpc>
-                <a:spcPts val="1420"/>
+                <a:spcPts val="1704"/>
               </a:lnSpc>
               <a:buNone/>
             </a:pPr>
-            <a:endParaRPr lang="en-US" sz="1000" dirty="0"/>
+            <a:endParaRPr lang="en-US" sz="1200" dirty="0"/>
           </a:p>
           <a:p>
             <a:pPr indent="0" marL="0">
               <a:lnSpc>
-                <a:spcPts val="1420"/>
+                <a:spcPts val="1704"/>
               </a:lnSpc>
               <a:buNone/>
             </a:pPr>
             <a:r>
-              <a:rPr lang="en-US" sz="1000" dirty="0">
+              <a:rPr lang="en-US" sz="1200" dirty="0">
                 <a:solidFill>
                   <a:srgbClr val="3B4660"/>
                 </a:solidFill>
@@ -8016,7 +8442,7 @@
               </a:rPr>
               <a:t>Leverage — until it converts a CCD is borrowing. Layered on VAPPL's 3.04× gearing it breaches the covenant on any CGTMSE facility running alongside it.</a:t>
             </a:r>
-            <a:endParaRPr lang="en-US" sz="1000" dirty="0"/>
+            <a:endParaRPr lang="en-US" sz="1200" dirty="0"/>
           </a:p>
         </p:txBody>
       </p:sp>
@@ -9923,11 +10349,11 @@
         <p:spPr>
           <a:xfrm>
             <a:off x="566928" y="4224528"/>
-            <a:ext cx="11057839" cy="1870083"/>
+            <a:ext cx="11057839" cy="1737492"/>
           </a:xfrm>
           <a:prstGeom prst="roundRect">
             <a:avLst>
-              <a:gd name="adj" fmla="val 2445"/>
+              <a:gd name="adj" fmla="val 2631"/>
             </a:avLst>
           </a:prstGeom>
           <a:solidFill>
@@ -9949,8 +10375,8 @@
         </p:nvSpPr>
         <p:spPr>
           <a:xfrm>
-            <a:off x="804672" y="4370832"/>
-            <a:ext cx="2743200" cy="201168"/>
+            <a:off x="804672" y="4334256"/>
+            <a:ext cx="2743200" cy="182880"/>
           </a:xfrm>
           <a:prstGeom prst="rect">
             <a:avLst/>
@@ -9988,8 +10414,8 @@
         </p:nvSpPr>
         <p:spPr>
           <a:xfrm>
-            <a:off x="804672" y="4572000"/>
-            <a:ext cx="10582351" cy="294145"/>
+            <a:off x="804672" y="4517136"/>
+            <a:ext cx="10582351" cy="288595"/>
           </a:xfrm>
           <a:prstGeom prst="rect">
             <a:avLst/>
@@ -10030,8 +10456,8 @@
         </p:nvSpPr>
         <p:spPr>
           <a:xfrm>
-            <a:off x="804672" y="4939297"/>
-            <a:ext cx="10582351" cy="1082162"/>
+            <a:off x="804672" y="4860595"/>
+            <a:ext cx="10582351" cy="1028273"/>
           </a:xfrm>
           <a:prstGeom prst="rect">
             <a:avLst/>
@@ -10945,8 +11371,8 @@
         </p:nvSpPr>
         <p:spPr>
           <a:xfrm>
-            <a:off x="804672" y="603504"/>
-            <a:ext cx="2743200" cy="201168"/>
+            <a:off x="804672" y="566928"/>
+            <a:ext cx="2743200" cy="182880"/>
           </a:xfrm>
           <a:prstGeom prst="rect">
             <a:avLst/>
@@ -10984,8 +11410,8 @@
         </p:nvSpPr>
         <p:spPr>
           <a:xfrm>
-            <a:off x="804672" y="804672"/>
-            <a:ext cx="10582351" cy="294145"/>
+            <a:off x="804672" y="749808"/>
+            <a:ext cx="10582351" cy="288595"/>
           </a:xfrm>
           <a:prstGeom prst="rect">
             <a:avLst/>
@@ -11026,8 +11452,8 @@
         </p:nvSpPr>
         <p:spPr>
           <a:xfrm>
-            <a:off x="804672" y="1171969"/>
-            <a:ext cx="10582351" cy="1863839"/>
+            <a:off x="804672" y="1093267"/>
+            <a:ext cx="10582351" cy="1942541"/>
           </a:xfrm>
           <a:prstGeom prst="rect">
             <a:avLst/>
@@ -11098,11 +11524,11 @@
         <p:spPr>
           <a:xfrm>
             <a:off x="566928" y="3383280"/>
-            <a:ext cx="3539642" cy="1371600"/>
+            <a:ext cx="3539642" cy="1298448"/>
           </a:xfrm>
           <a:prstGeom prst="roundRect">
             <a:avLst>
-              <a:gd name="adj" fmla="val 4000"/>
+              <a:gd name="adj" fmla="val 4225"/>
             </a:avLst>
           </a:prstGeom>
           <a:solidFill>
@@ -11124,8 +11550,8 @@
         </p:nvSpPr>
         <p:spPr>
           <a:xfrm>
-            <a:off x="749808" y="3520440"/>
-            <a:ext cx="3173882" cy="219456"/>
+            <a:off x="749808" y="3502152"/>
+            <a:ext cx="3173882" cy="237744"/>
           </a:xfrm>
           <a:prstGeom prst="rect">
             <a:avLst/>
@@ -11134,14 +11560,14 @@
           <a:ln/>
         </p:spPr>
         <p:txBody>
-          <a:bodyPr wrap="square" lIns="0" tIns="0" rIns="0" bIns="0" rtlCol="0" anchor="ctr"/>
+          <a:bodyPr wrap="square" lIns="0" tIns="0" rIns="0" bIns="0" rtlCol="0" anchor="t"/>
           <a:lstStyle/>
           <a:p>
             <a:pPr indent="0" marL="0">
               <a:buNone/>
             </a:pPr>
             <a:r>
-              <a:rPr lang="en-US" sz="900" b="1" spc="120" kern="0" dirty="0">
+              <a:rPr lang="en-US" sz="850" b="1" spc="100" kern="0" dirty="0">
                 <a:solidFill>
                   <a:srgbClr val="6E7689"/>
                 </a:solidFill>
@@ -11151,7 +11577,7 @@
               </a:rPr>
               <a:t>BASE CASE PROJECT IRR</a:t>
             </a:r>
-            <a:endParaRPr lang="en-US" sz="900" dirty="0"/>
+            <a:endParaRPr lang="en-US" sz="850" dirty="0"/>
           </a:p>
         </p:txBody>
       </p:sp>
@@ -11173,7 +11599,9 @@
           <a:ln/>
         </p:spPr>
         <p:txBody>
-          <a:bodyPr wrap="square" lIns="0" tIns="0" rIns="0" bIns="0" rtlCol="0" anchor="t"/>
+          <a:bodyPr wrap="square" lIns="0" tIns="0" rIns="0" bIns="0" rtlCol="0" anchor="t">
+            <a:normAutofit/>
+          </a:bodyPr>
           <a:lstStyle/>
           <a:p>
             <a:pPr indent="0" marL="0">
@@ -11203,7 +11631,7 @@
         <p:spPr>
           <a:xfrm>
             <a:off x="749808" y="4224528"/>
-            <a:ext cx="3173882" cy="457200"/>
+            <a:ext cx="3173882" cy="384048"/>
           </a:xfrm>
           <a:prstGeom prst="rect">
             <a:avLst/>
@@ -11245,11 +11673,11 @@
         <p:spPr>
           <a:xfrm>
             <a:off x="4326026" y="3383280"/>
-            <a:ext cx="3539642" cy="1371600"/>
+            <a:ext cx="3539642" cy="1298448"/>
           </a:xfrm>
           <a:prstGeom prst="roundRect">
             <a:avLst>
-              <a:gd name="adj" fmla="val 4000"/>
+              <a:gd name="adj" fmla="val 4225"/>
             </a:avLst>
           </a:prstGeom>
           <a:solidFill>
@@ -11271,8 +11699,8 @@
         </p:nvSpPr>
         <p:spPr>
           <a:xfrm>
-            <a:off x="4508906" y="3520440"/>
-            <a:ext cx="3173882" cy="219456"/>
+            <a:off x="4508906" y="3502152"/>
+            <a:ext cx="3173882" cy="237744"/>
           </a:xfrm>
           <a:prstGeom prst="rect">
             <a:avLst/>
@@ -11281,14 +11709,14 @@
           <a:ln/>
         </p:spPr>
         <p:txBody>
-          <a:bodyPr wrap="square" lIns="0" tIns="0" rIns="0" bIns="0" rtlCol="0" anchor="ctr"/>
+          <a:bodyPr wrap="square" lIns="0" tIns="0" rIns="0" bIns="0" rtlCol="0" anchor="t"/>
           <a:lstStyle/>
           <a:p>
             <a:pPr indent="0" marL="0">
               <a:buNone/>
             </a:pPr>
             <a:r>
-              <a:rPr lang="en-US" sz="900" b="1" spc="120" kern="0" dirty="0">
+              <a:rPr lang="en-US" sz="850" b="1" spc="100" kern="0" dirty="0">
                 <a:solidFill>
                   <a:srgbClr val="6E7689"/>
                 </a:solidFill>
@@ -11298,7 +11726,7 @@
               </a:rPr>
               <a:t>ON BDA'S OWN ASSUMPTION</a:t>
             </a:r>
-            <a:endParaRPr lang="en-US" sz="900" dirty="0"/>
+            <a:endParaRPr lang="en-US" sz="850" dirty="0"/>
           </a:p>
         </p:txBody>
       </p:sp>
@@ -11320,7 +11748,9 @@
           <a:ln/>
         </p:spPr>
         <p:txBody>
-          <a:bodyPr wrap="square" lIns="0" tIns="0" rIns="0" bIns="0" rtlCol="0" anchor="t"/>
+          <a:bodyPr wrap="square" lIns="0" tIns="0" rIns="0" bIns="0" rtlCol="0" anchor="t">
+            <a:normAutofit/>
+          </a:bodyPr>
           <a:lstStyle/>
           <a:p>
             <a:pPr indent="0" marL="0">
@@ -11350,7 +11780,7 @@
         <p:spPr>
           <a:xfrm>
             <a:off x="4508906" y="4224528"/>
-            <a:ext cx="3173882" cy="457200"/>
+            <a:ext cx="3173882" cy="384048"/>
           </a:xfrm>
           <a:prstGeom prst="rect">
             <a:avLst/>
@@ -11392,11 +11822,11 @@
         <p:spPr>
           <a:xfrm>
             <a:off x="8085125" y="3383280"/>
-            <a:ext cx="3539642" cy="1371600"/>
+            <a:ext cx="3539642" cy="1298448"/>
           </a:xfrm>
           <a:prstGeom prst="roundRect">
             <a:avLst>
-              <a:gd name="adj" fmla="val 4000"/>
+              <a:gd name="adj" fmla="val 4225"/>
             </a:avLst>
           </a:prstGeom>
           <a:solidFill>
@@ -11418,8 +11848,8 @@
         </p:nvSpPr>
         <p:spPr>
           <a:xfrm>
-            <a:off x="8268005" y="3520440"/>
-            <a:ext cx="3173882" cy="219456"/>
+            <a:off x="8268005" y="3502152"/>
+            <a:ext cx="3173882" cy="237744"/>
           </a:xfrm>
           <a:prstGeom prst="rect">
             <a:avLst/>
@@ -11428,14 +11858,14 @@
           <a:ln/>
         </p:spPr>
         <p:txBody>
-          <a:bodyPr wrap="square" lIns="0" tIns="0" rIns="0" bIns="0" rtlCol="0" anchor="ctr"/>
+          <a:bodyPr wrap="square" lIns="0" tIns="0" rIns="0" bIns="0" rtlCol="0" anchor="t"/>
           <a:lstStyle/>
           <a:p>
             <a:pPr indent="0" marL="0">
               <a:buNone/>
             </a:pPr>
             <a:r>
-              <a:rPr lang="en-US" sz="900" b="1" spc="120" kern="0" dirty="0">
+              <a:rPr lang="en-US" sz="850" b="1" spc="100" kern="0" dirty="0">
                 <a:solidFill>
                   <a:srgbClr val="6E7689"/>
                 </a:solidFill>
@@ -11445,7 +11875,7 @@
               </a:rPr>
               <a:t>THE WHOLE DIFFERENCE</a:t>
             </a:r>
-            <a:endParaRPr lang="en-US" sz="900" dirty="0"/>
+            <a:endParaRPr lang="en-US" sz="850" dirty="0"/>
           </a:p>
         </p:txBody>
       </p:sp>
@@ -11467,7 +11897,9 @@
           <a:ln/>
         </p:spPr>
         <p:txBody>
-          <a:bodyPr wrap="square" lIns="0" tIns="0" rIns="0" bIns="0" rtlCol="0" anchor="t"/>
+          <a:bodyPr wrap="square" lIns="0" tIns="0" rIns="0" bIns="0" rtlCol="0" anchor="t">
+            <a:normAutofit/>
+          </a:bodyPr>
           <a:lstStyle/>
           <a:p>
             <a:pPr indent="0" marL="0">
@@ -11497,7 +11929,7 @@
         <p:spPr>
           <a:xfrm>
             <a:off x="8268005" y="4224528"/>
-            <a:ext cx="3173882" cy="457200"/>
+            <a:ext cx="3173882" cy="384048"/>
           </a:xfrm>
           <a:prstGeom prst="rect">
             <a:avLst/>
@@ -11539,11 +11971,11 @@
         <p:spPr>
           <a:xfrm>
             <a:off x="566928" y="4956048"/>
-            <a:ext cx="11057839" cy="1298448"/>
+            <a:ext cx="11057839" cy="1287363"/>
           </a:xfrm>
           <a:prstGeom prst="roundRect">
             <a:avLst>
-              <a:gd name="adj" fmla="val 3521"/>
+              <a:gd name="adj" fmla="val 3551"/>
             </a:avLst>
           </a:prstGeom>
           <a:solidFill>
@@ -11565,8 +11997,8 @@
         </p:nvSpPr>
         <p:spPr>
           <a:xfrm>
-            <a:off x="804672" y="5102352"/>
-            <a:ext cx="2743200" cy="201168"/>
+            <a:off x="804672" y="5065776"/>
+            <a:ext cx="2743200" cy="182880"/>
           </a:xfrm>
           <a:prstGeom prst="rect">
             <a:avLst/>
@@ -11604,8 +12036,8 @@
         </p:nvSpPr>
         <p:spPr>
           <a:xfrm>
-            <a:off x="804672" y="5303520"/>
-            <a:ext cx="10582351" cy="232220"/>
+            <a:off x="804672" y="5248656"/>
+            <a:ext cx="10582351" cy="288595"/>
           </a:xfrm>
           <a:prstGeom prst="rect">
             <a:avLst/>
@@ -11619,12 +12051,12 @@
           <a:p>
             <a:pPr indent="0" marL="0">
               <a:lnSpc>
-                <a:spcPts val="1725"/>
+                <a:spcPts val="2185"/>
               </a:lnSpc>
               <a:buNone/>
             </a:pPr>
             <a:r>
-              <a:rPr lang="en-US" sz="1500" b="1" dirty="0">
+              <a:rPr lang="en-US" sz="1900" b="1" dirty="0">
                 <a:solidFill>
                   <a:srgbClr val="0A1426"/>
                 </a:solidFill>
@@ -11634,7 +12066,7 @@
               </a:rPr>
               <a:t>What would change the recommendation</a:t>
             </a:r>
-            <a:endParaRPr lang="en-US" sz="1500" dirty="0"/>
+            <a:endParaRPr lang="en-US" sz="1900" dirty="0"/>
           </a:p>
         </p:txBody>
       </p:sp>
@@ -11646,8 +12078,8 @@
         </p:nvSpPr>
         <p:spPr>
           <a:xfrm>
-            <a:off x="804672" y="5608892"/>
-            <a:ext cx="10582351" cy="572453"/>
+            <a:off x="804672" y="5592115"/>
+            <a:ext cx="10582351" cy="578145"/>
           </a:xfrm>
           <a:prstGeom prst="rect">
             <a:avLst/>
@@ -11661,12 +12093,12 @@
           <a:p>
             <a:pPr indent="0" marL="0">
               <a:lnSpc>
-                <a:spcPts val="1278"/>
+                <a:spcPts val="1704"/>
               </a:lnSpc>
               <a:buNone/>
             </a:pPr>
             <a:r>
-              <a:rPr lang="en-US" sz="900" dirty="0">
+              <a:rPr lang="en-US" sz="1200" dirty="0">
                 <a:solidFill>
                   <a:srgbClr val="3B4660"/>
                 </a:solidFill>
@@ -11674,9 +12106,9 @@
                 <a:ea typeface="Calibri" pitchFamily="34" charset="-122"/>
                 <a:cs typeface="Calibri" pitchFamily="34" charset="-120"/>
               </a:rPr>
-              <a:t>Written confirmation from BDA on three points moves this from marginal to clearly fundable: the show's capacity, daily slot count and any soft-launch footfall data; an agreed tariff with a contractual escalation path rather than annual discretion; and resolution of the five-versus-seven-year lock-in conflict. All three are legitimate pre-bid queries and all three are free to ask.</a:t>
+              <a:t>Three written answers from BDA move this from marginal to clearly fundable: the show's capacity, slot count and any soft-launch footfall; an agreed tariff with a contractual escalation path; and resolution of the five-versus-seven-year lock-in conflict. All three are free to ask.</a:t>
             </a:r>
-            <a:endParaRPr lang="en-US" sz="900" dirty="0"/>
+            <a:endParaRPr lang="en-US" sz="1200" dirty="0"/>
           </a:p>
         </p:txBody>
       </p:sp>
@@ -11857,8 +12289,8 @@
         </p:nvSpPr>
         <p:spPr>
           <a:xfrm>
-            <a:off x="566928" y="1005840"/>
-            <a:ext cx="11057839" cy="512064"/>
+            <a:off x="566928" y="950976"/>
+            <a:ext cx="11057839" cy="462280"/>
           </a:xfrm>
           <a:prstGeom prst="rect">
             <a:avLst/>
@@ -11872,12 +12304,12 @@
           <a:p>
             <a:pPr indent="0" marL="0">
               <a:lnSpc>
-                <a:spcPts val="1900"/>
+                <a:spcPts val="1750"/>
               </a:lnSpc>
               <a:buNone/>
             </a:pPr>
             <a:r>
-              <a:rPr lang="en-US" sz="1350" dirty="0">
+              <a:rPr lang="en-US" sz="1250" dirty="0">
                 <a:solidFill>
                   <a:srgbClr val="3B4660"/>
                 </a:solidFill>
@@ -11887,7 +12319,7 @@
               </a:rPr>
               <a:t>BDA has built a 33,000 square metre thematic park around the Ramayana. The centrepiece is a 51-foot bronze Lord Ram by Ram Sutar, with a 3D holographic laser and sound programme projected onto the statue.</a:t>
             </a:r>
-            <a:endParaRPr lang="en-US" sz="1350" dirty="0"/>
+            <a:endParaRPr lang="en-US" sz="1250" dirty="0"/>
           </a:p>
         </p:txBody>
       </p:sp>
@@ -11906,7 +12338,7 @@
           </p:nvPr>
         </p:nvGraphicFramePr>
         <p:xfrm>
-          <a:off x="566928" y="1627632"/>
+          <a:off x="566928" y="1541272"/>
           <a:ext cx="11057839" cy="914400"/>
         </p:xfrm>
         <a:graphic>
@@ -13033,12 +13465,12 @@
         </p:nvSpPr>
         <p:spPr>
           <a:xfrm>
-            <a:off x="566928" y="4594733"/>
-            <a:ext cx="11057839" cy="1696339"/>
+            <a:off x="566928" y="4501388"/>
+            <a:ext cx="11057839" cy="1853590"/>
           </a:xfrm>
           <a:prstGeom prst="roundRect">
             <a:avLst>
-              <a:gd name="adj" fmla="val 2695"/>
+              <a:gd name="adj" fmla="val 2467"/>
             </a:avLst>
           </a:prstGeom>
           <a:solidFill>
@@ -13060,8 +13492,8 @@
         </p:nvSpPr>
         <p:spPr>
           <a:xfrm>
-            <a:off x="804672" y="4741037"/>
-            <a:ext cx="2743200" cy="201168"/>
+            <a:off x="804672" y="4611116"/>
+            <a:ext cx="2743200" cy="182880"/>
           </a:xfrm>
           <a:prstGeom prst="rect">
             <a:avLst/>
@@ -13099,8 +13531,8 @@
         </p:nvSpPr>
         <p:spPr>
           <a:xfrm>
-            <a:off x="804672" y="4942205"/>
-            <a:ext cx="10582351" cy="232220"/>
+            <a:off x="804672" y="4793996"/>
+            <a:ext cx="10582351" cy="273406"/>
           </a:xfrm>
           <a:prstGeom prst="rect">
             <a:avLst/>
@@ -13114,12 +13546,12 @@
           <a:p>
             <a:pPr indent="0" marL="0">
               <a:lnSpc>
-                <a:spcPts val="1725"/>
+                <a:spcPts val="2070"/>
               </a:lnSpc>
               <a:buNone/>
             </a:pPr>
             <a:r>
-              <a:rPr lang="en-US" sz="1500" b="1" dirty="0">
+              <a:rPr lang="en-US" sz="1800" b="1" dirty="0">
                 <a:solidFill>
                   <a:srgbClr val="0A1426"/>
                 </a:solidFill>
@@ -13129,7 +13561,7 @@
               </a:rPr>
               <a:t>Two clauses that decide how this can be financed</a:t>
             </a:r>
-            <a:endParaRPr lang="en-US" sz="1500" dirty="0"/>
+            <a:endParaRPr lang="en-US" sz="1800" dirty="0"/>
           </a:p>
         </p:txBody>
       </p:sp>
@@ -13141,8 +13573,8 @@
         </p:nvSpPr>
         <p:spPr>
           <a:xfrm>
-            <a:off x="804672" y="5247576"/>
-            <a:ext cx="10582351" cy="970344"/>
+            <a:off x="804672" y="5122266"/>
+            <a:ext cx="10582351" cy="1159561"/>
           </a:xfrm>
           <a:prstGeom prst="rect">
             <a:avLst/>
@@ -13156,12 +13588,12 @@
           <a:p>
             <a:pPr indent="0" marL="0">
               <a:lnSpc>
-                <a:spcPts val="1207"/>
+                <a:spcPts val="1562"/>
               </a:lnSpc>
               <a:buNone/>
             </a:pPr>
             <a:r>
-              <a:rPr lang="en-US" sz="850" dirty="0">
+              <a:rPr lang="en-US" sz="1100" dirty="0">
                 <a:solidFill>
                   <a:srgbClr val="3B4660"/>
                 </a:solidFill>
@@ -13171,26 +13603,26 @@
               </a:rPr>
               <a:t>No charge over the asset. The Vatika cannot be mortgaged, pledged or hypothecated to any bank, FI or NBFC. That removes conventional project finance and leaves a collateral-free CGTMSE facility as the only sensible debt route — the guarantee substitutes for the security the contract forbids.</a:t>
             </a:r>
-            <a:endParaRPr lang="en-US" sz="850" dirty="0"/>
+            <a:endParaRPr lang="en-US" sz="1100" dirty="0"/>
           </a:p>
           <a:p>
             <a:pPr indent="0" marL="0">
               <a:lnSpc>
-                <a:spcPts val="1207"/>
+                <a:spcPts val="1562"/>
               </a:lnSpc>
               <a:buNone/>
             </a:pPr>
-            <a:endParaRPr lang="en-US" sz="850" dirty="0"/>
+            <a:endParaRPr lang="en-US" sz="1100" dirty="0"/>
           </a:p>
           <a:p>
             <a:pPr indent="0" marL="0">
               <a:lnSpc>
-                <a:spcPts val="1207"/>
+                <a:spcPts val="1562"/>
               </a:lnSpc>
               <a:buNone/>
             </a:pPr>
             <a:r>
-              <a:rPr lang="en-US" sz="850" dirty="0">
+              <a:rPr lang="en-US" sz="1100" dirty="0">
                 <a:solidFill>
                   <a:srgbClr val="3B4660"/>
                 </a:solidFill>
@@ -13200,7 +13632,7 @@
               </a:rPr>
               <a:t>No change of control without consent. No change in ownership pattern, shareholding structure or controlling interest during the lock-in without BDA's prior written approval. That is a condition precedent on Options A and C, not a footnote.</a:t>
             </a:r>
-            <a:endParaRPr lang="en-US" sz="850" dirty="0"/>
+            <a:endParaRPr lang="en-US" sz="1100" dirty="0"/>
           </a:p>
         </p:txBody>
       </p:sp>
@@ -13381,8 +13813,8 @@
         </p:nvSpPr>
         <p:spPr>
           <a:xfrm>
-            <a:off x="566928" y="1005840"/>
-            <a:ext cx="11057839" cy="512064"/>
+            <a:off x="566928" y="950976"/>
+            <a:ext cx="11057839" cy="462280"/>
           </a:xfrm>
           <a:prstGeom prst="rect">
             <a:avLst/>
@@ -13396,12 +13828,12 @@
           <a:p>
             <a:pPr indent="0" marL="0">
               <a:lnSpc>
-                <a:spcPts val="1900"/>
+                <a:spcPts val="1750"/>
               </a:lnSpc>
               <a:buNone/>
             </a:pPr>
             <a:r>
-              <a:rPr lang="en-US" sz="1350" dirty="0">
+              <a:rPr lang="en-US" sz="1250" dirty="0">
                 <a:solidFill>
                   <a:srgbClr val="3B4660"/>
                 </a:solidFill>
@@ -13411,7 +13843,7 @@
               </a:rPr>
               <a:t>The brief was two years of opex. Sized literally that is ₹4.17 Cr. The project's capacity to service debt is ₹2.81 Cr. The gap between those two numbers is the whole question.</a:t>
             </a:r>
-            <a:endParaRPr lang="en-US" sz="1350" dirty="0"/>
+            <a:endParaRPr lang="en-US" sz="1250" dirty="0"/>
           </a:p>
         </p:txBody>
       </p:sp>
@@ -13423,12 +13855,12 @@
         </p:nvSpPr>
         <p:spPr>
           <a:xfrm>
-            <a:off x="566928" y="1627632"/>
-            <a:ext cx="3539642" cy="1225296"/>
+            <a:off x="566928" y="1541272"/>
+            <a:ext cx="3539642" cy="1152144"/>
           </a:xfrm>
           <a:prstGeom prst="roundRect">
             <a:avLst>
-              <a:gd name="adj" fmla="val 4478"/>
+              <a:gd name="adj" fmla="val 4762"/>
             </a:avLst>
           </a:prstGeom>
           <a:solidFill>
@@ -13450,8 +13882,8 @@
         </p:nvSpPr>
         <p:spPr>
           <a:xfrm>
-            <a:off x="749808" y="1764792"/>
-            <a:ext cx="3173882" cy="219456"/>
+            <a:off x="749808" y="1660144"/>
+            <a:ext cx="3173882" cy="237744"/>
           </a:xfrm>
           <a:prstGeom prst="rect">
             <a:avLst/>
@@ -13460,14 +13892,14 @@
           <a:ln/>
         </p:spPr>
         <p:txBody>
-          <a:bodyPr wrap="square" lIns="0" tIns="0" rIns="0" bIns="0" rtlCol="0" anchor="ctr"/>
+          <a:bodyPr wrap="square" lIns="0" tIns="0" rIns="0" bIns="0" rtlCol="0" anchor="t"/>
           <a:lstStyle/>
           <a:p>
             <a:pPr indent="0" marL="0">
               <a:buNone/>
             </a:pPr>
             <a:r>
-              <a:rPr lang="en-US" sz="900" b="1" spc="120" kern="0" dirty="0">
+              <a:rPr lang="en-US" sz="850" b="1" spc="100" kern="0" dirty="0">
                 <a:solidFill>
                   <a:srgbClr val="6E7689"/>
                 </a:solidFill>
@@ -13477,7 +13909,7 @@
               </a:rPr>
               <a:t>FACILITY AS BRIEFED</a:t>
             </a:r>
-            <a:endParaRPr lang="en-US" sz="900" dirty="0"/>
+            <a:endParaRPr lang="en-US" sz="850" dirty="0"/>
           </a:p>
         </p:txBody>
       </p:sp>
@@ -13489,7 +13921,7 @@
         </p:nvSpPr>
         <p:spPr>
           <a:xfrm>
-            <a:off x="749808" y="1993392"/>
+            <a:off x="749808" y="1907032"/>
             <a:ext cx="3173882" cy="457200"/>
           </a:xfrm>
           <a:prstGeom prst="rect">
@@ -13499,7 +13931,9 @@
           <a:ln/>
         </p:spPr>
         <p:txBody>
-          <a:bodyPr wrap="square" lIns="0" tIns="0" rIns="0" bIns="0" rtlCol="0" anchor="t"/>
+          <a:bodyPr wrap="square" lIns="0" tIns="0" rIns="0" bIns="0" rtlCol="0" anchor="t">
+            <a:normAutofit/>
+          </a:bodyPr>
           <a:lstStyle/>
           <a:p>
             <a:pPr indent="0" marL="0">
@@ -13528,8 +13962,8 @@
         </p:nvSpPr>
         <p:spPr>
           <a:xfrm>
-            <a:off x="749808" y="2468880"/>
-            <a:ext cx="3173882" cy="310896"/>
+            <a:off x="749808" y="2382520"/>
+            <a:ext cx="3173882" cy="237744"/>
           </a:xfrm>
           <a:prstGeom prst="rect">
             <a:avLst/>
@@ -13570,12 +14004,12 @@
         </p:nvSpPr>
         <p:spPr>
           <a:xfrm>
-            <a:off x="4326026" y="1627632"/>
-            <a:ext cx="3539642" cy="1225296"/>
+            <a:off x="4326026" y="1541272"/>
+            <a:ext cx="3539642" cy="1152144"/>
           </a:xfrm>
           <a:prstGeom prst="roundRect">
             <a:avLst>
-              <a:gd name="adj" fmla="val 4478"/>
+              <a:gd name="adj" fmla="val 4762"/>
             </a:avLst>
           </a:prstGeom>
           <a:solidFill>
@@ -13597,8 +14031,8 @@
         </p:nvSpPr>
         <p:spPr>
           <a:xfrm>
-            <a:off x="4508906" y="1764792"/>
-            <a:ext cx="3173882" cy="219456"/>
+            <a:off x="4508906" y="1660144"/>
+            <a:ext cx="3173882" cy="237744"/>
           </a:xfrm>
           <a:prstGeom prst="rect">
             <a:avLst/>
@@ -13607,14 +14041,14 @@
           <a:ln/>
         </p:spPr>
         <p:txBody>
-          <a:bodyPr wrap="square" lIns="0" tIns="0" rIns="0" bIns="0" rtlCol="0" anchor="ctr"/>
+          <a:bodyPr wrap="square" lIns="0" tIns="0" rIns="0" bIns="0" rtlCol="0" anchor="t"/>
           <a:lstStyle/>
           <a:p>
             <a:pPr indent="0" marL="0">
               <a:buNone/>
             </a:pPr>
             <a:r>
-              <a:rPr lang="en-US" sz="900" b="1" spc="120" kern="0" dirty="0">
+              <a:rPr lang="en-US" sz="850" b="1" spc="100" kern="0" dirty="0">
                 <a:solidFill>
                   <a:srgbClr val="6E7689"/>
                 </a:solidFill>
@@ -13624,7 +14058,7 @@
               </a:rPr>
               <a:t>TRUE CAPITAL AT RISK</a:t>
             </a:r>
-            <a:endParaRPr lang="en-US" sz="900" dirty="0"/>
+            <a:endParaRPr lang="en-US" sz="850" dirty="0"/>
           </a:p>
         </p:txBody>
       </p:sp>
@@ -13636,7 +14070,7 @@
         </p:nvSpPr>
         <p:spPr>
           <a:xfrm>
-            <a:off x="4508906" y="1993392"/>
+            <a:off x="4508906" y="1907032"/>
             <a:ext cx="3173882" cy="457200"/>
           </a:xfrm>
           <a:prstGeom prst="rect">
@@ -13646,7 +14080,9 @@
           <a:ln/>
         </p:spPr>
         <p:txBody>
-          <a:bodyPr wrap="square" lIns="0" tIns="0" rIns="0" bIns="0" rtlCol="0" anchor="t"/>
+          <a:bodyPr wrap="square" lIns="0" tIns="0" rIns="0" bIns="0" rtlCol="0" anchor="t">
+            <a:normAutofit/>
+          </a:bodyPr>
           <a:lstStyle/>
           <a:p>
             <a:pPr indent="0" marL="0">
@@ -13675,8 +14111,8 @@
         </p:nvSpPr>
         <p:spPr>
           <a:xfrm>
-            <a:off x="4508906" y="2468880"/>
-            <a:ext cx="3173882" cy="310896"/>
+            <a:off x="4508906" y="2382520"/>
+            <a:ext cx="3173882" cy="237744"/>
           </a:xfrm>
           <a:prstGeom prst="rect">
             <a:avLst/>
@@ -13717,12 +14153,12 @@
         </p:nvSpPr>
         <p:spPr>
           <a:xfrm>
-            <a:off x="8085125" y="1627632"/>
-            <a:ext cx="3539642" cy="1225296"/>
+            <a:off x="8085125" y="1541272"/>
+            <a:ext cx="3539642" cy="1152144"/>
           </a:xfrm>
           <a:prstGeom prst="roundRect">
             <a:avLst>
-              <a:gd name="adj" fmla="val 4478"/>
+              <a:gd name="adj" fmla="val 4762"/>
             </a:avLst>
           </a:prstGeom>
           <a:solidFill>
@@ -13744,8 +14180,8 @@
         </p:nvSpPr>
         <p:spPr>
           <a:xfrm>
-            <a:off x="8268005" y="1764792"/>
-            <a:ext cx="3173882" cy="219456"/>
+            <a:off x="8268005" y="1660144"/>
+            <a:ext cx="3173882" cy="237744"/>
           </a:xfrm>
           <a:prstGeom prst="rect">
             <a:avLst/>
@@ -13754,14 +14190,14 @@
           <a:ln/>
         </p:spPr>
         <p:txBody>
-          <a:bodyPr wrap="square" lIns="0" tIns="0" rIns="0" bIns="0" rtlCol="0" anchor="ctr"/>
+          <a:bodyPr wrap="square" lIns="0" tIns="0" rIns="0" bIns="0" rtlCol="0" anchor="t"/>
           <a:lstStyle/>
           <a:p>
             <a:pPr indent="0" marL="0">
               <a:buNone/>
             </a:pPr>
             <a:r>
-              <a:rPr lang="en-US" sz="900" b="1" spc="120" kern="0" dirty="0">
+              <a:rPr lang="en-US" sz="850" b="1" spc="100" kern="0" dirty="0">
                 <a:solidFill>
                   <a:srgbClr val="6E7689"/>
                 </a:solidFill>
@@ -13771,7 +14207,7 @@
               </a:rPr>
               <a:t>SERVICEABLE AT 1.30× DSCR</a:t>
             </a:r>
-            <a:endParaRPr lang="en-US" sz="900" dirty="0"/>
+            <a:endParaRPr lang="en-US" sz="850" dirty="0"/>
           </a:p>
         </p:txBody>
       </p:sp>
@@ -13783,7 +14219,7 @@
         </p:nvSpPr>
         <p:spPr>
           <a:xfrm>
-            <a:off x="8268005" y="1993392"/>
+            <a:off x="8268005" y="1907032"/>
             <a:ext cx="3173882" cy="457200"/>
           </a:xfrm>
           <a:prstGeom prst="rect">
@@ -13793,7 +14229,9 @@
           <a:ln/>
         </p:spPr>
         <p:txBody>
-          <a:bodyPr wrap="square" lIns="0" tIns="0" rIns="0" bIns="0" rtlCol="0" anchor="t"/>
+          <a:bodyPr wrap="square" lIns="0" tIns="0" rIns="0" bIns="0" rtlCol="0" anchor="t">
+            <a:normAutofit/>
+          </a:bodyPr>
           <a:lstStyle/>
           <a:p>
             <a:pPr indent="0" marL="0">
@@ -13822,8 +14260,8 @@
         </p:nvSpPr>
         <p:spPr>
           <a:xfrm>
-            <a:off x="8268005" y="2468880"/>
-            <a:ext cx="3173882" cy="310896"/>
+            <a:off x="8268005" y="2382520"/>
+            <a:ext cx="3173882" cy="237744"/>
           </a:xfrm>
           <a:prstGeom prst="rect">
             <a:avLst/>
@@ -13871,7 +14309,7 @@
           </p:nvPr>
         </p:nvGraphicFramePr>
         <p:xfrm>
-          <a:off x="566928" y="3090672"/>
+          <a:off x="566928" y="2931160"/>
           <a:ext cx="11057839" cy="914400"/>
         </p:xfrm>
         <a:graphic>
@@ -14314,7 +14752,7 @@
                           <a:ea typeface="Calibri" pitchFamily="34" charset="-122"/>
                           <a:cs typeface="Calibri" pitchFamily="34" charset="-120"/>
                         </a:rPr>
-                        <a:t>EMD, bid fee, stamp duty and registration</a:t>
+                        <a:t>EMD, bid fee, stamp duty, registration and the first quarter's licence fee</a:t>
                       </a:r>
                       <a:endParaRPr lang="en-US" sz="1100" dirty="0">
                         <a:latin typeface="Calibri" charset="0"/>
@@ -14382,145 +14820,7 @@
                           <a:ea typeface="Calibri" pitchFamily="34" charset="-122"/>
                           <a:cs typeface="Calibri" pitchFamily="34" charset="-120"/>
                         </a:rPr>
-                        <a:t>₹11.2 L</a:t>
-                      </a:r>
-                      <a:endParaRPr lang="en-US" sz="1100" dirty="0">
-                        <a:latin typeface="Calibri" charset="0"/>
-                        <a:ea typeface="Calibri" charset="0"/>
-                        <a:cs typeface="Calibri" charset="0"/>
-                      </a:endParaRPr>
-                    </a:p>
-                  </a:txBody>
-                  <a:tcPr marL="0" marR="76200" marT="63500" marB="63500" anchor="ctr">
-                    <a:lnL w="0" cap="flat" cmpd="sng" algn="ctr">
-                      <a:solidFill>
-                        <a:srgbClr val="666666"/>
-                      </a:solidFill>
-                      <a:prstDash val="solid"/>
-                      <a:round/>
-                      <a:headEnd type="none" w="med" len="med"/>
-                      <a:tailEnd type="none" w="med" len="med"/>
-                    </a:lnL>
-                    <a:lnR w="0" cap="flat" cmpd="sng" algn="ctr">
-                      <a:solidFill>
-                        <a:srgbClr val="666666"/>
-                      </a:solidFill>
-                      <a:prstDash val="solid"/>
-                      <a:round/>
-                      <a:headEnd type="none" w="med" len="med"/>
-                      <a:tailEnd type="none" w="med" len="med"/>
-                    </a:lnR>
-                    <a:lnT w="0" cap="flat" cmpd="sng" algn="ctr">
-                      <a:solidFill>
-                        <a:srgbClr val="666666"/>
-                      </a:solidFill>
-                      <a:prstDash val="solid"/>
-                      <a:round/>
-                      <a:headEnd type="none" w="med" len="med"/>
-                      <a:tailEnd type="none" w="med" len="med"/>
-                    </a:lnT>
-                    <a:lnB w="7620" cap="flat" cmpd="sng" algn="ctr">
-                      <a:solidFill>
-                        <a:srgbClr val="E2E4EA"/>
-                      </a:solidFill>
-                      <a:prstDash val="solid"/>
-                      <a:round/>
-                      <a:headEnd type="none" w="med" len="med"/>
-                      <a:tailEnd type="none" w="med" len="med"/>
-                    </a:lnB>
-                    <a:solidFill>
-                      <a:srgbClr val="FFFFFF"/>
-                    </a:solidFill>
-                  </a:tcPr>
-                </a:tc>
-              </a:tr>
-              <a:tr h="301752">
-                <a:tc>
-                  <a:txBody>
-                    <a:bodyPr/>
-                    <a:lstStyle/>
-                    <a:p>
-                      <a:pPr algn="l" indent="0" marL="0">
-                        <a:buNone/>
-                      </a:pPr>
-                      <a:r>
-                        <a:rPr lang="en-US" sz="1100" dirty="0">
-                          <a:solidFill>
-                            <a:srgbClr val="3B4660"/>
-                          </a:solidFill>
-                          <a:latin typeface="Calibri" pitchFamily="34" charset="0"/>
-                          <a:ea typeface="Calibri" pitchFamily="34" charset="-122"/>
-                          <a:cs typeface="Calibri" pitchFamily="34" charset="-120"/>
-                        </a:rPr>
-                        <a:t>Advance licence fee — first quarter</a:t>
-                      </a:r>
-                      <a:endParaRPr lang="en-US" sz="1100" dirty="0">
-                        <a:latin typeface="Calibri" charset="0"/>
-                        <a:ea typeface="Calibri" charset="0"/>
-                        <a:cs typeface="Calibri" charset="0"/>
-                      </a:endParaRPr>
-                    </a:p>
-                  </a:txBody>
-                  <a:tcPr marL="0" marR="76200" marT="63500" marB="63500" anchor="ctr">
-                    <a:lnL w="0" cap="flat" cmpd="sng" algn="ctr">
-                      <a:solidFill>
-                        <a:srgbClr val="666666"/>
-                      </a:solidFill>
-                      <a:prstDash val="solid"/>
-                      <a:round/>
-                      <a:headEnd type="none" w="med" len="med"/>
-                      <a:tailEnd type="none" w="med" len="med"/>
-                    </a:lnL>
-                    <a:lnR w="0" cap="flat" cmpd="sng" algn="ctr">
-                      <a:solidFill>
-                        <a:srgbClr val="666666"/>
-                      </a:solidFill>
-                      <a:prstDash val="solid"/>
-                      <a:round/>
-                      <a:headEnd type="none" w="med" len="med"/>
-                      <a:tailEnd type="none" w="med" len="med"/>
-                    </a:lnR>
-                    <a:lnT w="0" cap="flat" cmpd="sng" algn="ctr">
-                      <a:solidFill>
-                        <a:srgbClr val="666666"/>
-                      </a:solidFill>
-                      <a:prstDash val="solid"/>
-                      <a:round/>
-                      <a:headEnd type="none" w="med" len="med"/>
-                      <a:tailEnd type="none" w="med" len="med"/>
-                    </a:lnT>
-                    <a:lnB w="7620" cap="flat" cmpd="sng" algn="ctr">
-                      <a:solidFill>
-                        <a:srgbClr val="E2E4EA"/>
-                      </a:solidFill>
-                      <a:prstDash val="solid"/>
-                      <a:round/>
-                      <a:headEnd type="none" w="med" len="med"/>
-                      <a:tailEnd type="none" w="med" len="med"/>
-                    </a:lnB>
-                    <a:solidFill>
-                      <a:srgbClr val="FFFFFF"/>
-                    </a:solidFill>
-                  </a:tcPr>
-                </a:tc>
-                <a:tc>
-                  <a:txBody>
-                    <a:bodyPr/>
-                    <a:lstStyle/>
-                    <a:p>
-                      <a:pPr algn="r" indent="0" marL="0">
-                        <a:buNone/>
-                      </a:pPr>
-                      <a:r>
-                        <a:rPr lang="en-US" sz="1100" dirty="0">
-                          <a:solidFill>
-                            <a:srgbClr val="3B4660"/>
-                          </a:solidFill>
-                          <a:latin typeface="Calibri" pitchFamily="34" charset="0"/>
-                          <a:ea typeface="Calibri" pitchFamily="34" charset="-122"/>
-                          <a:cs typeface="Calibri" pitchFamily="34" charset="-120"/>
-                        </a:rPr>
-                        <a:t>₹8.3 L</a:t>
+                        <a:t>₹19.4 L</a:t>
                       </a:r>
                       <a:endParaRPr lang="en-US" sz="1100" dirty="0">
                         <a:latin typeface="Calibri" charset="0"/>
@@ -14728,7 +15028,7 @@
                           <a:ea typeface="Calibri" pitchFamily="34" charset="-122"/>
                           <a:cs typeface="Calibri" pitchFamily="34" charset="-120"/>
                         </a:rPr>
-                        <a:t>Toy train and track — year 2, optional</a:t>
+                        <a:t>Toy train (year 2, optional) and two years of operating expenditure</a:t>
                       </a:r>
                       <a:endParaRPr lang="en-US" sz="1100" dirty="0">
                         <a:latin typeface="Calibri" charset="0"/>
@@ -14796,145 +15096,7 @@
                           <a:ea typeface="Calibri" pitchFamily="34" charset="-122"/>
                           <a:cs typeface="Calibri" pitchFamily="34" charset="-120"/>
                         </a:rPr>
-                        <a:t>₹38.0 L</a:t>
-                      </a:r>
-                      <a:endParaRPr lang="en-US" sz="1100" dirty="0">
-                        <a:latin typeface="Calibri" charset="0"/>
-                        <a:ea typeface="Calibri" charset="0"/>
-                        <a:cs typeface="Calibri" charset="0"/>
-                      </a:endParaRPr>
-                    </a:p>
-                  </a:txBody>
-                  <a:tcPr marL="0" marR="76200" marT="63500" marB="63500" anchor="ctr">
-                    <a:lnL w="0" cap="flat" cmpd="sng" algn="ctr">
-                      <a:solidFill>
-                        <a:srgbClr val="666666"/>
-                      </a:solidFill>
-                      <a:prstDash val="solid"/>
-                      <a:round/>
-                      <a:headEnd type="none" w="med" len="med"/>
-                      <a:tailEnd type="none" w="med" len="med"/>
-                    </a:lnL>
-                    <a:lnR w="0" cap="flat" cmpd="sng" algn="ctr">
-                      <a:solidFill>
-                        <a:srgbClr val="666666"/>
-                      </a:solidFill>
-                      <a:prstDash val="solid"/>
-                      <a:round/>
-                      <a:headEnd type="none" w="med" len="med"/>
-                      <a:tailEnd type="none" w="med" len="med"/>
-                    </a:lnR>
-                    <a:lnT w="0" cap="flat" cmpd="sng" algn="ctr">
-                      <a:solidFill>
-                        <a:srgbClr val="666666"/>
-                      </a:solidFill>
-                      <a:prstDash val="solid"/>
-                      <a:round/>
-                      <a:headEnd type="none" w="med" len="med"/>
-                      <a:tailEnd type="none" w="med" len="med"/>
-                    </a:lnT>
-                    <a:lnB w="7620" cap="flat" cmpd="sng" algn="ctr">
-                      <a:solidFill>
-                        <a:srgbClr val="E2E4EA"/>
-                      </a:solidFill>
-                      <a:prstDash val="solid"/>
-                      <a:round/>
-                      <a:headEnd type="none" w="med" len="med"/>
-                      <a:tailEnd type="none" w="med" len="med"/>
-                    </a:lnB>
-                    <a:solidFill>
-                      <a:srgbClr val="FFFFFF"/>
-                    </a:solidFill>
-                  </a:tcPr>
-                </a:tc>
-              </a:tr>
-              <a:tr h="301752">
-                <a:tc>
-                  <a:txBody>
-                    <a:bodyPr/>
-                    <a:lstStyle/>
-                    <a:p>
-                      <a:pPr algn="l" indent="0" marL="0">
-                        <a:buNone/>
-                      </a:pPr>
-                      <a:r>
-                        <a:rPr lang="en-US" sz="1100" dirty="0">
-                          <a:solidFill>
-                            <a:srgbClr val="3B4660"/>
-                          </a:solidFill>
-                          <a:latin typeface="Calibri" pitchFamily="34" charset="0"/>
-                          <a:ea typeface="Calibri" pitchFamily="34" charset="-122"/>
-                          <a:cs typeface="Calibri" pitchFamily="34" charset="-120"/>
-                        </a:rPr>
-                        <a:t>Year 1 and year 2 operating expenditure</a:t>
-                      </a:r>
-                      <a:endParaRPr lang="en-US" sz="1100" dirty="0">
-                        <a:latin typeface="Calibri" charset="0"/>
-                        <a:ea typeface="Calibri" charset="0"/>
-                        <a:cs typeface="Calibri" charset="0"/>
-                      </a:endParaRPr>
-                    </a:p>
-                  </a:txBody>
-                  <a:tcPr marL="0" marR="76200" marT="63500" marB="63500" anchor="ctr">
-                    <a:lnL w="0" cap="flat" cmpd="sng" algn="ctr">
-                      <a:solidFill>
-                        <a:srgbClr val="666666"/>
-                      </a:solidFill>
-                      <a:prstDash val="solid"/>
-                      <a:round/>
-                      <a:headEnd type="none" w="med" len="med"/>
-                      <a:tailEnd type="none" w="med" len="med"/>
-                    </a:lnL>
-                    <a:lnR w="0" cap="flat" cmpd="sng" algn="ctr">
-                      <a:solidFill>
-                        <a:srgbClr val="666666"/>
-                      </a:solidFill>
-                      <a:prstDash val="solid"/>
-                      <a:round/>
-                      <a:headEnd type="none" w="med" len="med"/>
-                      <a:tailEnd type="none" w="med" len="med"/>
-                    </a:lnR>
-                    <a:lnT w="0" cap="flat" cmpd="sng" algn="ctr">
-                      <a:solidFill>
-                        <a:srgbClr val="666666"/>
-                      </a:solidFill>
-                      <a:prstDash val="solid"/>
-                      <a:round/>
-                      <a:headEnd type="none" w="med" len="med"/>
-                      <a:tailEnd type="none" w="med" len="med"/>
-                    </a:lnT>
-                    <a:lnB w="7620" cap="flat" cmpd="sng" algn="ctr">
-                      <a:solidFill>
-                        <a:srgbClr val="E2E4EA"/>
-                      </a:solidFill>
-                      <a:prstDash val="solid"/>
-                      <a:round/>
-                      <a:headEnd type="none" w="med" len="med"/>
-                      <a:tailEnd type="none" w="med" len="med"/>
-                    </a:lnB>
-                    <a:solidFill>
-                      <a:srgbClr val="FFFFFF"/>
-                    </a:solidFill>
-                  </a:tcPr>
-                </a:tc>
-                <a:tc>
-                  <a:txBody>
-                    <a:bodyPr/>
-                    <a:lstStyle/>
-                    <a:p>
-                      <a:pPr algn="r" indent="0" marL="0">
-                        <a:buNone/>
-                      </a:pPr>
-                      <a:r>
-                        <a:rPr lang="en-US" sz="1100" dirty="0">
-                          <a:solidFill>
-                            <a:srgbClr val="3B4660"/>
-                          </a:solidFill>
-                          <a:latin typeface="Calibri" pitchFamily="34" charset="0"/>
-                          <a:ea typeface="Calibri" pitchFamily="34" charset="-122"/>
-                          <a:cs typeface="Calibri" pitchFamily="34" charset="-120"/>
-                        </a:rPr>
-                        <a:t>₹416.7 L</a:t>
+                        <a:t>₹454.7 L</a:t>
                       </a:r>
                       <a:endParaRPr lang="en-US" sz="1100" dirty="0">
                         <a:latin typeface="Calibri" charset="0"/>
@@ -15136,12 +15298,12 @@
         </p:nvSpPr>
         <p:spPr>
           <a:xfrm>
-            <a:off x="566928" y="6061964"/>
-            <a:ext cx="11057839" cy="731520"/>
+            <a:off x="566928" y="5255260"/>
+            <a:ext cx="11057839" cy="954654"/>
           </a:xfrm>
           <a:prstGeom prst="roundRect">
             <a:avLst>
-              <a:gd name="adj" fmla="val 6250"/>
+              <a:gd name="adj" fmla="val 4789"/>
             </a:avLst>
           </a:prstGeom>
           <a:solidFill>
@@ -15163,8 +15325,8 @@
         </p:nvSpPr>
         <p:spPr>
           <a:xfrm>
-            <a:off x="804672" y="6208268"/>
-            <a:ext cx="2743200" cy="201168"/>
+            <a:off x="804672" y="5364988"/>
+            <a:ext cx="2743200" cy="182880"/>
           </a:xfrm>
           <a:prstGeom prst="rect">
             <a:avLst/>
@@ -15202,8 +15364,8 @@
         </p:nvSpPr>
         <p:spPr>
           <a:xfrm>
-            <a:off x="804672" y="6409436"/>
-            <a:ext cx="10582351" cy="232220"/>
+            <a:off x="804672" y="5547868"/>
+            <a:ext cx="10582351" cy="227838"/>
           </a:xfrm>
           <a:prstGeom prst="rect">
             <a:avLst/>
@@ -15244,8 +15406,8 @@
         </p:nvSpPr>
         <p:spPr>
           <a:xfrm>
-            <a:off x="804672" y="6714808"/>
-            <a:ext cx="10582351" cy="182880"/>
+            <a:off x="804672" y="5830570"/>
+            <a:ext cx="10582351" cy="306192"/>
           </a:xfrm>
           <a:prstGeom prst="rect">
             <a:avLst/>
@@ -15259,12 +15421,12 @@
           <a:p>
             <a:pPr indent="0" marL="0">
               <a:lnSpc>
-                <a:spcPts val="1207"/>
+                <a:spcPts val="1349"/>
               </a:lnSpc>
               <a:buNone/>
             </a:pPr>
             <a:r>
-              <a:rPr lang="en-US" sz="850" dirty="0">
+              <a:rPr lang="en-US" sz="950" dirty="0">
                 <a:solidFill>
                   <a:srgbClr val="3B4660"/>
                 </a:solidFill>
@@ -15272,9 +15434,9 @@
                 <a:ea typeface="Calibri" pitchFamily="34" charset="-122"/>
                 <a:cs typeface="Calibri" pitchFamily="34" charset="-120"/>
               </a:rPr>
-              <a:t>₹30 L sits with BDA, interest-free, for fifteen years. At an 11.5% opportunity cost that is roughly ₹3.45 lakh a year foregone, or about ₹52 lakh across the contract — more than a year and a half of licence fee. Price it into the bid rather than treating it as a refundable deposit.</a:t>
+              <a:t>₹30 L sits with BDA interest-free for fifteen years — roughly ₹52 lakh of foregone return at an 11.5% opportunity cost, more than a year and a half of licence fee. Price it into the bid.</a:t>
             </a:r>
-            <a:endParaRPr lang="en-US" sz="850" dirty="0"/>
+            <a:endParaRPr lang="en-US" sz="950" dirty="0"/>
           </a:p>
         </p:txBody>
       </p:sp>
@@ -15455,8 +15617,8 @@
         </p:nvSpPr>
         <p:spPr>
           <a:xfrm>
-            <a:off x="566928" y="1005840"/>
-            <a:ext cx="11057839" cy="512064"/>
+            <a:off x="566928" y="950976"/>
+            <a:ext cx="11057839" cy="462280"/>
           </a:xfrm>
           <a:prstGeom prst="rect">
             <a:avLst/>
@@ -15470,12 +15632,12 @@
           <a:p>
             <a:pPr indent="0" marL="0">
               <a:lnSpc>
-                <a:spcPts val="1900"/>
+                <a:spcPts val="1750"/>
               </a:lnSpc>
               <a:buNone/>
             </a:pPr>
             <a:r>
-              <a:rPr lang="en-US" sz="1350" dirty="0">
+              <a:rPr lang="en-US" sz="1250" dirty="0">
                 <a:solidFill>
                   <a:srgbClr val="3B4660"/>
                 </a:solidFill>
@@ -15485,7 +15647,7 @@
               </a:rPr>
               <a:t>BDA published its own indicative revenue of ₹2.25–2.30 crore a year. This model sits below it early and reaches it in year 3 — because the assumption BDA's number rests on is the one most likely to be wrong.</a:t>
             </a:r>
-            <a:endParaRPr lang="en-US" sz="1350" dirty="0"/>
+            <a:endParaRPr lang="en-US" sz="1250" dirty="0"/>
           </a:p>
         </p:txBody>
       </p:sp>
@@ -15496,8 +15658,8 @@
           <p:nvPr/>
         </p:nvGraphicFramePr>
         <p:xfrm>
-          <a:off x="566928" y="1627632"/>
-          <a:ext cx="11057839" cy="2606040"/>
+          <a:off x="566928" y="1541272"/>
+          <a:ext cx="11057839" cy="2560320"/>
         </p:xfrm>
         <a:graphic xmlns:a="http://schemas.openxmlformats.org/drawingml/2006/main">
           <a:graphicData uri="http://schemas.openxmlformats.org/drawingml/2006/chart">
@@ -15513,12 +15675,12 @@
         </p:nvSpPr>
         <p:spPr>
           <a:xfrm>
-            <a:off x="566928" y="4462272"/>
-            <a:ext cx="11057839" cy="1640690"/>
+            <a:off x="566928" y="4330192"/>
+            <a:ext cx="11057839" cy="1512428"/>
           </a:xfrm>
           <a:prstGeom prst="roundRect">
             <a:avLst>
-              <a:gd name="adj" fmla="val 2787"/>
+              <a:gd name="adj" fmla="val 3023"/>
             </a:avLst>
           </a:prstGeom>
           <a:solidFill>
@@ -15540,8 +15702,8 @@
         </p:nvSpPr>
         <p:spPr>
           <a:xfrm>
-            <a:off x="804672" y="4608576"/>
-            <a:ext cx="2743200" cy="201168"/>
+            <a:off x="804672" y="4439920"/>
+            <a:ext cx="2743200" cy="182880"/>
           </a:xfrm>
           <a:prstGeom prst="rect">
             <a:avLst/>
@@ -15579,8 +15741,8 @@
         </p:nvSpPr>
         <p:spPr>
           <a:xfrm>
-            <a:off x="804672" y="4809744"/>
-            <a:ext cx="10582351" cy="294145"/>
+            <a:off x="804672" y="4622800"/>
+            <a:ext cx="10582351" cy="288595"/>
           </a:xfrm>
           <a:prstGeom prst="rect">
             <a:avLst/>
@@ -15621,8 +15783,8 @@
         </p:nvSpPr>
         <p:spPr>
           <a:xfrm>
-            <a:off x="804672" y="5177041"/>
-            <a:ext cx="10582351" cy="852769"/>
+            <a:off x="804672" y="4966259"/>
+            <a:ext cx="10582351" cy="803209"/>
           </a:xfrm>
           <a:prstGeom prst="rect">
             <a:avLst/>
@@ -15832,8 +15994,8 @@
         </p:nvSpPr>
         <p:spPr>
           <a:xfrm>
-            <a:off x="566928" y="1005840"/>
-            <a:ext cx="11057839" cy="512064"/>
+            <a:off x="566928" y="950976"/>
+            <a:ext cx="11057839" cy="462280"/>
           </a:xfrm>
           <a:prstGeom prst="rect">
             <a:avLst/>
@@ -15847,12 +16009,12 @@
           <a:p>
             <a:pPr indent="0" marL="0">
               <a:lnSpc>
-                <a:spcPts val="1900"/>
+                <a:spcPts val="1750"/>
               </a:lnSpc>
               <a:buNone/>
             </a:pPr>
             <a:r>
-              <a:rPr lang="en-US" sz="1350" dirty="0">
+              <a:rPr lang="en-US" sz="1250" dirty="0">
                 <a:solidFill>
                   <a:srgbClr val="3B4660"/>
                 </a:solidFill>
@@ -15862,7 +16024,7 @@
               </a:rPr>
               <a:t>A maintenance-heavy contract. BDA transfers the entire comprehensive maintenance obligation — civil, electrical, horticultural, statuary and IT — to the operator, at the operator's cost.</a:t>
             </a:r>
-            <a:endParaRPr lang="en-US" sz="1350" dirty="0"/>
+            <a:endParaRPr lang="en-US" sz="1250" dirty="0"/>
           </a:p>
         </p:txBody>
       </p:sp>
@@ -15881,7 +16043,7 @@
           </p:nvPr>
         </p:nvGraphicFramePr>
         <p:xfrm>
-          <a:off x="566928" y="1627632"/>
+          <a:off x="566928" y="1541272"/>
           <a:ext cx="11057839" cy="914400"/>
         </p:xfrm>
         <a:graphic>
@@ -18784,7 +18946,7 @@
                           <a:ea typeface="Calibri" pitchFamily="34" charset="-122"/>
                           <a:cs typeface="Calibri" pitchFamily="34" charset="-120"/>
                         </a:rPr>
-                        <a:t>Insurance</a:t>
+                        <a:t>Other operating cost</a:t>
                       </a:r>
                       <a:endParaRPr lang="en-US" sz="1050" dirty="0">
                         <a:latin typeface="Calibri" charset="0"/>
@@ -18852,7 +19014,7 @@
                           <a:ea typeface="Calibri" pitchFamily="34" charset="-122"/>
                           <a:cs typeface="Calibri" pitchFamily="34" charset="-120"/>
                         </a:rPr>
-                        <a:t>0.06</a:t>
+                        <a:t>0.43</a:t>
                       </a:r>
                       <a:endParaRPr lang="en-US" sz="1050" dirty="0">
                         <a:latin typeface="Calibri" charset="0"/>
@@ -18920,7 +19082,7 @@
                           <a:ea typeface="Calibri" pitchFamily="34" charset="-122"/>
                           <a:cs typeface="Calibri" pitchFamily="34" charset="-120"/>
                         </a:rPr>
-                        <a:t>0.07</a:t>
+                        <a:t>0.60</a:t>
                       </a:r>
                       <a:endParaRPr lang="en-US" sz="1050" dirty="0">
                         <a:latin typeface="Calibri" charset="0"/>
@@ -18988,7 +19150,7 @@
                           <a:ea typeface="Calibri" pitchFamily="34" charset="-122"/>
                           <a:cs typeface="Calibri" pitchFamily="34" charset="-120"/>
                         </a:rPr>
-                        <a:t>0.08</a:t>
+                        <a:t>0.75</a:t>
                       </a:r>
                       <a:endParaRPr lang="en-US" sz="1050" dirty="0">
                         <a:latin typeface="Calibri" charset="0"/>
@@ -19056,7 +19218,7 @@
                           <a:ea typeface="Calibri" pitchFamily="34" charset="-122"/>
                           <a:cs typeface="Calibri" pitchFamily="34" charset="-120"/>
                         </a:rPr>
-                        <a:t>0.09</a:t>
+                        <a:t>0.88</a:t>
                       </a:r>
                       <a:endParaRPr lang="en-US" sz="1050" dirty="0">
                         <a:latin typeface="Calibri" charset="0"/>
@@ -19124,827 +19286,7 @@
                           <a:ea typeface="Calibri" pitchFamily="34" charset="-122"/>
                           <a:cs typeface="Calibri" pitchFamily="34" charset="-120"/>
                         </a:rPr>
-                        <a:t>0.10</a:t>
-                      </a:r>
-                      <a:endParaRPr lang="en-US" sz="1050" dirty="0">
-                        <a:latin typeface="Calibri" charset="0"/>
-                        <a:ea typeface="Calibri" charset="0"/>
-                        <a:cs typeface="Calibri" charset="0"/>
-                      </a:endParaRPr>
-                    </a:p>
-                  </a:txBody>
-                  <a:tcPr marL="0" marR="76200" marT="63500" marB="63500" anchor="ctr">
-                    <a:lnL w="0" cap="flat" cmpd="sng" algn="ctr">
-                      <a:solidFill>
-                        <a:srgbClr val="666666"/>
-                      </a:solidFill>
-                      <a:prstDash val="solid"/>
-                      <a:round/>
-                      <a:headEnd type="none" w="med" len="med"/>
-                      <a:tailEnd type="none" w="med" len="med"/>
-                    </a:lnL>
-                    <a:lnR w="0" cap="flat" cmpd="sng" algn="ctr">
-                      <a:solidFill>
-                        <a:srgbClr val="666666"/>
-                      </a:solidFill>
-                      <a:prstDash val="solid"/>
-                      <a:round/>
-                      <a:headEnd type="none" w="med" len="med"/>
-                      <a:tailEnd type="none" w="med" len="med"/>
-                    </a:lnR>
-                    <a:lnT w="0" cap="flat" cmpd="sng" algn="ctr">
-                      <a:solidFill>
-                        <a:srgbClr val="666666"/>
-                      </a:solidFill>
-                      <a:prstDash val="solid"/>
-                      <a:round/>
-                      <a:headEnd type="none" w="med" len="med"/>
-                      <a:tailEnd type="none" w="med" len="med"/>
-                    </a:lnT>
-                    <a:lnB w="7620" cap="flat" cmpd="sng" algn="ctr">
-                      <a:solidFill>
-                        <a:srgbClr val="E2E4EA"/>
-                      </a:solidFill>
-                      <a:prstDash val="solid"/>
-                      <a:round/>
-                      <a:headEnd type="none" w="med" len="med"/>
-                      <a:tailEnd type="none" w="med" len="med"/>
-                    </a:lnB>
-                    <a:solidFill>
-                      <a:srgbClr val="FFFFFF"/>
-                    </a:solidFill>
-                  </a:tcPr>
-                </a:tc>
-              </a:tr>
-              <a:tr h="292608">
-                <a:tc>
-                  <a:txBody>
-                    <a:bodyPr/>
-                    <a:lstStyle/>
-                    <a:p>
-                      <a:pPr algn="l" indent="0" marL="0">
-                        <a:buNone/>
-                      </a:pPr>
-                      <a:r>
-                        <a:rPr lang="en-US" sz="1050" dirty="0">
-                          <a:solidFill>
-                            <a:srgbClr val="3B4660"/>
-                          </a:solidFill>
-                          <a:latin typeface="Calibri" pitchFamily="34" charset="0"/>
-                          <a:ea typeface="Calibri" pitchFamily="34" charset="-122"/>
-                          <a:cs typeface="Calibri" pitchFamily="34" charset="-120"/>
-                        </a:rPr>
-                        <a:t>Marketing</a:t>
-                      </a:r>
-                      <a:endParaRPr lang="en-US" sz="1050" dirty="0">
-                        <a:latin typeface="Calibri" charset="0"/>
-                        <a:ea typeface="Calibri" charset="0"/>
-                        <a:cs typeface="Calibri" charset="0"/>
-                      </a:endParaRPr>
-                    </a:p>
-                  </a:txBody>
-                  <a:tcPr marL="0" marR="76200" marT="63500" marB="63500" anchor="ctr">
-                    <a:lnL w="0" cap="flat" cmpd="sng" algn="ctr">
-                      <a:solidFill>
-                        <a:srgbClr val="666666"/>
-                      </a:solidFill>
-                      <a:prstDash val="solid"/>
-                      <a:round/>
-                      <a:headEnd type="none" w="med" len="med"/>
-                      <a:tailEnd type="none" w="med" len="med"/>
-                    </a:lnL>
-                    <a:lnR w="0" cap="flat" cmpd="sng" algn="ctr">
-                      <a:solidFill>
-                        <a:srgbClr val="666666"/>
-                      </a:solidFill>
-                      <a:prstDash val="solid"/>
-                      <a:round/>
-                      <a:headEnd type="none" w="med" len="med"/>
-                      <a:tailEnd type="none" w="med" len="med"/>
-                    </a:lnR>
-                    <a:lnT w="0" cap="flat" cmpd="sng" algn="ctr">
-                      <a:solidFill>
-                        <a:srgbClr val="666666"/>
-                      </a:solidFill>
-                      <a:prstDash val="solid"/>
-                      <a:round/>
-                      <a:headEnd type="none" w="med" len="med"/>
-                      <a:tailEnd type="none" w="med" len="med"/>
-                    </a:lnT>
-                    <a:lnB w="7620" cap="flat" cmpd="sng" algn="ctr">
-                      <a:solidFill>
-                        <a:srgbClr val="E2E4EA"/>
-                      </a:solidFill>
-                      <a:prstDash val="solid"/>
-                      <a:round/>
-                      <a:headEnd type="none" w="med" len="med"/>
-                      <a:tailEnd type="none" w="med" len="med"/>
-                    </a:lnB>
-                    <a:solidFill>
-                      <a:srgbClr val="FFFFFF"/>
-                    </a:solidFill>
-                  </a:tcPr>
-                </a:tc>
-                <a:tc>
-                  <a:txBody>
-                    <a:bodyPr/>
-                    <a:lstStyle/>
-                    <a:p>
-                      <a:pPr algn="r" indent="0" marL="0">
-                        <a:buNone/>
-                      </a:pPr>
-                      <a:r>
-                        <a:rPr lang="en-US" sz="1050" dirty="0">
-                          <a:solidFill>
-                            <a:srgbClr val="3B4660"/>
-                          </a:solidFill>
-                          <a:latin typeface="Calibri" pitchFamily="34" charset="0"/>
-                          <a:ea typeface="Calibri" pitchFamily="34" charset="-122"/>
-                          <a:cs typeface="Calibri" pitchFamily="34" charset="-120"/>
-                        </a:rPr>
-                        <a:t>0.07</a:t>
-                      </a:r>
-                      <a:endParaRPr lang="en-US" sz="1050" dirty="0">
-                        <a:latin typeface="Calibri" charset="0"/>
-                        <a:ea typeface="Calibri" charset="0"/>
-                        <a:cs typeface="Calibri" charset="0"/>
-                      </a:endParaRPr>
-                    </a:p>
-                  </a:txBody>
-                  <a:tcPr marL="0" marR="76200" marT="63500" marB="63500" anchor="ctr">
-                    <a:lnL w="0" cap="flat" cmpd="sng" algn="ctr">
-                      <a:solidFill>
-                        <a:srgbClr val="666666"/>
-                      </a:solidFill>
-                      <a:prstDash val="solid"/>
-                      <a:round/>
-                      <a:headEnd type="none" w="med" len="med"/>
-                      <a:tailEnd type="none" w="med" len="med"/>
-                    </a:lnL>
-                    <a:lnR w="0" cap="flat" cmpd="sng" algn="ctr">
-                      <a:solidFill>
-                        <a:srgbClr val="666666"/>
-                      </a:solidFill>
-                      <a:prstDash val="solid"/>
-                      <a:round/>
-                      <a:headEnd type="none" w="med" len="med"/>
-                      <a:tailEnd type="none" w="med" len="med"/>
-                    </a:lnR>
-                    <a:lnT w="0" cap="flat" cmpd="sng" algn="ctr">
-                      <a:solidFill>
-                        <a:srgbClr val="666666"/>
-                      </a:solidFill>
-                      <a:prstDash val="solid"/>
-                      <a:round/>
-                      <a:headEnd type="none" w="med" len="med"/>
-                      <a:tailEnd type="none" w="med" len="med"/>
-                    </a:lnT>
-                    <a:lnB w="7620" cap="flat" cmpd="sng" algn="ctr">
-                      <a:solidFill>
-                        <a:srgbClr val="E2E4EA"/>
-                      </a:solidFill>
-                      <a:prstDash val="solid"/>
-                      <a:round/>
-                      <a:headEnd type="none" w="med" len="med"/>
-                      <a:tailEnd type="none" w="med" len="med"/>
-                    </a:lnB>
-                    <a:solidFill>
-                      <a:srgbClr val="FFFFFF"/>
-                    </a:solidFill>
-                  </a:tcPr>
-                </a:tc>
-                <a:tc>
-                  <a:txBody>
-                    <a:bodyPr/>
-                    <a:lstStyle/>
-                    <a:p>
-                      <a:pPr algn="r" indent="0" marL="0">
-                        <a:buNone/>
-                      </a:pPr>
-                      <a:r>
-                        <a:rPr lang="en-US" sz="1050" dirty="0">
-                          <a:solidFill>
-                            <a:srgbClr val="3B4660"/>
-                          </a:solidFill>
-                          <a:latin typeface="Calibri" pitchFamily="34" charset="0"/>
-                          <a:ea typeface="Calibri" pitchFamily="34" charset="-122"/>
-                          <a:cs typeface="Calibri" pitchFamily="34" charset="-120"/>
-                        </a:rPr>
-                        <a:t>0.13</a:t>
-                      </a:r>
-                      <a:endParaRPr lang="en-US" sz="1050" dirty="0">
-                        <a:latin typeface="Calibri" charset="0"/>
-                        <a:ea typeface="Calibri" charset="0"/>
-                        <a:cs typeface="Calibri" charset="0"/>
-                      </a:endParaRPr>
-                    </a:p>
-                  </a:txBody>
-                  <a:tcPr marL="0" marR="76200" marT="63500" marB="63500" anchor="ctr">
-                    <a:lnL w="0" cap="flat" cmpd="sng" algn="ctr">
-                      <a:solidFill>
-                        <a:srgbClr val="666666"/>
-                      </a:solidFill>
-                      <a:prstDash val="solid"/>
-                      <a:round/>
-                      <a:headEnd type="none" w="med" len="med"/>
-                      <a:tailEnd type="none" w="med" len="med"/>
-                    </a:lnL>
-                    <a:lnR w="0" cap="flat" cmpd="sng" algn="ctr">
-                      <a:solidFill>
-                        <a:srgbClr val="666666"/>
-                      </a:solidFill>
-                      <a:prstDash val="solid"/>
-                      <a:round/>
-                      <a:headEnd type="none" w="med" len="med"/>
-                      <a:tailEnd type="none" w="med" len="med"/>
-                    </a:lnR>
-                    <a:lnT w="0" cap="flat" cmpd="sng" algn="ctr">
-                      <a:solidFill>
-                        <a:srgbClr val="666666"/>
-                      </a:solidFill>
-                      <a:prstDash val="solid"/>
-                      <a:round/>
-                      <a:headEnd type="none" w="med" len="med"/>
-                      <a:tailEnd type="none" w="med" len="med"/>
-                    </a:lnT>
-                    <a:lnB w="7620" cap="flat" cmpd="sng" algn="ctr">
-                      <a:solidFill>
-                        <a:srgbClr val="E2E4EA"/>
-                      </a:solidFill>
-                      <a:prstDash val="solid"/>
-                      <a:round/>
-                      <a:headEnd type="none" w="med" len="med"/>
-                      <a:tailEnd type="none" w="med" len="med"/>
-                    </a:lnB>
-                    <a:solidFill>
-                      <a:srgbClr val="FFFFFF"/>
-                    </a:solidFill>
-                  </a:tcPr>
-                </a:tc>
-                <a:tc>
-                  <a:txBody>
-                    <a:bodyPr/>
-                    <a:lstStyle/>
-                    <a:p>
-                      <a:pPr algn="r" indent="0" marL="0">
-                        <a:buNone/>
-                      </a:pPr>
-                      <a:r>
-                        <a:rPr lang="en-US" sz="1050" dirty="0">
-                          <a:solidFill>
-                            <a:srgbClr val="3B4660"/>
-                          </a:solidFill>
-                          <a:latin typeface="Calibri" pitchFamily="34" charset="0"/>
-                          <a:ea typeface="Calibri" pitchFamily="34" charset="-122"/>
-                          <a:cs typeface="Calibri" pitchFamily="34" charset="-120"/>
-                        </a:rPr>
-                        <a:t>0.17</a:t>
-                      </a:r>
-                      <a:endParaRPr lang="en-US" sz="1050" dirty="0">
-                        <a:latin typeface="Calibri" charset="0"/>
-                        <a:ea typeface="Calibri" charset="0"/>
-                        <a:cs typeface="Calibri" charset="0"/>
-                      </a:endParaRPr>
-                    </a:p>
-                  </a:txBody>
-                  <a:tcPr marL="0" marR="76200" marT="63500" marB="63500" anchor="ctr">
-                    <a:lnL w="0" cap="flat" cmpd="sng" algn="ctr">
-                      <a:solidFill>
-                        <a:srgbClr val="666666"/>
-                      </a:solidFill>
-                      <a:prstDash val="solid"/>
-                      <a:round/>
-                      <a:headEnd type="none" w="med" len="med"/>
-                      <a:tailEnd type="none" w="med" len="med"/>
-                    </a:lnL>
-                    <a:lnR w="0" cap="flat" cmpd="sng" algn="ctr">
-                      <a:solidFill>
-                        <a:srgbClr val="666666"/>
-                      </a:solidFill>
-                      <a:prstDash val="solid"/>
-                      <a:round/>
-                      <a:headEnd type="none" w="med" len="med"/>
-                      <a:tailEnd type="none" w="med" len="med"/>
-                    </a:lnR>
-                    <a:lnT w="0" cap="flat" cmpd="sng" algn="ctr">
-                      <a:solidFill>
-                        <a:srgbClr val="666666"/>
-                      </a:solidFill>
-                      <a:prstDash val="solid"/>
-                      <a:round/>
-                      <a:headEnd type="none" w="med" len="med"/>
-                      <a:tailEnd type="none" w="med" len="med"/>
-                    </a:lnT>
-                    <a:lnB w="7620" cap="flat" cmpd="sng" algn="ctr">
-                      <a:solidFill>
-                        <a:srgbClr val="E2E4EA"/>
-                      </a:solidFill>
-                      <a:prstDash val="solid"/>
-                      <a:round/>
-                      <a:headEnd type="none" w="med" len="med"/>
-                      <a:tailEnd type="none" w="med" len="med"/>
-                    </a:lnB>
-                    <a:solidFill>
-                      <a:srgbClr val="FFFFFF"/>
-                    </a:solidFill>
-                  </a:tcPr>
-                </a:tc>
-                <a:tc>
-                  <a:txBody>
-                    <a:bodyPr/>
-                    <a:lstStyle/>
-                    <a:p>
-                      <a:pPr algn="r" indent="0" marL="0">
-                        <a:buNone/>
-                      </a:pPr>
-                      <a:r>
-                        <a:rPr lang="en-US" sz="1050" dirty="0">
-                          <a:solidFill>
-                            <a:srgbClr val="3B4660"/>
-                          </a:solidFill>
-                          <a:latin typeface="Calibri" pitchFamily="34" charset="0"/>
-                          <a:ea typeface="Calibri" pitchFamily="34" charset="-122"/>
-                          <a:cs typeface="Calibri" pitchFamily="34" charset="-120"/>
-                        </a:rPr>
-                        <a:t>0.20</a:t>
-                      </a:r>
-                      <a:endParaRPr lang="en-US" sz="1050" dirty="0">
-                        <a:latin typeface="Calibri" charset="0"/>
-                        <a:ea typeface="Calibri" charset="0"/>
-                        <a:cs typeface="Calibri" charset="0"/>
-                      </a:endParaRPr>
-                    </a:p>
-                  </a:txBody>
-                  <a:tcPr marL="0" marR="76200" marT="63500" marB="63500" anchor="ctr">
-                    <a:lnL w="0" cap="flat" cmpd="sng" algn="ctr">
-                      <a:solidFill>
-                        <a:srgbClr val="666666"/>
-                      </a:solidFill>
-                      <a:prstDash val="solid"/>
-                      <a:round/>
-                      <a:headEnd type="none" w="med" len="med"/>
-                      <a:tailEnd type="none" w="med" len="med"/>
-                    </a:lnL>
-                    <a:lnR w="0" cap="flat" cmpd="sng" algn="ctr">
-                      <a:solidFill>
-                        <a:srgbClr val="666666"/>
-                      </a:solidFill>
-                      <a:prstDash val="solid"/>
-                      <a:round/>
-                      <a:headEnd type="none" w="med" len="med"/>
-                      <a:tailEnd type="none" w="med" len="med"/>
-                    </a:lnR>
-                    <a:lnT w="0" cap="flat" cmpd="sng" algn="ctr">
-                      <a:solidFill>
-                        <a:srgbClr val="666666"/>
-                      </a:solidFill>
-                      <a:prstDash val="solid"/>
-                      <a:round/>
-                      <a:headEnd type="none" w="med" len="med"/>
-                      <a:tailEnd type="none" w="med" len="med"/>
-                    </a:lnT>
-                    <a:lnB w="7620" cap="flat" cmpd="sng" algn="ctr">
-                      <a:solidFill>
-                        <a:srgbClr val="E2E4EA"/>
-                      </a:solidFill>
-                      <a:prstDash val="solid"/>
-                      <a:round/>
-                      <a:headEnd type="none" w="med" len="med"/>
-                      <a:tailEnd type="none" w="med" len="med"/>
-                    </a:lnB>
-                    <a:solidFill>
-                      <a:srgbClr val="FFFFFF"/>
-                    </a:solidFill>
-                  </a:tcPr>
-                </a:tc>
-                <a:tc>
-                  <a:txBody>
-                    <a:bodyPr/>
-                    <a:lstStyle/>
-                    <a:p>
-                      <a:pPr algn="r" indent="0" marL="0">
-                        <a:buNone/>
-                      </a:pPr>
-                      <a:r>
-                        <a:rPr lang="en-US" sz="1050" dirty="0">
-                          <a:solidFill>
-                            <a:srgbClr val="3B4660"/>
-                          </a:solidFill>
-                          <a:latin typeface="Calibri" pitchFamily="34" charset="0"/>
-                          <a:ea typeface="Calibri" pitchFamily="34" charset="-122"/>
-                          <a:cs typeface="Calibri" pitchFamily="34" charset="-120"/>
-                        </a:rPr>
-                        <a:t>0.23</a:t>
-                      </a:r>
-                      <a:endParaRPr lang="en-US" sz="1050" dirty="0">
-                        <a:latin typeface="Calibri" charset="0"/>
-                        <a:ea typeface="Calibri" charset="0"/>
-                        <a:cs typeface="Calibri" charset="0"/>
-                      </a:endParaRPr>
-                    </a:p>
-                  </a:txBody>
-                  <a:tcPr marL="0" marR="76200" marT="63500" marB="63500" anchor="ctr">
-                    <a:lnL w="0" cap="flat" cmpd="sng" algn="ctr">
-                      <a:solidFill>
-                        <a:srgbClr val="666666"/>
-                      </a:solidFill>
-                      <a:prstDash val="solid"/>
-                      <a:round/>
-                      <a:headEnd type="none" w="med" len="med"/>
-                      <a:tailEnd type="none" w="med" len="med"/>
-                    </a:lnL>
-                    <a:lnR w="0" cap="flat" cmpd="sng" algn="ctr">
-                      <a:solidFill>
-                        <a:srgbClr val="666666"/>
-                      </a:solidFill>
-                      <a:prstDash val="solid"/>
-                      <a:round/>
-                      <a:headEnd type="none" w="med" len="med"/>
-                      <a:tailEnd type="none" w="med" len="med"/>
-                    </a:lnR>
-                    <a:lnT w="0" cap="flat" cmpd="sng" algn="ctr">
-                      <a:solidFill>
-                        <a:srgbClr val="666666"/>
-                      </a:solidFill>
-                      <a:prstDash val="solid"/>
-                      <a:round/>
-                      <a:headEnd type="none" w="med" len="med"/>
-                      <a:tailEnd type="none" w="med" len="med"/>
-                    </a:lnT>
-                    <a:lnB w="7620" cap="flat" cmpd="sng" algn="ctr">
-                      <a:solidFill>
-                        <a:srgbClr val="E2E4EA"/>
-                      </a:solidFill>
-                      <a:prstDash val="solid"/>
-                      <a:round/>
-                      <a:headEnd type="none" w="med" len="med"/>
-                      <a:tailEnd type="none" w="med" len="med"/>
-                    </a:lnB>
-                    <a:solidFill>
-                      <a:srgbClr val="FFFFFF"/>
-                    </a:solidFill>
-                  </a:tcPr>
-                </a:tc>
-              </a:tr>
-              <a:tr h="292608">
-                <a:tc>
-                  <a:txBody>
-                    <a:bodyPr/>
-                    <a:lstStyle/>
-                    <a:p>
-                      <a:pPr algn="l" indent="0" marL="0">
-                        <a:buNone/>
-                      </a:pPr>
-                      <a:r>
-                        <a:rPr lang="en-US" sz="1050" dirty="0">
-                          <a:solidFill>
-                            <a:srgbClr val="3B4660"/>
-                          </a:solidFill>
-                          <a:latin typeface="Calibri" pitchFamily="34" charset="0"/>
-                          <a:ea typeface="Calibri" pitchFamily="34" charset="-122"/>
-                          <a:cs typeface="Calibri" pitchFamily="34" charset="-120"/>
-                        </a:rPr>
-                        <a:t>Other operating cost</a:t>
-                      </a:r>
-                      <a:endParaRPr lang="en-US" sz="1050" dirty="0">
-                        <a:latin typeface="Calibri" charset="0"/>
-                        <a:ea typeface="Calibri" charset="0"/>
-                        <a:cs typeface="Calibri" charset="0"/>
-                      </a:endParaRPr>
-                    </a:p>
-                  </a:txBody>
-                  <a:tcPr marL="0" marR="76200" marT="63500" marB="63500" anchor="ctr">
-                    <a:lnL w="0" cap="flat" cmpd="sng" algn="ctr">
-                      <a:solidFill>
-                        <a:srgbClr val="666666"/>
-                      </a:solidFill>
-                      <a:prstDash val="solid"/>
-                      <a:round/>
-                      <a:headEnd type="none" w="med" len="med"/>
-                      <a:tailEnd type="none" w="med" len="med"/>
-                    </a:lnL>
-                    <a:lnR w="0" cap="flat" cmpd="sng" algn="ctr">
-                      <a:solidFill>
-                        <a:srgbClr val="666666"/>
-                      </a:solidFill>
-                      <a:prstDash val="solid"/>
-                      <a:round/>
-                      <a:headEnd type="none" w="med" len="med"/>
-                      <a:tailEnd type="none" w="med" len="med"/>
-                    </a:lnR>
-                    <a:lnT w="0" cap="flat" cmpd="sng" algn="ctr">
-                      <a:solidFill>
-                        <a:srgbClr val="666666"/>
-                      </a:solidFill>
-                      <a:prstDash val="solid"/>
-                      <a:round/>
-                      <a:headEnd type="none" w="med" len="med"/>
-                      <a:tailEnd type="none" w="med" len="med"/>
-                    </a:lnT>
-                    <a:lnB w="7620" cap="flat" cmpd="sng" algn="ctr">
-                      <a:solidFill>
-                        <a:srgbClr val="E2E4EA"/>
-                      </a:solidFill>
-                      <a:prstDash val="solid"/>
-                      <a:round/>
-                      <a:headEnd type="none" w="med" len="med"/>
-                      <a:tailEnd type="none" w="med" len="med"/>
-                    </a:lnB>
-                    <a:solidFill>
-                      <a:srgbClr val="FFFFFF"/>
-                    </a:solidFill>
-                  </a:tcPr>
-                </a:tc>
-                <a:tc>
-                  <a:txBody>
-                    <a:bodyPr/>
-                    <a:lstStyle/>
-                    <a:p>
-                      <a:pPr algn="r" indent="0" marL="0">
-                        <a:buNone/>
-                      </a:pPr>
-                      <a:r>
-                        <a:rPr lang="en-US" sz="1050" dirty="0">
-                          <a:solidFill>
-                            <a:srgbClr val="3B4660"/>
-                          </a:solidFill>
-                          <a:latin typeface="Calibri" pitchFamily="34" charset="0"/>
-                          <a:ea typeface="Calibri" pitchFamily="34" charset="-122"/>
-                          <a:cs typeface="Calibri" pitchFamily="34" charset="-120"/>
-                        </a:rPr>
-                        <a:t>0.30</a:t>
-                      </a:r>
-                      <a:endParaRPr lang="en-US" sz="1050" dirty="0">
-                        <a:latin typeface="Calibri" charset="0"/>
-                        <a:ea typeface="Calibri" charset="0"/>
-                        <a:cs typeface="Calibri" charset="0"/>
-                      </a:endParaRPr>
-                    </a:p>
-                  </a:txBody>
-                  <a:tcPr marL="0" marR="76200" marT="63500" marB="63500" anchor="ctr">
-                    <a:lnL w="0" cap="flat" cmpd="sng" algn="ctr">
-                      <a:solidFill>
-                        <a:srgbClr val="666666"/>
-                      </a:solidFill>
-                      <a:prstDash val="solid"/>
-                      <a:round/>
-                      <a:headEnd type="none" w="med" len="med"/>
-                      <a:tailEnd type="none" w="med" len="med"/>
-                    </a:lnL>
-                    <a:lnR w="0" cap="flat" cmpd="sng" algn="ctr">
-                      <a:solidFill>
-                        <a:srgbClr val="666666"/>
-                      </a:solidFill>
-                      <a:prstDash val="solid"/>
-                      <a:round/>
-                      <a:headEnd type="none" w="med" len="med"/>
-                      <a:tailEnd type="none" w="med" len="med"/>
-                    </a:lnR>
-                    <a:lnT w="0" cap="flat" cmpd="sng" algn="ctr">
-                      <a:solidFill>
-                        <a:srgbClr val="666666"/>
-                      </a:solidFill>
-                      <a:prstDash val="solid"/>
-                      <a:round/>
-                      <a:headEnd type="none" w="med" len="med"/>
-                      <a:tailEnd type="none" w="med" len="med"/>
-                    </a:lnT>
-                    <a:lnB w="7620" cap="flat" cmpd="sng" algn="ctr">
-                      <a:solidFill>
-                        <a:srgbClr val="E2E4EA"/>
-                      </a:solidFill>
-                      <a:prstDash val="solid"/>
-                      <a:round/>
-                      <a:headEnd type="none" w="med" len="med"/>
-                      <a:tailEnd type="none" w="med" len="med"/>
-                    </a:lnB>
-                    <a:solidFill>
-                      <a:srgbClr val="FFFFFF"/>
-                    </a:solidFill>
-                  </a:tcPr>
-                </a:tc>
-                <a:tc>
-                  <a:txBody>
-                    <a:bodyPr/>
-                    <a:lstStyle/>
-                    <a:p>
-                      <a:pPr algn="r" indent="0" marL="0">
-                        <a:buNone/>
-                      </a:pPr>
-                      <a:r>
-                        <a:rPr lang="en-US" sz="1050" dirty="0">
-                          <a:solidFill>
-                            <a:srgbClr val="3B4660"/>
-                          </a:solidFill>
-                          <a:latin typeface="Calibri" pitchFamily="34" charset="0"/>
-                          <a:ea typeface="Calibri" pitchFamily="34" charset="-122"/>
-                          <a:cs typeface="Calibri" pitchFamily="34" charset="-120"/>
-                        </a:rPr>
-                        <a:t>0.41</a:t>
-                      </a:r>
-                      <a:endParaRPr lang="en-US" sz="1050" dirty="0">
-                        <a:latin typeface="Calibri" charset="0"/>
-                        <a:ea typeface="Calibri" charset="0"/>
-                        <a:cs typeface="Calibri" charset="0"/>
-                      </a:endParaRPr>
-                    </a:p>
-                  </a:txBody>
-                  <a:tcPr marL="0" marR="76200" marT="63500" marB="63500" anchor="ctr">
-                    <a:lnL w="0" cap="flat" cmpd="sng" algn="ctr">
-                      <a:solidFill>
-                        <a:srgbClr val="666666"/>
-                      </a:solidFill>
-                      <a:prstDash val="solid"/>
-                      <a:round/>
-                      <a:headEnd type="none" w="med" len="med"/>
-                      <a:tailEnd type="none" w="med" len="med"/>
-                    </a:lnL>
-                    <a:lnR w="0" cap="flat" cmpd="sng" algn="ctr">
-                      <a:solidFill>
-                        <a:srgbClr val="666666"/>
-                      </a:solidFill>
-                      <a:prstDash val="solid"/>
-                      <a:round/>
-                      <a:headEnd type="none" w="med" len="med"/>
-                      <a:tailEnd type="none" w="med" len="med"/>
-                    </a:lnR>
-                    <a:lnT w="0" cap="flat" cmpd="sng" algn="ctr">
-                      <a:solidFill>
-                        <a:srgbClr val="666666"/>
-                      </a:solidFill>
-                      <a:prstDash val="solid"/>
-                      <a:round/>
-                      <a:headEnd type="none" w="med" len="med"/>
-                      <a:tailEnd type="none" w="med" len="med"/>
-                    </a:lnT>
-                    <a:lnB w="7620" cap="flat" cmpd="sng" algn="ctr">
-                      <a:solidFill>
-                        <a:srgbClr val="E2E4EA"/>
-                      </a:solidFill>
-                      <a:prstDash val="solid"/>
-                      <a:round/>
-                      <a:headEnd type="none" w="med" len="med"/>
-                      <a:tailEnd type="none" w="med" len="med"/>
-                    </a:lnB>
-                    <a:solidFill>
-                      <a:srgbClr val="FFFFFF"/>
-                    </a:solidFill>
-                  </a:tcPr>
-                </a:tc>
-                <a:tc>
-                  <a:txBody>
-                    <a:bodyPr/>
-                    <a:lstStyle/>
-                    <a:p>
-                      <a:pPr algn="r" indent="0" marL="0">
-                        <a:buNone/>
-                      </a:pPr>
-                      <a:r>
-                        <a:rPr lang="en-US" sz="1050" dirty="0">
-                          <a:solidFill>
-                            <a:srgbClr val="3B4660"/>
-                          </a:solidFill>
-                          <a:latin typeface="Calibri" pitchFamily="34" charset="0"/>
-                          <a:ea typeface="Calibri" pitchFamily="34" charset="-122"/>
-                          <a:cs typeface="Calibri" pitchFamily="34" charset="-120"/>
-                        </a:rPr>
-                        <a:t>0.50</a:t>
-                      </a:r>
-                      <a:endParaRPr lang="en-US" sz="1050" dirty="0">
-                        <a:latin typeface="Calibri" charset="0"/>
-                        <a:ea typeface="Calibri" charset="0"/>
-                        <a:cs typeface="Calibri" charset="0"/>
-                      </a:endParaRPr>
-                    </a:p>
-                  </a:txBody>
-                  <a:tcPr marL="0" marR="76200" marT="63500" marB="63500" anchor="ctr">
-                    <a:lnL w="0" cap="flat" cmpd="sng" algn="ctr">
-                      <a:solidFill>
-                        <a:srgbClr val="666666"/>
-                      </a:solidFill>
-                      <a:prstDash val="solid"/>
-                      <a:round/>
-                      <a:headEnd type="none" w="med" len="med"/>
-                      <a:tailEnd type="none" w="med" len="med"/>
-                    </a:lnL>
-                    <a:lnR w="0" cap="flat" cmpd="sng" algn="ctr">
-                      <a:solidFill>
-                        <a:srgbClr val="666666"/>
-                      </a:solidFill>
-                      <a:prstDash val="solid"/>
-                      <a:round/>
-                      <a:headEnd type="none" w="med" len="med"/>
-                      <a:tailEnd type="none" w="med" len="med"/>
-                    </a:lnR>
-                    <a:lnT w="0" cap="flat" cmpd="sng" algn="ctr">
-                      <a:solidFill>
-                        <a:srgbClr val="666666"/>
-                      </a:solidFill>
-                      <a:prstDash val="solid"/>
-                      <a:round/>
-                      <a:headEnd type="none" w="med" len="med"/>
-                      <a:tailEnd type="none" w="med" len="med"/>
-                    </a:lnT>
-                    <a:lnB w="7620" cap="flat" cmpd="sng" algn="ctr">
-                      <a:solidFill>
-                        <a:srgbClr val="E2E4EA"/>
-                      </a:solidFill>
-                      <a:prstDash val="solid"/>
-                      <a:round/>
-                      <a:headEnd type="none" w="med" len="med"/>
-                      <a:tailEnd type="none" w="med" len="med"/>
-                    </a:lnB>
-                    <a:solidFill>
-                      <a:srgbClr val="FFFFFF"/>
-                    </a:solidFill>
-                  </a:tcPr>
-                </a:tc>
-                <a:tc>
-                  <a:txBody>
-                    <a:bodyPr/>
-                    <a:lstStyle/>
-                    <a:p>
-                      <a:pPr algn="r" indent="0" marL="0">
-                        <a:buNone/>
-                      </a:pPr>
-                      <a:r>
-                        <a:rPr lang="en-US" sz="1050" dirty="0">
-                          <a:solidFill>
-                            <a:srgbClr val="3B4660"/>
-                          </a:solidFill>
-                          <a:latin typeface="Calibri" pitchFamily="34" charset="0"/>
-                          <a:ea typeface="Calibri" pitchFamily="34" charset="-122"/>
-                          <a:cs typeface="Calibri" pitchFamily="34" charset="-120"/>
-                        </a:rPr>
-                        <a:t>0.59</a:t>
-                      </a:r>
-                      <a:endParaRPr lang="en-US" sz="1050" dirty="0">
-                        <a:latin typeface="Calibri" charset="0"/>
-                        <a:ea typeface="Calibri" charset="0"/>
-                        <a:cs typeface="Calibri" charset="0"/>
-                      </a:endParaRPr>
-                    </a:p>
-                  </a:txBody>
-                  <a:tcPr marL="0" marR="76200" marT="63500" marB="63500" anchor="ctr">
-                    <a:lnL w="0" cap="flat" cmpd="sng" algn="ctr">
-                      <a:solidFill>
-                        <a:srgbClr val="666666"/>
-                      </a:solidFill>
-                      <a:prstDash val="solid"/>
-                      <a:round/>
-                      <a:headEnd type="none" w="med" len="med"/>
-                      <a:tailEnd type="none" w="med" len="med"/>
-                    </a:lnL>
-                    <a:lnR w="0" cap="flat" cmpd="sng" algn="ctr">
-                      <a:solidFill>
-                        <a:srgbClr val="666666"/>
-                      </a:solidFill>
-                      <a:prstDash val="solid"/>
-                      <a:round/>
-                      <a:headEnd type="none" w="med" len="med"/>
-                      <a:tailEnd type="none" w="med" len="med"/>
-                    </a:lnR>
-                    <a:lnT w="0" cap="flat" cmpd="sng" algn="ctr">
-                      <a:solidFill>
-                        <a:srgbClr val="666666"/>
-                      </a:solidFill>
-                      <a:prstDash val="solid"/>
-                      <a:round/>
-                      <a:headEnd type="none" w="med" len="med"/>
-                      <a:tailEnd type="none" w="med" len="med"/>
-                    </a:lnT>
-                    <a:lnB w="7620" cap="flat" cmpd="sng" algn="ctr">
-                      <a:solidFill>
-                        <a:srgbClr val="E2E4EA"/>
-                      </a:solidFill>
-                      <a:prstDash val="solid"/>
-                      <a:round/>
-                      <a:headEnd type="none" w="med" len="med"/>
-                      <a:tailEnd type="none" w="med" len="med"/>
-                    </a:lnB>
-                    <a:solidFill>
-                      <a:srgbClr val="FFFFFF"/>
-                    </a:solidFill>
-                  </a:tcPr>
-                </a:tc>
-                <a:tc>
-                  <a:txBody>
-                    <a:bodyPr/>
-                    <a:lstStyle/>
-                    <a:p>
-                      <a:pPr algn="r" indent="0" marL="0">
-                        <a:buNone/>
-                      </a:pPr>
-                      <a:r>
-                        <a:rPr lang="en-US" sz="1050" dirty="0">
-                          <a:solidFill>
-                            <a:srgbClr val="3B4660"/>
-                          </a:solidFill>
-                          <a:latin typeface="Calibri" pitchFamily="34" charset="0"/>
-                          <a:ea typeface="Calibri" pitchFamily="34" charset="-122"/>
-                          <a:cs typeface="Calibri" pitchFamily="34" charset="-120"/>
-                        </a:rPr>
-                        <a:t>0.68</a:t>
+                        <a:t>1.01</a:t>
                       </a:r>
                       <a:endParaRPr lang="en-US" sz="1050" dirty="0">
                         <a:latin typeface="Calibri" charset="0"/>
@@ -21238,12 +20580,12 @@
         </p:nvSpPr>
         <p:spPr>
           <a:xfrm>
-            <a:off x="566928" y="5741289"/>
-            <a:ext cx="11057839" cy="731520"/>
+            <a:off x="566928" y="5012182"/>
+            <a:ext cx="11057839" cy="1234664"/>
           </a:xfrm>
           <a:prstGeom prst="roundRect">
             <a:avLst>
-              <a:gd name="adj" fmla="val 6250"/>
+              <a:gd name="adj" fmla="val 3703"/>
             </a:avLst>
           </a:prstGeom>
           <a:solidFill>
@@ -21265,8 +20607,8 @@
         </p:nvSpPr>
         <p:spPr>
           <a:xfrm>
-            <a:off x="804672" y="5887593"/>
-            <a:ext cx="2743200" cy="201168"/>
+            <a:off x="804672" y="5121910"/>
+            <a:ext cx="2743200" cy="182880"/>
           </a:xfrm>
           <a:prstGeom prst="rect">
             <a:avLst/>
@@ -21304,8 +20646,8 @@
         </p:nvSpPr>
         <p:spPr>
           <a:xfrm>
-            <a:off x="804672" y="6088761"/>
-            <a:ext cx="10582351" cy="232220"/>
+            <a:off x="804672" y="5304790"/>
+            <a:ext cx="10582351" cy="273406"/>
           </a:xfrm>
           <a:prstGeom prst="rect">
             <a:avLst/>
@@ -21319,12 +20661,12 @@
           <a:p>
             <a:pPr indent="0" marL="0">
               <a:lnSpc>
-                <a:spcPts val="1725"/>
+                <a:spcPts val="2070"/>
               </a:lnSpc>
               <a:buNone/>
             </a:pPr>
             <a:r>
-              <a:rPr lang="en-US" sz="1500" b="1" dirty="0">
+              <a:rPr lang="en-US" sz="1800" b="1" dirty="0">
                 <a:solidFill>
                   <a:srgbClr val="0A1426"/>
                 </a:solidFill>
@@ -21334,7 +20676,7 @@
               </a:rPr>
               <a:t>The manpower floor is contractual, not discretionary</a:t>
             </a:r>
-            <a:endParaRPr lang="en-US" sz="1500" dirty="0"/>
+            <a:endParaRPr lang="en-US" sz="1800" dirty="0"/>
           </a:p>
         </p:txBody>
       </p:sp>
@@ -21346,8 +20688,8 @@
         </p:nvSpPr>
         <p:spPr>
           <a:xfrm>
-            <a:off x="804672" y="6394132"/>
-            <a:ext cx="10582351" cy="182880"/>
+            <a:off x="804672" y="5633060"/>
+            <a:ext cx="10582351" cy="540634"/>
           </a:xfrm>
           <a:prstGeom prst="rect">
             <a:avLst/>
@@ -21361,12 +20703,12 @@
           <a:p>
             <a:pPr indent="0" marL="0">
               <a:lnSpc>
-                <a:spcPts val="1207"/>
+                <a:spcPts val="1562"/>
               </a:lnSpc>
               <a:buNone/>
             </a:pPr>
             <a:r>
-              <a:rPr lang="en-US" sz="850" dirty="0">
+              <a:rPr lang="en-US" sz="1100" dirty="0">
                 <a:solidFill>
                   <a:srgbClr val="3B4660"/>
                 </a:solidFill>
@@ -21374,9 +20716,9 @@
                 <a:ea typeface="Calibri" pitchFamily="34" charset="-122"/>
                 <a:cs typeface="Calibri" pitchFamily="34" charset="-120"/>
               </a:rPr>
-              <a:t>BDA prescribes 4 sweepers and 5 security personnel per shift, plus 8 gardeners, a site manager, an electrician and a plumber per day — around 29 heads before a single ticket is sold. Add ticketing, show technicians and food-court staff and the establishment is roughly 37 people, with EPF and ESI explicit. Payroll is the largest cost line in every year and it cannot be flexed down in a bad season. That is the structural reason the margin here is thinner than at Geeta Govind Vatika.</a:t>
+              <a:t>BDA prescribes 4 sweepers and 5 security per shift plus 8 gardeners, a site manager, an electrician and a plumber per day — about 29 heads before a ticket is sold, and roughly 37 with ticketing and show staff. Payroll cannot flex in a bad season. That is why the margin here is thinner than at Geeta Govind Vatika.</a:t>
             </a:r>
-            <a:endParaRPr lang="en-US" sz="850" dirty="0"/>
+            <a:endParaRPr lang="en-US" sz="1100" dirty="0"/>
           </a:p>
         </p:txBody>
       </p:sp>
@@ -21557,8 +20899,8 @@
         </p:nvSpPr>
         <p:spPr>
           <a:xfrm>
-            <a:off x="566928" y="1005840"/>
-            <a:ext cx="11057839" cy="512064"/>
+            <a:off x="566928" y="950976"/>
+            <a:ext cx="11057839" cy="231140"/>
           </a:xfrm>
           <a:prstGeom prst="rect">
             <a:avLst/>
@@ -21572,12 +20914,12 @@
           <a:p>
             <a:pPr indent="0" marL="0">
               <a:lnSpc>
-                <a:spcPts val="1900"/>
+                <a:spcPts val="1750"/>
               </a:lnSpc>
               <a:buNone/>
             </a:pPr>
             <a:r>
-              <a:rPr lang="en-US" sz="1350" dirty="0">
+              <a:rPr lang="en-US" sz="1250" dirty="0">
                 <a:solidFill>
                   <a:srgbClr val="3B4660"/>
                 </a:solidFill>
@@ -21587,7 +20929,7 @@
               </a:rPr>
               <a:t>Two loss-making years, then a slow climb. The shape is the direct consequence of a fixed manpower floor meeting a ramping revenue line.</a:t>
             </a:r>
-            <a:endParaRPr lang="en-US" sz="1350" dirty="0"/>
+            <a:endParaRPr lang="en-US" sz="1250" dirty="0"/>
           </a:p>
         </p:txBody>
       </p:sp>
@@ -21598,8 +20940,8 @@
           <p:nvPr/>
         </p:nvGraphicFramePr>
         <p:xfrm>
-          <a:off x="566928" y="1627632"/>
-          <a:ext cx="11057839" cy="3017520"/>
+          <a:off x="566928" y="1310132"/>
+          <a:ext cx="11057839" cy="2697480"/>
         </p:xfrm>
         <a:graphic xmlns:a="http://schemas.openxmlformats.org/drawingml/2006/main">
           <a:graphicData uri="http://schemas.openxmlformats.org/drawingml/2006/chart">
@@ -21616,11 +20958,11 @@
         <p:spPr>
           <a:xfrm>
             <a:off x="566928" y="4956048"/>
-            <a:ext cx="3539642" cy="1207008"/>
+            <a:ext cx="3539642" cy="1133856"/>
           </a:xfrm>
           <a:prstGeom prst="roundRect">
             <a:avLst>
-              <a:gd name="adj" fmla="val 4545"/>
+              <a:gd name="adj" fmla="val 4839"/>
             </a:avLst>
           </a:prstGeom>
           <a:solidFill>
@@ -21642,8 +20984,8 @@
         </p:nvSpPr>
         <p:spPr>
           <a:xfrm>
-            <a:off x="749808" y="5093208"/>
-            <a:ext cx="3173882" cy="219456"/>
+            <a:off x="749808" y="5074920"/>
+            <a:ext cx="3173882" cy="237744"/>
           </a:xfrm>
           <a:prstGeom prst="rect">
             <a:avLst/>
@@ -21652,14 +20994,14 @@
           <a:ln/>
         </p:spPr>
         <p:txBody>
-          <a:bodyPr wrap="square" lIns="0" tIns="0" rIns="0" bIns="0" rtlCol="0" anchor="ctr"/>
+          <a:bodyPr wrap="square" lIns="0" tIns="0" rIns="0" bIns="0" rtlCol="0" anchor="t"/>
           <a:lstStyle/>
           <a:p>
             <a:pPr indent="0" marL="0">
               <a:buNone/>
             </a:pPr>
             <a:r>
-              <a:rPr lang="en-US" sz="900" b="1" spc="120" kern="0" dirty="0">
+              <a:rPr lang="en-US" sz="850" b="1" spc="100" kern="0" dirty="0">
                 <a:solidFill>
                   <a:srgbClr val="6E7689"/>
                 </a:solidFill>
@@ -21669,7 +21011,7 @@
               </a:rPr>
               <a:t>EBITDA BREAKEVEN</a:t>
             </a:r>
-            <a:endParaRPr lang="en-US" sz="900" dirty="0"/>
+            <a:endParaRPr lang="en-US" sz="850" dirty="0"/>
           </a:p>
         </p:txBody>
       </p:sp>
@@ -21691,7 +21033,9 @@
           <a:ln/>
         </p:spPr>
         <p:txBody>
-          <a:bodyPr wrap="square" lIns="0" tIns="0" rIns="0" bIns="0" rtlCol="0" anchor="t"/>
+          <a:bodyPr wrap="square" lIns="0" tIns="0" rIns="0" bIns="0" rtlCol="0" anchor="t">
+            <a:normAutofit/>
+          </a:bodyPr>
           <a:lstStyle/>
           <a:p>
             <a:pPr indent="0" marL="0">
@@ -21721,7 +21065,7 @@
         <p:spPr>
           <a:xfrm>
             <a:off x="749808" y="5797296"/>
-            <a:ext cx="3173882" cy="292608"/>
+            <a:ext cx="3173882" cy="219456"/>
           </a:xfrm>
           <a:prstGeom prst="rect">
             <a:avLst/>
@@ -21763,11 +21107,11 @@
         <p:spPr>
           <a:xfrm>
             <a:off x="4326026" y="4956048"/>
-            <a:ext cx="3539642" cy="1207008"/>
+            <a:ext cx="3539642" cy="1133856"/>
           </a:xfrm>
           <a:prstGeom prst="roundRect">
             <a:avLst>
-              <a:gd name="adj" fmla="val 4545"/>
+              <a:gd name="adj" fmla="val 4839"/>
             </a:avLst>
           </a:prstGeom>
           <a:solidFill>
@@ -21789,8 +21133,8 @@
         </p:nvSpPr>
         <p:spPr>
           <a:xfrm>
-            <a:off x="4508906" y="5093208"/>
-            <a:ext cx="3173882" cy="219456"/>
+            <a:off x="4508906" y="5074920"/>
+            <a:ext cx="3173882" cy="237744"/>
           </a:xfrm>
           <a:prstGeom prst="rect">
             <a:avLst/>
@@ -21799,14 +21143,14 @@
           <a:ln/>
         </p:spPr>
         <p:txBody>
-          <a:bodyPr wrap="square" lIns="0" tIns="0" rIns="0" bIns="0" rtlCol="0" anchor="ctr"/>
+          <a:bodyPr wrap="square" lIns="0" tIns="0" rIns="0" bIns="0" rtlCol="0" anchor="t"/>
           <a:lstStyle/>
           <a:p>
             <a:pPr indent="0" marL="0">
               <a:buNone/>
             </a:pPr>
             <a:r>
-              <a:rPr lang="en-US" sz="900" b="1" spc="120" kern="0" dirty="0">
+              <a:rPr lang="en-US" sz="850" b="1" spc="100" kern="0" dirty="0">
                 <a:solidFill>
                   <a:srgbClr val="6E7689"/>
                 </a:solidFill>
@@ -21816,7 +21160,7 @@
               </a:rPr>
               <a:t>MARGIN AT MATURITY</a:t>
             </a:r>
-            <a:endParaRPr lang="en-US" sz="900" dirty="0"/>
+            <a:endParaRPr lang="en-US" sz="850" dirty="0"/>
           </a:p>
         </p:txBody>
       </p:sp>
@@ -21838,7 +21182,9 @@
           <a:ln/>
         </p:spPr>
         <p:txBody>
-          <a:bodyPr wrap="square" lIns="0" tIns="0" rIns="0" bIns="0" rtlCol="0" anchor="t"/>
+          <a:bodyPr wrap="square" lIns="0" tIns="0" rIns="0" bIns="0" rtlCol="0" anchor="t">
+            <a:normAutofit/>
+          </a:bodyPr>
           <a:lstStyle/>
           <a:p>
             <a:pPr indent="0" marL="0">
@@ -21868,7 +21214,7 @@
         <p:spPr>
           <a:xfrm>
             <a:off x="4508906" y="5797296"/>
-            <a:ext cx="3173882" cy="292608"/>
+            <a:ext cx="3173882" cy="219456"/>
           </a:xfrm>
           <a:prstGeom prst="rect">
             <a:avLst/>
@@ -21910,11 +21256,11 @@
         <p:spPr>
           <a:xfrm>
             <a:off x="8085125" y="4956048"/>
-            <a:ext cx="3539642" cy="1207008"/>
+            <a:ext cx="3539642" cy="1133856"/>
           </a:xfrm>
           <a:prstGeom prst="roundRect">
             <a:avLst>
-              <a:gd name="adj" fmla="val 4545"/>
+              <a:gd name="adj" fmla="val 4839"/>
             </a:avLst>
           </a:prstGeom>
           <a:solidFill>
@@ -21936,8 +21282,8 @@
         </p:nvSpPr>
         <p:spPr>
           <a:xfrm>
-            <a:off x="8268005" y="5093208"/>
-            <a:ext cx="3173882" cy="219456"/>
+            <a:off x="8268005" y="5074920"/>
+            <a:ext cx="3173882" cy="237744"/>
           </a:xfrm>
           <a:prstGeom prst="rect">
             <a:avLst/>
@@ -21946,14 +21292,14 @@
           <a:ln/>
         </p:spPr>
         <p:txBody>
-          <a:bodyPr wrap="square" lIns="0" tIns="0" rIns="0" bIns="0" rtlCol="0" anchor="ctr"/>
+          <a:bodyPr wrap="square" lIns="0" tIns="0" rIns="0" bIns="0" rtlCol="0" anchor="t"/>
           <a:lstStyle/>
           <a:p>
             <a:pPr indent="0" marL="0">
               <a:buNone/>
             </a:pPr>
             <a:r>
-              <a:rPr lang="en-US" sz="900" b="1" spc="120" kern="0" dirty="0">
+              <a:rPr lang="en-US" sz="850" b="1" spc="100" kern="0" dirty="0">
                 <a:solidFill>
                   <a:srgbClr val="6E7689"/>
                 </a:solidFill>
@@ -21963,7 +21309,7 @@
               </a:rPr>
               <a:t>CUMULATIVE EBITDA</a:t>
             </a:r>
-            <a:endParaRPr lang="en-US" sz="900" dirty="0"/>
+            <a:endParaRPr lang="en-US" sz="850" dirty="0"/>
           </a:p>
         </p:txBody>
       </p:sp>
@@ -21985,7 +21331,9 @@
           <a:ln/>
         </p:spPr>
         <p:txBody>
-          <a:bodyPr wrap="square" lIns="0" tIns="0" rIns="0" bIns="0" rtlCol="0" anchor="t"/>
+          <a:bodyPr wrap="square" lIns="0" tIns="0" rIns="0" bIns="0" rtlCol="0" anchor="t">
+            <a:normAutofit/>
+          </a:bodyPr>
           <a:lstStyle/>
           <a:p>
             <a:pPr indent="0" marL="0">
@@ -22015,7 +21363,7 @@
         <p:spPr>
           <a:xfrm>
             <a:off x="8268005" y="5797296"/>
-            <a:ext cx="3173882" cy="292608"/>
+            <a:ext cx="3173882" cy="219456"/>
           </a:xfrm>
           <a:prstGeom prst="rect">
             <a:avLst/>
@@ -22225,8 +21573,8 @@
         </p:nvSpPr>
         <p:spPr>
           <a:xfrm>
-            <a:off x="566928" y="1005840"/>
-            <a:ext cx="11057839" cy="512064"/>
+            <a:off x="566928" y="950976"/>
+            <a:ext cx="11057839" cy="462280"/>
           </a:xfrm>
           <a:prstGeom prst="rect">
             <a:avLst/>
@@ -22240,12 +21588,12 @@
           <a:p>
             <a:pPr indent="0" marL="0">
               <a:lnSpc>
-                <a:spcPts val="1900"/>
+                <a:spcPts val="1750"/>
               </a:lnSpc>
               <a:buNone/>
             </a:pPr>
             <a:r>
-              <a:rPr lang="en-US" sz="1350" dirty="0">
+              <a:rPr lang="en-US" sz="1250" dirty="0">
                 <a:solidFill>
                   <a:srgbClr val="3B4660"/>
                 </a:solidFill>
@@ -22255,7 +21603,7 @@
               </a:rPr>
               <a:t>Unlevered free cash flow to the project. Capital deployed is the true project cost — the revolving opex facility is financing, not project cost, so it is excluded here.</a:t>
             </a:r>
-            <a:endParaRPr lang="en-US" sz="1350" dirty="0"/>
+            <a:endParaRPr lang="en-US" sz="1250" dirty="0"/>
           </a:p>
         </p:txBody>
       </p:sp>
@@ -22266,8 +21614,8 @@
           <p:nvPr/>
         </p:nvGraphicFramePr>
         <p:xfrm>
-          <a:off x="566928" y="1627632"/>
-          <a:ext cx="11057839" cy="2514600"/>
+          <a:off x="566928" y="1541272"/>
+          <a:ext cx="11057839" cy="2194560"/>
         </p:xfrm>
         <a:graphic xmlns:a="http://schemas.openxmlformats.org/drawingml/2006/main">
           <a:graphicData uri="http://schemas.openxmlformats.org/drawingml/2006/chart">
@@ -22283,12 +21631,12 @@
         </p:nvSpPr>
         <p:spPr>
           <a:xfrm>
-            <a:off x="566928" y="4370832"/>
-            <a:ext cx="2599868" cy="1280160"/>
+            <a:off x="566928" y="3964432"/>
+            <a:ext cx="2599868" cy="1207008"/>
           </a:xfrm>
           <a:prstGeom prst="roundRect">
             <a:avLst>
-              <a:gd name="adj" fmla="val 4286"/>
+              <a:gd name="adj" fmla="val 4545"/>
             </a:avLst>
           </a:prstGeom>
           <a:solidFill>
@@ -22310,8 +21658,8 @@
         </p:nvSpPr>
         <p:spPr>
           <a:xfrm>
-            <a:off x="749808" y="4507992"/>
-            <a:ext cx="2234108" cy="219456"/>
+            <a:off x="749808" y="4083304"/>
+            <a:ext cx="2234108" cy="237744"/>
           </a:xfrm>
           <a:prstGeom prst="rect">
             <a:avLst/>
@@ -22320,14 +21668,14 @@
           <a:ln/>
         </p:spPr>
         <p:txBody>
-          <a:bodyPr wrap="square" lIns="0" tIns="0" rIns="0" bIns="0" rtlCol="0" anchor="ctr"/>
+          <a:bodyPr wrap="square" lIns="0" tIns="0" rIns="0" bIns="0" rtlCol="0" anchor="t"/>
           <a:lstStyle/>
           <a:p>
             <a:pPr indent="0" marL="0">
               <a:buNone/>
             </a:pPr>
             <a:r>
-              <a:rPr lang="en-US" sz="900" b="1" spc="120" kern="0" dirty="0">
+              <a:rPr lang="en-US" sz="850" b="1" spc="100" kern="0" dirty="0">
                 <a:solidFill>
                   <a:srgbClr val="6E7689"/>
                 </a:solidFill>
@@ -22337,7 +21685,7 @@
               </a:rPr>
               <a:t>PROJECT IRR</a:t>
             </a:r>
-            <a:endParaRPr lang="en-US" sz="900" dirty="0"/>
+            <a:endParaRPr lang="en-US" sz="850" dirty="0"/>
           </a:p>
         </p:txBody>
       </p:sp>
@@ -22349,7 +21697,7 @@
         </p:nvSpPr>
         <p:spPr>
           <a:xfrm>
-            <a:off x="749808" y="4736592"/>
+            <a:off x="749808" y="4330192"/>
             <a:ext cx="2234108" cy="457200"/>
           </a:xfrm>
           <a:prstGeom prst="rect">
@@ -22359,7 +21707,9 @@
           <a:ln/>
         </p:spPr>
         <p:txBody>
-          <a:bodyPr wrap="square" lIns="0" tIns="0" rIns="0" bIns="0" rtlCol="0" anchor="t"/>
+          <a:bodyPr wrap="square" lIns="0" tIns="0" rIns="0" bIns="0" rtlCol="0" anchor="t">
+            <a:normAutofit/>
+          </a:bodyPr>
           <a:lstStyle/>
           <a:p>
             <a:pPr indent="0" marL="0">
@@ -22388,8 +21738,8 @@
         </p:nvSpPr>
         <p:spPr>
           <a:xfrm>
-            <a:off x="749808" y="5212080"/>
-            <a:ext cx="2234108" cy="365760"/>
+            <a:off x="749808" y="4805680"/>
+            <a:ext cx="2234108" cy="292608"/>
           </a:xfrm>
           <a:prstGeom prst="rect">
             <a:avLst/>
@@ -22430,12 +21780,12 @@
         </p:nvSpPr>
         <p:spPr>
           <a:xfrm>
-            <a:off x="3386252" y="4370832"/>
-            <a:ext cx="2599868" cy="1280160"/>
+            <a:off x="3386252" y="3964432"/>
+            <a:ext cx="2599868" cy="1207008"/>
           </a:xfrm>
           <a:prstGeom prst="roundRect">
             <a:avLst>
-              <a:gd name="adj" fmla="val 4286"/>
+              <a:gd name="adj" fmla="val 4545"/>
             </a:avLst>
           </a:prstGeom>
           <a:solidFill>
@@ -22457,8 +21807,8 @@
         </p:nvSpPr>
         <p:spPr>
           <a:xfrm>
-            <a:off x="3569132" y="4507992"/>
-            <a:ext cx="2234108" cy="219456"/>
+            <a:off x="3569132" y="4083304"/>
+            <a:ext cx="2234108" cy="237744"/>
           </a:xfrm>
           <a:prstGeom prst="rect">
             <a:avLst/>
@@ -22467,14 +21817,14 @@
           <a:ln/>
         </p:spPr>
         <p:txBody>
-          <a:bodyPr wrap="square" lIns="0" tIns="0" rIns="0" bIns="0" rtlCol="0" anchor="ctr"/>
+          <a:bodyPr wrap="square" lIns="0" tIns="0" rIns="0" bIns="0" rtlCol="0" anchor="t"/>
           <a:lstStyle/>
           <a:p>
             <a:pPr indent="0" marL="0">
               <a:buNone/>
             </a:pPr>
             <a:r>
-              <a:rPr lang="en-US" sz="900" b="1" spc="120" kern="0" dirty="0">
+              <a:rPr lang="en-US" sz="850" b="1" spc="100" kern="0" dirty="0">
                 <a:solidFill>
                   <a:srgbClr val="6E7689"/>
                 </a:solidFill>
@@ -22484,7 +21834,7 @@
               </a:rPr>
               <a:t>PAYBACK</a:t>
             </a:r>
-            <a:endParaRPr lang="en-US" sz="900" dirty="0"/>
+            <a:endParaRPr lang="en-US" sz="850" dirty="0"/>
           </a:p>
         </p:txBody>
       </p:sp>
@@ -22496,7 +21846,7 @@
         </p:nvSpPr>
         <p:spPr>
           <a:xfrm>
-            <a:off x="3569132" y="4736592"/>
+            <a:off x="3569132" y="4330192"/>
             <a:ext cx="2234108" cy="457200"/>
           </a:xfrm>
           <a:prstGeom prst="rect">
@@ -22506,7 +21856,9 @@
           <a:ln/>
         </p:spPr>
         <p:txBody>
-          <a:bodyPr wrap="square" lIns="0" tIns="0" rIns="0" bIns="0" rtlCol="0" anchor="t"/>
+          <a:bodyPr wrap="square" lIns="0" tIns="0" rIns="0" bIns="0" rtlCol="0" anchor="t">
+            <a:normAutofit/>
+          </a:bodyPr>
           <a:lstStyle/>
           <a:p>
             <a:pPr indent="0" marL="0">
@@ -22535,8 +21887,8 @@
         </p:nvSpPr>
         <p:spPr>
           <a:xfrm>
-            <a:off x="3569132" y="5212080"/>
-            <a:ext cx="2234108" cy="365760"/>
+            <a:off x="3569132" y="4805680"/>
+            <a:ext cx="2234108" cy="292608"/>
           </a:xfrm>
           <a:prstGeom prst="rect">
             <a:avLst/>
@@ -22577,12 +21929,12 @@
         </p:nvSpPr>
         <p:spPr>
           <a:xfrm>
-            <a:off x="6205576" y="4370832"/>
-            <a:ext cx="2599868" cy="1280160"/>
+            <a:off x="6205576" y="3964432"/>
+            <a:ext cx="2599868" cy="1207008"/>
           </a:xfrm>
           <a:prstGeom prst="roundRect">
             <a:avLst>
-              <a:gd name="adj" fmla="val 4286"/>
+              <a:gd name="adj" fmla="val 4545"/>
             </a:avLst>
           </a:prstGeom>
           <a:solidFill>
@@ -22604,8 +21956,8 @@
         </p:nvSpPr>
         <p:spPr>
           <a:xfrm>
-            <a:off x="6388456" y="4507992"/>
-            <a:ext cx="2234108" cy="219456"/>
+            <a:off x="6388456" y="4083304"/>
+            <a:ext cx="2234108" cy="237744"/>
           </a:xfrm>
           <a:prstGeom prst="rect">
             <a:avLst/>
@@ -22614,14 +21966,14 @@
           <a:ln/>
         </p:spPr>
         <p:txBody>
-          <a:bodyPr wrap="square" lIns="0" tIns="0" rIns="0" bIns="0" rtlCol="0" anchor="ctr"/>
+          <a:bodyPr wrap="square" lIns="0" tIns="0" rIns="0" bIns="0" rtlCol="0" anchor="t"/>
           <a:lstStyle/>
           <a:p>
             <a:pPr indent="0" marL="0">
               <a:buNone/>
             </a:pPr>
             <a:r>
-              <a:rPr lang="en-US" sz="900" b="1" spc="120" kern="0" dirty="0">
+              <a:rPr lang="en-US" sz="850" b="1" spc="100" kern="0" dirty="0">
                 <a:solidFill>
                   <a:srgbClr val="6E7689"/>
                 </a:solidFill>
@@ -22631,7 +21983,7 @@
               </a:rPr>
               <a:t>ALL-IN COST OF CGTMSE DEBT</a:t>
             </a:r>
-            <a:endParaRPr lang="en-US" sz="900" dirty="0"/>
+            <a:endParaRPr lang="en-US" sz="850" dirty="0"/>
           </a:p>
         </p:txBody>
       </p:sp>
@@ -22643,7 +21995,7 @@
         </p:nvSpPr>
         <p:spPr>
           <a:xfrm>
-            <a:off x="6388456" y="4736592"/>
+            <a:off x="6388456" y="4330192"/>
             <a:ext cx="2234108" cy="457200"/>
           </a:xfrm>
           <a:prstGeom prst="rect">
@@ -22653,7 +22005,9 @@
           <a:ln/>
         </p:spPr>
         <p:txBody>
-          <a:bodyPr wrap="square" lIns="0" tIns="0" rIns="0" bIns="0" rtlCol="0" anchor="t"/>
+          <a:bodyPr wrap="square" lIns="0" tIns="0" rIns="0" bIns="0" rtlCol="0" anchor="t">
+            <a:normAutofit/>
+          </a:bodyPr>
           <a:lstStyle/>
           <a:p>
             <a:pPr indent="0" marL="0">
@@ -22682,8 +22036,8 @@
         </p:nvSpPr>
         <p:spPr>
           <a:xfrm>
-            <a:off x="6388456" y="5212080"/>
-            <a:ext cx="2234108" cy="365760"/>
+            <a:off x="6388456" y="4805680"/>
+            <a:ext cx="2234108" cy="292608"/>
           </a:xfrm>
           <a:prstGeom prst="rect">
             <a:avLst/>
@@ -22724,12 +22078,12 @@
         </p:nvSpPr>
         <p:spPr>
           <a:xfrm>
-            <a:off x="9024899" y="4370832"/>
-            <a:ext cx="2599868" cy="1280160"/>
+            <a:off x="9024899" y="3964432"/>
+            <a:ext cx="2599868" cy="1207008"/>
           </a:xfrm>
           <a:prstGeom prst="roundRect">
             <a:avLst>
-              <a:gd name="adj" fmla="val 4286"/>
+              <a:gd name="adj" fmla="val 4545"/>
             </a:avLst>
           </a:prstGeom>
           <a:solidFill>
@@ -22751,8 +22105,8 @@
         </p:nvSpPr>
         <p:spPr>
           <a:xfrm>
-            <a:off x="9207779" y="4507992"/>
-            <a:ext cx="2234108" cy="219456"/>
+            <a:off x="9207779" y="4083304"/>
+            <a:ext cx="2234108" cy="237744"/>
           </a:xfrm>
           <a:prstGeom prst="rect">
             <a:avLst/>
@@ -22761,14 +22115,14 @@
           <a:ln/>
         </p:spPr>
         <p:txBody>
-          <a:bodyPr wrap="square" lIns="0" tIns="0" rIns="0" bIns="0" rtlCol="0" anchor="ctr"/>
+          <a:bodyPr wrap="square" lIns="0" tIns="0" rIns="0" bIns="0" rtlCol="0" anchor="t"/>
           <a:lstStyle/>
           <a:p>
             <a:pPr indent="0" marL="0">
               <a:buNone/>
             </a:pPr>
             <a:r>
-              <a:rPr lang="en-US" sz="900" b="1" spc="120" kern="0" dirty="0">
+              <a:rPr lang="en-US" sz="850" b="1" spc="100" kern="0" dirty="0">
                 <a:solidFill>
                   <a:srgbClr val="6E7689"/>
                 </a:solidFill>
@@ -22778,7 +22132,7 @@
               </a:rPr>
               <a:t>SPREAD OVER DEBT</a:t>
             </a:r>
-            <a:endParaRPr lang="en-US" sz="900" dirty="0"/>
+            <a:endParaRPr lang="en-US" sz="850" dirty="0"/>
           </a:p>
         </p:txBody>
       </p:sp>
@@ -22790,7 +22144,7 @@
         </p:nvSpPr>
         <p:spPr>
           <a:xfrm>
-            <a:off x="9207779" y="4736592"/>
+            <a:off x="9207779" y="4330192"/>
             <a:ext cx="2234108" cy="457200"/>
           </a:xfrm>
           <a:prstGeom prst="rect">
@@ -22800,7 +22154,9 @@
           <a:ln/>
         </p:spPr>
         <p:txBody>
-          <a:bodyPr wrap="square" lIns="0" tIns="0" rIns="0" bIns="0" rtlCol="0" anchor="t"/>
+          <a:bodyPr wrap="square" lIns="0" tIns="0" rIns="0" bIns="0" rtlCol="0" anchor="t">
+            <a:normAutofit/>
+          </a:bodyPr>
           <a:lstStyle/>
           <a:p>
             <a:pPr indent="0" marL="0">
@@ -22829,8 +22185,8 @@
         </p:nvSpPr>
         <p:spPr>
           <a:xfrm>
-            <a:off x="9207779" y="5212080"/>
-            <a:ext cx="2234108" cy="365760"/>
+            <a:off x="9207779" y="4805680"/>
+            <a:ext cx="2234108" cy="292608"/>
           </a:xfrm>
           <a:prstGeom prst="rect">
             <a:avLst/>
@@ -23040,8 +22396,8 @@
         </p:nvSpPr>
         <p:spPr>
           <a:xfrm>
-            <a:off x="566928" y="1005840"/>
-            <a:ext cx="11057839" cy="512064"/>
+            <a:off x="566928" y="950976"/>
+            <a:ext cx="11057839" cy="231140"/>
           </a:xfrm>
           <a:prstGeom prst="rect">
             <a:avLst/>
@@ -23055,12 +22411,12 @@
           <a:p>
             <a:pPr indent="0" marL="0">
               <a:lnSpc>
-                <a:spcPts val="1900"/>
+                <a:spcPts val="1750"/>
               </a:lnSpc>
               <a:buNone/>
             </a:pPr>
             <a:r>
-              <a:rPr lang="en-US" sz="1350" dirty="0">
+              <a:rPr lang="en-US" sz="1250" dirty="0">
                 <a:solidFill>
                   <a:srgbClr val="3B4660"/>
                 </a:solidFill>
@@ -23070,7 +22426,7 @@
               </a:rPr>
               <a:t>One assumption separates a project that should not be bid from one that comfortably clears its cost of capital: how many visitors buy the show.</a:t>
             </a:r>
-            <a:endParaRPr lang="en-US" sz="1350" dirty="0"/>
+            <a:endParaRPr lang="en-US" sz="1250" dirty="0"/>
           </a:p>
         </p:txBody>
       </p:sp>
@@ -23081,8 +22437,8 @@
           <p:nvPr/>
         </p:nvGraphicFramePr>
         <p:xfrm>
-          <a:off x="566928" y="1627632"/>
-          <a:ext cx="11057839" cy="2286000"/>
+          <a:off x="566928" y="1310132"/>
+          <a:ext cx="11057839" cy="1965960"/>
         </p:xfrm>
         <a:graphic xmlns:a="http://schemas.openxmlformats.org/drawingml/2006/main">
           <a:graphicData uri="http://schemas.openxmlformats.org/drawingml/2006/chart">
@@ -23105,7 +22461,7 @@
           </p:nvPr>
         </p:nvGraphicFramePr>
         <p:xfrm>
-          <a:off x="566928" y="4142232"/>
+          <a:off x="566928" y="3504692"/>
           <a:ext cx="11057839" cy="914400"/>
         </p:xfrm>
         <a:graphic>
@@ -24489,12 +23845,12 @@
         </p:nvSpPr>
         <p:spPr>
           <a:xfrm>
-            <a:off x="566928" y="5532120"/>
-            <a:ext cx="11057839" cy="758952"/>
+            <a:off x="566928" y="3605276"/>
+            <a:ext cx="11057839" cy="1062299"/>
           </a:xfrm>
           <a:prstGeom prst="roundRect">
             <a:avLst>
-              <a:gd name="adj" fmla="val 6024"/>
+              <a:gd name="adj" fmla="val 4304"/>
             </a:avLst>
           </a:prstGeom>
           <a:solidFill>
@@ -24516,8 +23872,8 @@
         </p:nvSpPr>
         <p:spPr>
           <a:xfrm>
-            <a:off x="804672" y="5678424"/>
-            <a:ext cx="2743200" cy="201168"/>
+            <a:off x="804672" y="3715004"/>
+            <a:ext cx="2743200" cy="182880"/>
           </a:xfrm>
           <a:prstGeom prst="rect">
             <a:avLst/>
@@ -24555,8 +23911,8 @@
         </p:nvSpPr>
         <p:spPr>
           <a:xfrm>
-            <a:off x="804672" y="5879592"/>
-            <a:ext cx="10582351" cy="232220"/>
+            <a:off x="804672" y="3897884"/>
+            <a:ext cx="10582351" cy="288595"/>
           </a:xfrm>
           <a:prstGeom prst="rect">
             <a:avLst/>
@@ -24570,12 +23926,12 @@
           <a:p>
             <a:pPr indent="0" marL="0">
               <a:lnSpc>
-                <a:spcPts val="1725"/>
+                <a:spcPts val="2185"/>
               </a:lnSpc>
               <a:buNone/>
             </a:pPr>
             <a:r>
-              <a:rPr lang="en-US" sz="1500" b="1" dirty="0">
+              <a:rPr lang="en-US" sz="1900" b="1" dirty="0">
                 <a:solidFill>
                   <a:srgbClr val="0A1426"/>
                 </a:solidFill>
@@ -24585,7 +23941,7 @@
               </a:rPr>
               <a:t>BDA's own case works — and it is not implausible</a:t>
             </a:r>
-            <a:endParaRPr lang="en-US" sz="1500" dirty="0"/>
+            <a:endParaRPr lang="en-US" sz="1900" dirty="0"/>
           </a:p>
         </p:txBody>
       </p:sp>
@@ -24597,8 +23953,8 @@
         </p:nvSpPr>
         <p:spPr>
           <a:xfrm>
-            <a:off x="804672" y="6184964"/>
-            <a:ext cx="10582351" cy="182880"/>
+            <a:off x="804672" y="4241343"/>
+            <a:ext cx="10582351" cy="353080"/>
           </a:xfrm>
           <a:prstGeom prst="rect">
             <a:avLst/>
@@ -24612,12 +23968,12 @@
           <a:p>
             <a:pPr indent="0" marL="0">
               <a:lnSpc>
-                <a:spcPts val="1207"/>
+                <a:spcPts val="1704"/>
               </a:lnSpc>
               <a:buNone/>
             </a:pPr>
             <a:r>
-              <a:rPr lang="en-US" sz="850" dirty="0">
+              <a:rPr lang="en-US" sz="1200" dirty="0">
                 <a:solidFill>
                   <a:srgbClr val="3B4660"/>
                 </a:solidFill>
@@ -24625,9 +23981,9 @@
                 <a:ea typeface="Calibri" pitchFamily="34" charset="-122"/>
                 <a:cs typeface="Calibri" pitchFamily="34" charset="-120"/>
               </a:rPr>
-              <a:t>On BDA's stated assumptions the project returns 36.1% with a stabilised margin of 36.5%. Bid at a price that survives the base case and rewards the BDA case.</a:t>
+              <a:t>On BDA's own assumptions the project returns 36.1%. Bid a price that survives the base case and rewards the BDA case.</a:t>
             </a:r>
-            <a:endParaRPr lang="en-US" sz="850" dirty="0"/>
+            <a:endParaRPr lang="en-US" sz="1200" dirty="0"/>
           </a:p>
         </p:txBody>
       </p:sp>

--- a/pptx/EOD-Ramayan-Vatika-Project-Finance.pptx
+++ b/pptx/EOD-Ramayan-Vatika-Project-Finance.pptx
@@ -5823,7 +5823,7 @@
                           <a:ea typeface="Calibri" pitchFamily="34" charset="-122"/>
                           <a:cs typeface="Calibri" pitchFamily="34" charset="-120"/>
                         </a:rPr>
-                        <a:t>1.8%</a:t>
+                        <a:t>5.4%</a:t>
                       </a:r>
                       <a:endParaRPr lang="en-US" sz="1100" dirty="0">
                         <a:latin typeface="Calibri" charset="0"/>
@@ -6161,7 +6161,7 @@
                 <a:ea typeface="Calibri" pitchFamily="34" charset="-122"/>
                 <a:cs typeface="Calibri" pitchFamily="34" charset="-120"/>
               </a:rPr>
-              <a:t>At 70% of the project an investor earns 1.8%; a 22% hurdle would take 100% — the whole project and then some.</a:t>
+              <a:t>At 70% of the project an investor earns 5.4%; a 22% hurdle would take 100% — the whole project and then some.</a:t>
             </a:r>
             <a:endParaRPr lang="en-US" sz="1200" dirty="0"/>
           </a:p>
@@ -8182,7 +8182,7 @@
                           <a:ea typeface="Calibri" pitchFamily="34" charset="-122"/>
                           <a:cs typeface="Calibri" pitchFamily="34" charset="-120"/>
                         </a:rPr>
-                        <a:t>-1.4%</a:t>
+                        <a:t>6.6%</a:t>
                       </a:r>
                       <a:endParaRPr lang="en-US" sz="1100" dirty="0">
                         <a:latin typeface="Calibri" charset="0"/>
@@ -8753,7 +8753,7 @@
                 <a:ea typeface="Calibri" pitchFamily="34" charset="-122"/>
                 <a:cs typeface="Calibri" pitchFamily="34" charset="-120"/>
               </a:rPr>
-              <a:t>1.8%</a:t>
+              <a:t>5.4%</a:t>
             </a:r>
             <a:endParaRPr lang="en-US" sz="3000" dirty="0"/>
           </a:p>
@@ -9086,7 +9086,7 @@
                 <a:ea typeface="Calibri" pitchFamily="34" charset="-122"/>
                 <a:cs typeface="Calibri" pitchFamily="34" charset="-120"/>
               </a:rPr>
-              <a:t>1.13×</a:t>
+              <a:t>1.38×</a:t>
             </a:r>
             <a:endParaRPr lang="en-US" sz="950" dirty="0"/>
           </a:p>
@@ -9903,7 +9903,7 @@
                 <a:ea typeface="Calibri" pitchFamily="34" charset="-122"/>
                 <a:cs typeface="Calibri" pitchFamily="34" charset="-120"/>
               </a:rPr>
-              <a:t>-1.4%</a:t>
+              <a:t>6.6%</a:t>
             </a:r>
             <a:endParaRPr lang="en-US" sz="3000" dirty="0"/>
           </a:p>
@@ -10334,7 +10334,7 @@
                 <a:ea typeface="Calibri" pitchFamily="34" charset="-122"/>
                 <a:cs typeface="Calibri" pitchFamily="34" charset="-120"/>
               </a:rPr>
-              <a:t>0.92×</a:t>
+              <a:t>1.43×</a:t>
             </a:r>
             <a:endParaRPr lang="en-US" sz="950" dirty="0"/>
           </a:p>
@@ -11179,7 +11179,7 @@
             <a:avLst/>
           </a:prstGeom>
           <a:solidFill>
-            <a:srgbClr val="2B66EA"/>
+            <a:srgbClr val="D97706"/>
           </a:solidFill>
           <a:ln/>
         </p:spPr>
@@ -11217,7 +11217,7 @@
                 <a:ea typeface="Calibri" pitchFamily="34" charset="-122"/>
                 <a:cs typeface="Calibri" pitchFamily="34" charset="-120"/>
               </a:rPr>
-              <a:t>Bid dates are blank</a:t>
+              <a:t>Restoration at handover</a:t>
             </a:r>
             <a:endParaRPr lang="en-US" sz="1250" dirty="0"/>
           </a:p>
@@ -11259,7 +11259,7 @@
                 <a:ea typeface="Calibri" pitchFamily="34" charset="-122"/>
                 <a:cs typeface="Calibri" pitchFamily="34" charset="-120"/>
               </a:rPr>
-              <a:t>The data sheet's key-dates table has no bid start, end, pre-bid meeting or technical-opening dates. Confirm the live schedule on etender.up.nic.in before planning submission.</a:t>
+              <a:t>Every asset returned in handover condition, BDA's decision binding. A bronze statue and a Miyawaki forest over fifteen years. Mitigation: a photographed joint handover report on day one and a restoration provision accrued annually.</a:t>
             </a:r>
             <a:endParaRPr lang="en-US" sz="1050" dirty="0"/>
           </a:p>

--- a/pptx/EOD-Ramayan-Vatika-Project-Finance.pptx
+++ b/pptx/EOD-Ramayan-Vatika-Project-Finance.pptx
@@ -120,761 +120,7 @@
 </p:presentation>
 </file>
 
-<file path=ppt/charts/chart10.xml><?xml version="1.0" encoding="utf-8"?>
-<c:chartSpace xmlns:c="http://schemas.openxmlformats.org/drawingml/2006/chart" xmlns:a="http://schemas.openxmlformats.org/drawingml/2006/main" xmlns:r="http://schemas.openxmlformats.org/officeDocument/2006/relationships">
-  <c:date1904 val="0"/>
-  <c:roundedCorners val="1"/>
-  <c:chart>
-    <c:autoTitleDeleted val="1"/>
-    <c:plotArea>
-      <c:layout/>
-      <c:barChart>
-        <c:barDir val="col"/>
-        <c:grouping val="clustered"/>
-        <c:varyColors val="0"/>
-        <c:ser>
-          <c:idx val="0"/>
-          <c:order val="0"/>
-          <c:tx>
-            <c:strRef>
-              <c:f>Sheet1!$B$1</c:f>
-              <c:strCache>
-                <c:ptCount val="1"/>
-                <c:pt idx="0">
-                  <c:v>Project IRR</c:v>
-                </c:pt>
-              </c:strCache>
-            </c:strRef>
-          </c:tx>
-          <c:spPr>
-            <a:solidFill>
-              <a:srgbClr val="C8553D"/>
-            </a:solidFill>
-            <a:effectLst/>
-          </c:spPr>
-          <c:invertIfNegative val="0"/>
-          <c:dLbls>
-            <c:numFmt formatCode="0.0&quot;%&quot;" sourceLinked="0"/>
-            <c:txPr>
-              <a:bodyPr/>
-              <a:lstStyle/>
-              <a:p>
-                <a:pPr>
-                  <a:defRPr b="0" i="0" strike="noStrike" sz="900" u="none">
-                    <a:solidFill>
-                      <a:srgbClr val="3B4660"/>
-                    </a:solidFill>
-                    <a:latin typeface="Calibri"/>
-                  </a:defRPr>
-                </a:pPr>
-              </a:p>
-            </c:txPr>
-            <c:showLegendKey val="0"/>
-            <c:showVal val="1"/>
-            <c:showCatName val="0"/>
-            <c:showSerName val="0"/>
-            <c:showPercent val="0"/>
-            <c:showBubbleSize val="0"/>
-            <c:showLeaderLines val="0"/>
-          </c:dLbls>
-          <c:dPt>
-            <c:idx val="0"/>
-            <c:invertIfNegative val="0"/>
-            <c:bubble3D val="0"/>
-            <c:spPr>
-              <a:solidFill>
-                <a:srgbClr val="C8553D"/>
-              </a:solidFill>
-              <a:effectLst/>
-            </c:spPr>
-          </c:dPt>
-          <c:dPt>
-            <c:idx val="1"/>
-            <c:invertIfNegative val="0"/>
-            <c:bubble3D val="0"/>
-            <c:spPr>
-              <a:solidFill>
-                <a:srgbClr val="2B66EA"/>
-              </a:solidFill>
-              <a:effectLst/>
-            </c:spPr>
-          </c:dPt>
-          <c:dPt>
-            <c:idx val="2"/>
-            <c:invertIfNegative val="0"/>
-            <c:bubble3D val="0"/>
-            <c:spPr>
-              <a:solidFill>
-                <a:srgbClr val="10B981"/>
-              </a:solidFill>
-              <a:effectLst/>
-            </c:spPr>
-          </c:dPt>
-          <c:cat>
-            <c:multiLvlStrRef>
-              <c:f>Sheet1!$A$2:$A$4</c:f>
-              <c:multiLvlStrCache>
-                <c:ptCount val="3"/>
-                <c:lvl>
-                  <c:pt idx="0">
-                    <c:v>Downside</c:v>
-                  </c:pt>
-                  <c:pt idx="1">
-                    <c:v>Base case</c:v>
-                  </c:pt>
-                  <c:pt idx="2">
-                    <c:v>BDA's own case</c:v>
-                  </c:pt>
-                </c:lvl>
-              </c:multiLvlStrCache>
-            </c:multiLvlStrRef>
-          </c:cat>
-          <c:val>
-            <c:numRef>
-              <c:f>Sheet1!$B$2:$B$4</c:f>
-              <c:numCache>
-                <c:formatCode>General</c:formatCode>
-                <c:ptCount val="3"/>
-                <c:pt idx="0">
-                  <c:v>-36.5</c:v>
-                </c:pt>
-                <c:pt idx="1">
-                  <c:v>11.4</c:v>
-                </c:pt>
-                <c:pt idx="2">
-                  <c:v>36.1</c:v>
-                </c:pt>
-              </c:numCache>
-            </c:numRef>
-          </c:val>
-        </c:ser>
-        <c:dLbls>
-          <c:numFmt formatCode="0.0&quot;%&quot;" sourceLinked="0"/>
-          <c:txPr>
-            <a:bodyPr/>
-            <a:lstStyle/>
-            <a:p>
-              <a:pPr>
-                <a:defRPr b="0" i="0" strike="noStrike" sz="900" u="none">
-                  <a:solidFill>
-                    <a:srgbClr val="3B4660"/>
-                  </a:solidFill>
-                  <a:latin typeface="Calibri"/>
-                </a:defRPr>
-              </a:pPr>
-            </a:p>
-          </c:txPr>
-          <c:showLegendKey val="0"/>
-          <c:showVal val="1"/>
-          <c:showCatName val="0"/>
-          <c:showSerName val="0"/>
-          <c:showPercent val="0"/>
-          <c:showBubbleSize val="0"/>
-          <c:showLeaderLines val="0"/>
-        </c:dLbls>
-        <c:gapWidth val="45"/>
-        <c:overlap val="0"/>
-        <c:axId val="2094734554"/>
-        <c:axId val="2094734552"/>
-        <c:axId val="2094734556"/>
-      </c:barChart>
-      <c:catAx>
-        <c:axId val="2094734554"/>
-        <c:scaling>
-          <c:orientation val="minMax"/>
-        </c:scaling>
-        <c:delete val="0"/>
-        <c:axPos val="b"/>
-        <c:numFmt formatCode="General" sourceLinked="1"/>
-        <c:majorTickMark val="out"/>
-        <c:minorTickMark val="none"/>
-        <c:tickLblPos val="low"/>
-        <c:spPr>
-          <a:ln w="12700" cap="flat">
-            <a:solidFill>
-              <a:srgbClr val="888888"/>
-            </a:solidFill>
-            <a:prstDash val="solid"/>
-            <a:round/>
-          </a:ln>
-        </c:spPr>
-        <c:txPr>
-          <a:bodyPr/>
-          <a:lstStyle/>
-          <a:p>
-            <a:pPr>
-              <a:defRPr sz="1000" b="0" i="0" u="none" strike="noStrike">
-                <a:solidFill>
-                  <a:srgbClr val="3B4660"/>
-                </a:solidFill>
-                <a:latin typeface="Calibri"/>
-              </a:defRPr>
-            </a:pPr>
-            <a:endParaRPr lang="en-US"/>
-          </a:p>
-        </c:txPr>
-        <c:crossAx val="2094734552"/>
-        <c:crosses val="autoZero"/>
-        <c:auto val="1"/>
-        <c:lblAlgn val="ctr"/>
-        <c:noMultiLvlLbl val="1"/>
-      </c:catAx>
-      <c:valAx>
-        <c:axId val="2094734552"/>
-        <c:scaling>
-          <c:orientation val="minMax"/>
-        </c:scaling>
-        <c:delete val="0"/>
-        <c:axPos val="l"/>
-        <c:majorGridlines>
-          <c:spPr>
-            <a:ln w="12700" cap="flat">
-              <a:solidFill>
-                <a:srgbClr val="E2E4EA"/>
-              </a:solidFill>
-              <a:prstDash val="solid"/>
-              <a:round/>
-            </a:ln>
-          </c:spPr>
-        </c:majorGridlines>
-        <c:title>
-          <c:tx>
-            <c:rich>
-              <a:bodyPr/>
-              <a:lstStyle/>
-              <a:p>
-                <a:pPr>
-                  <a:defRPr sz="1000" b="0" i="0" u="none" strike="noStrike">
-                    <a:solidFill>
-                      <a:srgbClr val="6E7689"/>
-                    </a:solidFill>
-                    <a:latin typeface="Calibri"/>
-                  </a:defRPr>
-                </a:pPr>
-                <a:r>
-                  <a:rPr sz="1000" b="0" i="0" u="none" strike="noStrike">
-                    <a:solidFill>
-                      <a:srgbClr val="6E7689"/>
-                    </a:solidFill>
-                    <a:latin typeface="Calibri"/>
-                  </a:rPr>
-                  <a:t>Project IRR, %</a:t>
-                </a:r>
-              </a:p>
-            </c:rich>
-          </c:tx>
-          <c:layout/>
-          <c:overlay val="0"/>
-        </c:title>
-        <c:numFmt formatCode="General" sourceLinked="0"/>
-        <c:majorTickMark val="out"/>
-        <c:minorTickMark val="none"/>
-        <c:tickLblPos val="nextTo"/>
-        <c:spPr>
-          <a:ln w="12700" cap="flat">
-            <a:solidFill>
-              <a:srgbClr val="888888"/>
-            </a:solidFill>
-            <a:prstDash val="solid"/>
-            <a:round/>
-          </a:ln>
-        </c:spPr>
-        <c:txPr>
-          <a:bodyPr/>
-          <a:lstStyle/>
-          <a:p>
-            <a:pPr>
-              <a:defRPr sz="1000" b="0" i="0" u="none" strike="noStrike">
-                <a:solidFill>
-                  <a:srgbClr val="6E7689"/>
-                </a:solidFill>
-                <a:latin typeface="Calibri"/>
-              </a:defRPr>
-            </a:pPr>
-            <a:endParaRPr lang="en-US"/>
-          </a:p>
-        </c:txPr>
-        <c:crossAx val="2094734554"/>
-        <c:crosses val="autoZero"/>
-        <c:crossBetween val="between"/>
-      </c:valAx>
-      <c:spPr>
-        <a:solidFill>
-          <a:srgbClr val="FFFFFF"/>
-        </a:solidFill>
-        <a:ln w="12700" cap="flat">
-          <a:solidFill>
-            <a:srgbClr val="363636"/>
-          </a:solidFill>
-        </a:ln>
-        <a:effectLst/>
-      </c:spPr>
-    </c:plotArea>
-    <c:plotVisOnly val="1"/>
-    <c:dispBlanksAs val="span"/>
-  </c:chart>
-  <c:spPr>
-    <a:noFill/>
-    <a:ln>
-      <a:noFill/>
-    </a:ln>
-    <a:effectLst/>
-  </c:spPr>
-  <c:externalData r:id="rId1">
-    <c:autoUpdate val="0"/>
-  </c:externalData>
-</c:chartSpace>
-</file>
-
-<file path=ppt/charts/chart11.xml><?xml version="1.0" encoding="utf-8"?>
-<c:chartSpace xmlns:c="http://schemas.openxmlformats.org/drawingml/2006/chart" xmlns:a="http://schemas.openxmlformats.org/drawingml/2006/main" xmlns:r="http://schemas.openxmlformats.org/officeDocument/2006/relationships">
-  <c:date1904 val="0"/>
-  <c:roundedCorners val="1"/>
-  <c:chart>
-    <c:autoTitleDeleted val="1"/>
-    <c:plotArea>
-      <c:layout/>
-      <c:barChart>
-        <c:barDir val="col"/>
-        <c:grouping val="clustered"/>
-        <c:varyColors val="0"/>
-        <c:ser>
-          <c:idx val="0"/>
-          <c:order val="0"/>
-          <c:tx>
-            <c:strRef>
-              <c:f>Sheet1!$B$1</c:f>
-              <c:strCache>
-                <c:ptCount val="1"/>
-                <c:pt idx="0">
-                  <c:v>Debt service</c:v>
-                </c:pt>
-              </c:strCache>
-            </c:strRef>
-          </c:tx>
-          <c:spPr>
-            <a:solidFill>
-              <a:srgbClr val="C8553D"/>
-            </a:solidFill>
-            <a:effectLst/>
-          </c:spPr>
-          <c:invertIfNegative val="0"/>
-          <c:dLbls>
-            <c:numFmt formatCode="0.00" sourceLinked="0"/>
-            <c:txPr>
-              <a:bodyPr/>
-              <a:lstStyle/>
-              <a:p>
-                <a:pPr>
-                  <a:defRPr b="0" i="0" strike="noStrike" sz="900" u="none">
-                    <a:solidFill>
-                      <a:srgbClr val="3B4660"/>
-                    </a:solidFill>
-                    <a:latin typeface="Calibri"/>
-                  </a:defRPr>
-                </a:pPr>
-              </a:p>
-            </c:txPr>
-            <c:showLegendKey val="0"/>
-            <c:showVal val="1"/>
-            <c:showCatName val="0"/>
-            <c:showSerName val="0"/>
-            <c:showPercent val="0"/>
-            <c:showBubbleSize val="0"/>
-            <c:showLeaderLines val="0"/>
-          </c:dLbls>
-          <c:cat>
-            <c:multiLvlStrRef>
-              <c:f>Sheet1!$A$2:$A$10</c:f>
-              <c:multiLvlStrCache>
-                <c:ptCount val="9"/>
-                <c:lvl>
-                  <c:pt idx="0">
-                    <c:v>Yr 1</c:v>
-                  </c:pt>
-                  <c:pt idx="1">
-                    <c:v>Yr 2</c:v>
-                  </c:pt>
-                  <c:pt idx="2">
-                    <c:v>Yr 3</c:v>
-                  </c:pt>
-                  <c:pt idx="3">
-                    <c:v>Yr 4</c:v>
-                  </c:pt>
-                  <c:pt idx="4">
-                    <c:v>Yr 5</c:v>
-                  </c:pt>
-                  <c:pt idx="5">
-                    <c:v>Yr 6</c:v>
-                  </c:pt>
-                  <c:pt idx="6">
-                    <c:v>Yr 7</c:v>
-                  </c:pt>
-                  <c:pt idx="7">
-                    <c:v>Yr 8</c:v>
-                  </c:pt>
-                  <c:pt idx="8">
-                    <c:v>Yr 9</c:v>
-                  </c:pt>
-                </c:lvl>
-              </c:multiLvlStrCache>
-            </c:multiLvlStrRef>
-          </c:cat>
-          <c:val>
-            <c:numRef>
-              <c:f>Sheet1!$B$2:$B$10</c:f>
-              <c:numCache>
-                <c:formatCode>General</c:formatCode>
-                <c:ptCount val="9"/>
-                <c:pt idx="0">
-                  <c:v>0.39</c:v>
-                </c:pt>
-                <c:pt idx="1">
-                  <c:v>0.42</c:v>
-                </c:pt>
-                <c:pt idx="2">
-                  <c:v>0.39</c:v>
-                </c:pt>
-                <c:pt idx="3">
-                  <c:v>0.35</c:v>
-                </c:pt>
-                <c:pt idx="4">
-                  <c:v>0.69</c:v>
-                </c:pt>
-                <c:pt idx="5">
-                  <c:v>0.62</c:v>
-                </c:pt>
-                <c:pt idx="6">
-                  <c:v>0.55</c:v>
-                </c:pt>
-                <c:pt idx="7">
-                  <c:v>0.49</c:v>
-                </c:pt>
-                <c:pt idx="8">
-                  <c:v>0.44</c:v>
-                </c:pt>
-              </c:numCache>
-            </c:numRef>
-          </c:val>
-        </c:ser>
-        <c:ser>
-          <c:idx val="1"/>
-          <c:order val="1"/>
-          <c:tx>
-            <c:strRef>
-              <c:f>Sheet1!$C$1</c:f>
-              <c:strCache>
-                <c:ptCount val="1"/>
-                <c:pt idx="0">
-                  <c:v>Cash available (EBITDA)</c:v>
-                </c:pt>
-              </c:strCache>
-            </c:strRef>
-          </c:tx>
-          <c:spPr>
-            <a:solidFill>
-              <a:srgbClr val="2B66EA"/>
-            </a:solidFill>
-            <a:effectLst/>
-          </c:spPr>
-          <c:invertIfNegative val="0"/>
-          <c:dLbls>
-            <c:numFmt formatCode="0.00" sourceLinked="0"/>
-            <c:txPr>
-              <a:bodyPr/>
-              <a:lstStyle/>
-              <a:p>
-                <a:pPr>
-                  <a:defRPr b="0" i="0" strike="noStrike" sz="900" u="none">
-                    <a:solidFill>
-                      <a:srgbClr val="3B4660"/>
-                    </a:solidFill>
-                    <a:latin typeface="Calibri"/>
-                  </a:defRPr>
-                </a:pPr>
-              </a:p>
-            </c:txPr>
-            <c:showLegendKey val="0"/>
-            <c:showVal val="1"/>
-            <c:showCatName val="0"/>
-            <c:showSerName val="0"/>
-            <c:showPercent val="0"/>
-            <c:showBubbleSize val="0"/>
-            <c:showLeaderLines val="0"/>
-          </c:dLbls>
-          <c:cat>
-            <c:multiLvlStrRef>
-              <c:f>Sheet1!$A$2:$A$10</c:f>
-              <c:multiLvlStrCache>
-                <c:ptCount val="9"/>
-                <c:lvl>
-                  <c:pt idx="0">
-                    <c:v>Yr 1</c:v>
-                  </c:pt>
-                  <c:pt idx="1">
-                    <c:v>Yr 2</c:v>
-                  </c:pt>
-                  <c:pt idx="2">
-                    <c:v>Yr 3</c:v>
-                  </c:pt>
-                  <c:pt idx="3">
-                    <c:v>Yr 4</c:v>
-                  </c:pt>
-                  <c:pt idx="4">
-                    <c:v>Yr 5</c:v>
-                  </c:pt>
-                  <c:pt idx="5">
-                    <c:v>Yr 6</c:v>
-                  </c:pt>
-                  <c:pt idx="6">
-                    <c:v>Yr 7</c:v>
-                  </c:pt>
-                  <c:pt idx="7">
-                    <c:v>Yr 8</c:v>
-                  </c:pt>
-                  <c:pt idx="8">
-                    <c:v>Yr 9</c:v>
-                  </c:pt>
-                </c:lvl>
-              </c:multiLvlStrCache>
-            </c:multiLvlStrRef>
-          </c:cat>
-          <c:val>
-            <c:numRef>
-              <c:f>Sheet1!$C$2:$C$10</c:f>
-              <c:numCache>
-                <c:formatCode>General</c:formatCode>
-                <c:ptCount val="9"/>
-                <c:pt idx="0">
-                  <c:v>-0.41</c:v>
-                </c:pt>
-                <c:pt idx="1">
-                  <c:v>-0.05</c:v>
-                </c:pt>
-                <c:pt idx="2">
-                  <c:v>0.35</c:v>
-                </c:pt>
-                <c:pt idx="3">
-                  <c:v>0.51</c:v>
-                </c:pt>
-                <c:pt idx="4">
-                  <c:v>0.75</c:v>
-                </c:pt>
-                <c:pt idx="5">
-                  <c:v>0.81</c:v>
-                </c:pt>
-                <c:pt idx="6">
-                  <c:v>1</c:v>
-                </c:pt>
-                <c:pt idx="7">
-                  <c:v>1.01</c:v>
-                </c:pt>
-                <c:pt idx="8">
-                  <c:v>1.15</c:v>
-                </c:pt>
-              </c:numCache>
-            </c:numRef>
-          </c:val>
-        </c:ser>
-        <c:dLbls>
-          <c:numFmt formatCode="0.00" sourceLinked="0"/>
-          <c:txPr>
-            <a:bodyPr/>
-            <a:lstStyle/>
-            <a:p>
-              <a:pPr>
-                <a:defRPr b="0" i="0" strike="noStrike" sz="900" u="none">
-                  <a:solidFill>
-                    <a:srgbClr val="3B4660"/>
-                  </a:solidFill>
-                  <a:latin typeface="Calibri"/>
-                </a:defRPr>
-              </a:pPr>
-            </a:p>
-          </c:txPr>
-          <c:showLegendKey val="0"/>
-          <c:showVal val="1"/>
-          <c:showCatName val="0"/>
-          <c:showSerName val="0"/>
-          <c:showPercent val="0"/>
-          <c:showBubbleSize val="0"/>
-          <c:showLeaderLines val="0"/>
-        </c:dLbls>
-        <c:gapWidth val="45"/>
-        <c:overlap val="0"/>
-        <c:axId val="2094734554"/>
-        <c:axId val="2094734552"/>
-        <c:axId val="2094734556"/>
-      </c:barChart>
-      <c:catAx>
-        <c:axId val="2094734554"/>
-        <c:scaling>
-          <c:orientation val="minMax"/>
-        </c:scaling>
-        <c:delete val="0"/>
-        <c:axPos val="b"/>
-        <c:numFmt formatCode="General" sourceLinked="1"/>
-        <c:majorTickMark val="out"/>
-        <c:minorTickMark val="none"/>
-        <c:tickLblPos val="low"/>
-        <c:spPr>
-          <a:ln w="12700" cap="flat">
-            <a:solidFill>
-              <a:srgbClr val="888888"/>
-            </a:solidFill>
-            <a:prstDash val="solid"/>
-            <a:round/>
-          </a:ln>
-        </c:spPr>
-        <c:txPr>
-          <a:bodyPr/>
-          <a:lstStyle/>
-          <a:p>
-            <a:pPr>
-              <a:defRPr sz="1000" b="0" i="0" u="none" strike="noStrike">
-                <a:solidFill>
-                  <a:srgbClr val="3B4660"/>
-                </a:solidFill>
-                <a:latin typeface="Calibri"/>
-              </a:defRPr>
-            </a:pPr>
-            <a:endParaRPr lang="en-US"/>
-          </a:p>
-        </c:txPr>
-        <c:crossAx val="2094734552"/>
-        <c:crosses val="autoZero"/>
-        <c:auto val="1"/>
-        <c:lblAlgn val="ctr"/>
-        <c:noMultiLvlLbl val="1"/>
-      </c:catAx>
-      <c:valAx>
-        <c:axId val="2094734552"/>
-        <c:scaling>
-          <c:orientation val="minMax"/>
-        </c:scaling>
-        <c:delete val="0"/>
-        <c:axPos val="l"/>
-        <c:majorGridlines>
-          <c:spPr>
-            <a:ln w="12700" cap="flat">
-              <a:solidFill>
-                <a:srgbClr val="E2E4EA"/>
-              </a:solidFill>
-              <a:prstDash val="solid"/>
-              <a:round/>
-            </a:ln>
-          </c:spPr>
-        </c:majorGridlines>
-        <c:title>
-          <c:tx>
-            <c:rich>
-              <a:bodyPr/>
-              <a:lstStyle/>
-              <a:p>
-                <a:pPr>
-                  <a:defRPr sz="1000" b="0" i="0" u="none" strike="noStrike">
-                    <a:solidFill>
-                      <a:srgbClr val="6E7689"/>
-                    </a:solidFill>
-                    <a:latin typeface="Calibri"/>
-                  </a:defRPr>
-                </a:pPr>
-                <a:r>
-                  <a:rPr sz="1000" b="0" i="0" u="none" strike="noStrike">
-                    <a:solidFill>
-                      <a:srgbClr val="6E7689"/>
-                    </a:solidFill>
-                    <a:latin typeface="Calibri"/>
-                  </a:rPr>
-                  <a:t>₹ crore</a:t>
-                </a:r>
-              </a:p>
-            </c:rich>
-          </c:tx>
-          <c:layout/>
-          <c:overlay val="0"/>
-        </c:title>
-        <c:numFmt formatCode="General" sourceLinked="0"/>
-        <c:majorTickMark val="out"/>
-        <c:minorTickMark val="none"/>
-        <c:tickLblPos val="nextTo"/>
-        <c:spPr>
-          <a:ln w="12700" cap="flat">
-            <a:solidFill>
-              <a:srgbClr val="888888"/>
-            </a:solidFill>
-            <a:prstDash val="solid"/>
-            <a:round/>
-          </a:ln>
-        </c:spPr>
-        <c:txPr>
-          <a:bodyPr/>
-          <a:lstStyle/>
-          <a:p>
-            <a:pPr>
-              <a:defRPr sz="1000" b="0" i="0" u="none" strike="noStrike">
-                <a:solidFill>
-                  <a:srgbClr val="6E7689"/>
-                </a:solidFill>
-                <a:latin typeface="Calibri"/>
-              </a:defRPr>
-            </a:pPr>
-            <a:endParaRPr lang="en-US"/>
-          </a:p>
-        </c:txPr>
-        <c:crossAx val="2094734554"/>
-        <c:crosses val="autoZero"/>
-        <c:crossBetween val="between"/>
-      </c:valAx>
-      <c:spPr>
-        <a:solidFill>
-          <a:srgbClr val="FFFFFF"/>
-        </a:solidFill>
-        <a:ln w="12700" cap="flat">
-          <a:solidFill>
-            <a:srgbClr val="363636"/>
-          </a:solidFill>
-        </a:ln>
-        <a:effectLst/>
-      </c:spPr>
-    </c:plotArea>
-    <c:legend>
-      <c:legendPos val="t"/>
-      <c:overlay val="0"/>
-      <c:txPr>
-        <a:bodyPr/>
-        <a:lstStyle/>
-        <a:p>
-          <a:pPr>
-            <a:defRPr sz="1000">
-              <a:solidFill>
-                <a:srgbClr val="3B4660"/>
-              </a:solidFill>
-              <a:latin typeface="Calibri"/>
-              <a:cs typeface="Calibri"/>
-            </a:defRPr>
-          </a:pPr>
-          <a:endParaRPr lang="en-US"/>
-        </a:p>
-      </c:txPr>
-    </c:legend>
-    <c:plotVisOnly val="1"/>
-    <c:dispBlanksAs val="span"/>
-  </c:chart>
-  <c:spPr>
-    <a:noFill/>
-    <a:ln>
-      <a:noFill/>
-    </a:ln>
-    <a:effectLst/>
-  </c:spPr>
-  <c:externalData r:id="rId1">
-    <c:autoUpdate val="0"/>
-  </c:externalData>
-</c:chartSpace>
-</file>
-
-<file path=ppt/charts/chart7.xml><?xml version="1.0" encoding="utf-8"?>
+<file path=ppt/charts/chart4.xml><?xml version="1.0" encoding="utf-8"?>
 <c:chartSpace xmlns:c="http://schemas.openxmlformats.org/drawingml/2006/chart" xmlns:a="http://schemas.openxmlformats.org/drawingml/2006/main" xmlns:r="http://schemas.openxmlformats.org/officeDocument/2006/relationships">
   <c:date1904 val="0"/>
   <c:roundedCorners val="1"/>
@@ -1589,7 +835,7 @@
 </c:chartSpace>
 </file>
 
-<file path=ppt/charts/chart8.xml><?xml version="1.0" encoding="utf-8"?>
+<file path=ppt/charts/chart5.xml><?xml version="1.0" encoding="utf-8"?>
 <c:chartSpace xmlns:c="http://schemas.openxmlformats.org/drawingml/2006/chart" xmlns:a="http://schemas.openxmlformats.org/drawingml/2006/main" xmlns:r="http://schemas.openxmlformats.org/officeDocument/2006/relationships">
   <c:date1904 val="0"/>
   <c:roundedCorners val="1"/>
@@ -2049,7 +1295,7 @@
 </c:chartSpace>
 </file>
 
-<file path=ppt/charts/chart9.xml><?xml version="1.0" encoding="utf-8"?>
+<file path=ppt/charts/chart6.xml><?xml version="1.0" encoding="utf-8"?>
 <c:chartSpace xmlns:c="http://schemas.openxmlformats.org/drawingml/2006/chart" xmlns:a="http://schemas.openxmlformats.org/drawingml/2006/main" xmlns:r="http://schemas.openxmlformats.org/officeDocument/2006/relationships">
   <c:date1904 val="0"/>
   <c:roundedCorners val="1"/>
@@ -2354,6 +1600,760 @@
         <a:effectLst/>
       </c:spPr>
     </c:plotArea>
+    <c:plotVisOnly val="1"/>
+    <c:dispBlanksAs val="span"/>
+  </c:chart>
+  <c:spPr>
+    <a:noFill/>
+    <a:ln>
+      <a:noFill/>
+    </a:ln>
+    <a:effectLst/>
+  </c:spPr>
+  <c:externalData r:id="rId1">
+    <c:autoUpdate val="0"/>
+  </c:externalData>
+</c:chartSpace>
+</file>
+
+<file path=ppt/charts/chart7.xml><?xml version="1.0" encoding="utf-8"?>
+<c:chartSpace xmlns:c="http://schemas.openxmlformats.org/drawingml/2006/chart" xmlns:a="http://schemas.openxmlformats.org/drawingml/2006/main" xmlns:r="http://schemas.openxmlformats.org/officeDocument/2006/relationships">
+  <c:date1904 val="0"/>
+  <c:roundedCorners val="1"/>
+  <c:chart>
+    <c:autoTitleDeleted val="1"/>
+    <c:plotArea>
+      <c:layout/>
+      <c:barChart>
+        <c:barDir val="col"/>
+        <c:grouping val="clustered"/>
+        <c:varyColors val="0"/>
+        <c:ser>
+          <c:idx val="0"/>
+          <c:order val="0"/>
+          <c:tx>
+            <c:strRef>
+              <c:f>Sheet1!$B$1</c:f>
+              <c:strCache>
+                <c:ptCount val="1"/>
+                <c:pt idx="0">
+                  <c:v>Project IRR</c:v>
+                </c:pt>
+              </c:strCache>
+            </c:strRef>
+          </c:tx>
+          <c:spPr>
+            <a:solidFill>
+              <a:srgbClr val="C8553D"/>
+            </a:solidFill>
+            <a:effectLst/>
+          </c:spPr>
+          <c:invertIfNegative val="0"/>
+          <c:dLbls>
+            <c:numFmt formatCode="0.0&quot;%&quot;" sourceLinked="0"/>
+            <c:txPr>
+              <a:bodyPr/>
+              <a:lstStyle/>
+              <a:p>
+                <a:pPr>
+                  <a:defRPr b="0" i="0" strike="noStrike" sz="900" u="none">
+                    <a:solidFill>
+                      <a:srgbClr val="3B4660"/>
+                    </a:solidFill>
+                    <a:latin typeface="Calibri"/>
+                  </a:defRPr>
+                </a:pPr>
+              </a:p>
+            </c:txPr>
+            <c:showLegendKey val="0"/>
+            <c:showVal val="1"/>
+            <c:showCatName val="0"/>
+            <c:showSerName val="0"/>
+            <c:showPercent val="0"/>
+            <c:showBubbleSize val="0"/>
+            <c:showLeaderLines val="0"/>
+          </c:dLbls>
+          <c:dPt>
+            <c:idx val="0"/>
+            <c:invertIfNegative val="0"/>
+            <c:bubble3D val="0"/>
+            <c:spPr>
+              <a:solidFill>
+                <a:srgbClr val="C8553D"/>
+              </a:solidFill>
+              <a:effectLst/>
+            </c:spPr>
+          </c:dPt>
+          <c:dPt>
+            <c:idx val="1"/>
+            <c:invertIfNegative val="0"/>
+            <c:bubble3D val="0"/>
+            <c:spPr>
+              <a:solidFill>
+                <a:srgbClr val="2B66EA"/>
+              </a:solidFill>
+              <a:effectLst/>
+            </c:spPr>
+          </c:dPt>
+          <c:dPt>
+            <c:idx val="2"/>
+            <c:invertIfNegative val="0"/>
+            <c:bubble3D val="0"/>
+            <c:spPr>
+              <a:solidFill>
+                <a:srgbClr val="10B981"/>
+              </a:solidFill>
+              <a:effectLst/>
+            </c:spPr>
+          </c:dPt>
+          <c:cat>
+            <c:multiLvlStrRef>
+              <c:f>Sheet1!$A$2:$A$4</c:f>
+              <c:multiLvlStrCache>
+                <c:ptCount val="3"/>
+                <c:lvl>
+                  <c:pt idx="0">
+                    <c:v>Downside</c:v>
+                  </c:pt>
+                  <c:pt idx="1">
+                    <c:v>Base case</c:v>
+                  </c:pt>
+                  <c:pt idx="2">
+                    <c:v>BDA's own case</c:v>
+                  </c:pt>
+                </c:lvl>
+              </c:multiLvlStrCache>
+            </c:multiLvlStrRef>
+          </c:cat>
+          <c:val>
+            <c:numRef>
+              <c:f>Sheet1!$B$2:$B$4</c:f>
+              <c:numCache>
+                <c:formatCode>General</c:formatCode>
+                <c:ptCount val="3"/>
+                <c:pt idx="0">
+                  <c:v>-36.5</c:v>
+                </c:pt>
+                <c:pt idx="1">
+                  <c:v>11.4</c:v>
+                </c:pt>
+                <c:pt idx="2">
+                  <c:v>36.1</c:v>
+                </c:pt>
+              </c:numCache>
+            </c:numRef>
+          </c:val>
+        </c:ser>
+        <c:dLbls>
+          <c:numFmt formatCode="0.0&quot;%&quot;" sourceLinked="0"/>
+          <c:txPr>
+            <a:bodyPr/>
+            <a:lstStyle/>
+            <a:p>
+              <a:pPr>
+                <a:defRPr b="0" i="0" strike="noStrike" sz="900" u="none">
+                  <a:solidFill>
+                    <a:srgbClr val="3B4660"/>
+                  </a:solidFill>
+                  <a:latin typeface="Calibri"/>
+                </a:defRPr>
+              </a:pPr>
+            </a:p>
+          </c:txPr>
+          <c:showLegendKey val="0"/>
+          <c:showVal val="1"/>
+          <c:showCatName val="0"/>
+          <c:showSerName val="0"/>
+          <c:showPercent val="0"/>
+          <c:showBubbleSize val="0"/>
+          <c:showLeaderLines val="0"/>
+        </c:dLbls>
+        <c:gapWidth val="45"/>
+        <c:overlap val="0"/>
+        <c:axId val="2094734554"/>
+        <c:axId val="2094734552"/>
+        <c:axId val="2094734556"/>
+      </c:barChart>
+      <c:catAx>
+        <c:axId val="2094734554"/>
+        <c:scaling>
+          <c:orientation val="minMax"/>
+        </c:scaling>
+        <c:delete val="0"/>
+        <c:axPos val="b"/>
+        <c:numFmt formatCode="General" sourceLinked="1"/>
+        <c:majorTickMark val="out"/>
+        <c:minorTickMark val="none"/>
+        <c:tickLblPos val="low"/>
+        <c:spPr>
+          <a:ln w="12700" cap="flat">
+            <a:solidFill>
+              <a:srgbClr val="888888"/>
+            </a:solidFill>
+            <a:prstDash val="solid"/>
+            <a:round/>
+          </a:ln>
+        </c:spPr>
+        <c:txPr>
+          <a:bodyPr/>
+          <a:lstStyle/>
+          <a:p>
+            <a:pPr>
+              <a:defRPr sz="1000" b="0" i="0" u="none" strike="noStrike">
+                <a:solidFill>
+                  <a:srgbClr val="3B4660"/>
+                </a:solidFill>
+                <a:latin typeface="Calibri"/>
+              </a:defRPr>
+            </a:pPr>
+            <a:endParaRPr lang="en-US"/>
+          </a:p>
+        </c:txPr>
+        <c:crossAx val="2094734552"/>
+        <c:crosses val="autoZero"/>
+        <c:auto val="1"/>
+        <c:lblAlgn val="ctr"/>
+        <c:noMultiLvlLbl val="1"/>
+      </c:catAx>
+      <c:valAx>
+        <c:axId val="2094734552"/>
+        <c:scaling>
+          <c:orientation val="minMax"/>
+        </c:scaling>
+        <c:delete val="0"/>
+        <c:axPos val="l"/>
+        <c:majorGridlines>
+          <c:spPr>
+            <a:ln w="12700" cap="flat">
+              <a:solidFill>
+                <a:srgbClr val="E2E4EA"/>
+              </a:solidFill>
+              <a:prstDash val="solid"/>
+              <a:round/>
+            </a:ln>
+          </c:spPr>
+        </c:majorGridlines>
+        <c:title>
+          <c:tx>
+            <c:rich>
+              <a:bodyPr/>
+              <a:lstStyle/>
+              <a:p>
+                <a:pPr>
+                  <a:defRPr sz="1000" b="0" i="0" u="none" strike="noStrike">
+                    <a:solidFill>
+                      <a:srgbClr val="6E7689"/>
+                    </a:solidFill>
+                    <a:latin typeface="Calibri"/>
+                  </a:defRPr>
+                </a:pPr>
+                <a:r>
+                  <a:rPr sz="1000" b="0" i="0" u="none" strike="noStrike">
+                    <a:solidFill>
+                      <a:srgbClr val="6E7689"/>
+                    </a:solidFill>
+                    <a:latin typeface="Calibri"/>
+                  </a:rPr>
+                  <a:t>Project IRR, %</a:t>
+                </a:r>
+              </a:p>
+            </c:rich>
+          </c:tx>
+          <c:layout/>
+          <c:overlay val="0"/>
+        </c:title>
+        <c:numFmt formatCode="General" sourceLinked="0"/>
+        <c:majorTickMark val="out"/>
+        <c:minorTickMark val="none"/>
+        <c:tickLblPos val="nextTo"/>
+        <c:spPr>
+          <a:ln w="12700" cap="flat">
+            <a:solidFill>
+              <a:srgbClr val="888888"/>
+            </a:solidFill>
+            <a:prstDash val="solid"/>
+            <a:round/>
+          </a:ln>
+        </c:spPr>
+        <c:txPr>
+          <a:bodyPr/>
+          <a:lstStyle/>
+          <a:p>
+            <a:pPr>
+              <a:defRPr sz="1000" b="0" i="0" u="none" strike="noStrike">
+                <a:solidFill>
+                  <a:srgbClr val="6E7689"/>
+                </a:solidFill>
+                <a:latin typeface="Calibri"/>
+              </a:defRPr>
+            </a:pPr>
+            <a:endParaRPr lang="en-US"/>
+          </a:p>
+        </c:txPr>
+        <c:crossAx val="2094734554"/>
+        <c:crosses val="autoZero"/>
+        <c:crossBetween val="between"/>
+      </c:valAx>
+      <c:spPr>
+        <a:solidFill>
+          <a:srgbClr val="FFFFFF"/>
+        </a:solidFill>
+        <a:ln w="12700" cap="flat">
+          <a:solidFill>
+            <a:srgbClr val="363636"/>
+          </a:solidFill>
+        </a:ln>
+        <a:effectLst/>
+      </c:spPr>
+    </c:plotArea>
+    <c:plotVisOnly val="1"/>
+    <c:dispBlanksAs val="span"/>
+  </c:chart>
+  <c:spPr>
+    <a:noFill/>
+    <a:ln>
+      <a:noFill/>
+    </a:ln>
+    <a:effectLst/>
+  </c:spPr>
+  <c:externalData r:id="rId1">
+    <c:autoUpdate val="0"/>
+  </c:externalData>
+</c:chartSpace>
+</file>
+
+<file path=ppt/charts/chart8.xml><?xml version="1.0" encoding="utf-8"?>
+<c:chartSpace xmlns:c="http://schemas.openxmlformats.org/drawingml/2006/chart" xmlns:a="http://schemas.openxmlformats.org/drawingml/2006/main" xmlns:r="http://schemas.openxmlformats.org/officeDocument/2006/relationships">
+  <c:date1904 val="0"/>
+  <c:roundedCorners val="1"/>
+  <c:chart>
+    <c:autoTitleDeleted val="1"/>
+    <c:plotArea>
+      <c:layout/>
+      <c:barChart>
+        <c:barDir val="col"/>
+        <c:grouping val="clustered"/>
+        <c:varyColors val="0"/>
+        <c:ser>
+          <c:idx val="0"/>
+          <c:order val="0"/>
+          <c:tx>
+            <c:strRef>
+              <c:f>Sheet1!$B$1</c:f>
+              <c:strCache>
+                <c:ptCount val="1"/>
+                <c:pt idx="0">
+                  <c:v>Debt service</c:v>
+                </c:pt>
+              </c:strCache>
+            </c:strRef>
+          </c:tx>
+          <c:spPr>
+            <a:solidFill>
+              <a:srgbClr val="C8553D"/>
+            </a:solidFill>
+            <a:effectLst/>
+          </c:spPr>
+          <c:invertIfNegative val="0"/>
+          <c:dLbls>
+            <c:numFmt formatCode="0.00" sourceLinked="0"/>
+            <c:txPr>
+              <a:bodyPr/>
+              <a:lstStyle/>
+              <a:p>
+                <a:pPr>
+                  <a:defRPr b="0" i="0" strike="noStrike" sz="900" u="none">
+                    <a:solidFill>
+                      <a:srgbClr val="3B4660"/>
+                    </a:solidFill>
+                    <a:latin typeface="Calibri"/>
+                  </a:defRPr>
+                </a:pPr>
+              </a:p>
+            </c:txPr>
+            <c:showLegendKey val="0"/>
+            <c:showVal val="1"/>
+            <c:showCatName val="0"/>
+            <c:showSerName val="0"/>
+            <c:showPercent val="0"/>
+            <c:showBubbleSize val="0"/>
+            <c:showLeaderLines val="0"/>
+          </c:dLbls>
+          <c:cat>
+            <c:multiLvlStrRef>
+              <c:f>Sheet1!$A$2:$A$10</c:f>
+              <c:multiLvlStrCache>
+                <c:ptCount val="9"/>
+                <c:lvl>
+                  <c:pt idx="0">
+                    <c:v>Yr 1</c:v>
+                  </c:pt>
+                  <c:pt idx="1">
+                    <c:v>Yr 2</c:v>
+                  </c:pt>
+                  <c:pt idx="2">
+                    <c:v>Yr 3</c:v>
+                  </c:pt>
+                  <c:pt idx="3">
+                    <c:v>Yr 4</c:v>
+                  </c:pt>
+                  <c:pt idx="4">
+                    <c:v>Yr 5</c:v>
+                  </c:pt>
+                  <c:pt idx="5">
+                    <c:v>Yr 6</c:v>
+                  </c:pt>
+                  <c:pt idx="6">
+                    <c:v>Yr 7</c:v>
+                  </c:pt>
+                  <c:pt idx="7">
+                    <c:v>Yr 8</c:v>
+                  </c:pt>
+                  <c:pt idx="8">
+                    <c:v>Yr 9</c:v>
+                  </c:pt>
+                </c:lvl>
+              </c:multiLvlStrCache>
+            </c:multiLvlStrRef>
+          </c:cat>
+          <c:val>
+            <c:numRef>
+              <c:f>Sheet1!$B$2:$B$10</c:f>
+              <c:numCache>
+                <c:formatCode>General</c:formatCode>
+                <c:ptCount val="9"/>
+                <c:pt idx="0">
+                  <c:v>0.39</c:v>
+                </c:pt>
+                <c:pt idx="1">
+                  <c:v>0.42</c:v>
+                </c:pt>
+                <c:pt idx="2">
+                  <c:v>0.39</c:v>
+                </c:pt>
+                <c:pt idx="3">
+                  <c:v>0.35</c:v>
+                </c:pt>
+                <c:pt idx="4">
+                  <c:v>0.69</c:v>
+                </c:pt>
+                <c:pt idx="5">
+                  <c:v>0.62</c:v>
+                </c:pt>
+                <c:pt idx="6">
+                  <c:v>0.55</c:v>
+                </c:pt>
+                <c:pt idx="7">
+                  <c:v>0.49</c:v>
+                </c:pt>
+                <c:pt idx="8">
+                  <c:v>0.44</c:v>
+                </c:pt>
+              </c:numCache>
+            </c:numRef>
+          </c:val>
+        </c:ser>
+        <c:ser>
+          <c:idx val="1"/>
+          <c:order val="1"/>
+          <c:tx>
+            <c:strRef>
+              <c:f>Sheet1!$C$1</c:f>
+              <c:strCache>
+                <c:ptCount val="1"/>
+                <c:pt idx="0">
+                  <c:v>Cash available (EBITDA)</c:v>
+                </c:pt>
+              </c:strCache>
+            </c:strRef>
+          </c:tx>
+          <c:spPr>
+            <a:solidFill>
+              <a:srgbClr val="2B66EA"/>
+            </a:solidFill>
+            <a:effectLst/>
+          </c:spPr>
+          <c:invertIfNegative val="0"/>
+          <c:dLbls>
+            <c:numFmt formatCode="0.00" sourceLinked="0"/>
+            <c:txPr>
+              <a:bodyPr/>
+              <a:lstStyle/>
+              <a:p>
+                <a:pPr>
+                  <a:defRPr b="0" i="0" strike="noStrike" sz="900" u="none">
+                    <a:solidFill>
+                      <a:srgbClr val="3B4660"/>
+                    </a:solidFill>
+                    <a:latin typeface="Calibri"/>
+                  </a:defRPr>
+                </a:pPr>
+              </a:p>
+            </c:txPr>
+            <c:showLegendKey val="0"/>
+            <c:showVal val="1"/>
+            <c:showCatName val="0"/>
+            <c:showSerName val="0"/>
+            <c:showPercent val="0"/>
+            <c:showBubbleSize val="0"/>
+            <c:showLeaderLines val="0"/>
+          </c:dLbls>
+          <c:cat>
+            <c:multiLvlStrRef>
+              <c:f>Sheet1!$A$2:$A$10</c:f>
+              <c:multiLvlStrCache>
+                <c:ptCount val="9"/>
+                <c:lvl>
+                  <c:pt idx="0">
+                    <c:v>Yr 1</c:v>
+                  </c:pt>
+                  <c:pt idx="1">
+                    <c:v>Yr 2</c:v>
+                  </c:pt>
+                  <c:pt idx="2">
+                    <c:v>Yr 3</c:v>
+                  </c:pt>
+                  <c:pt idx="3">
+                    <c:v>Yr 4</c:v>
+                  </c:pt>
+                  <c:pt idx="4">
+                    <c:v>Yr 5</c:v>
+                  </c:pt>
+                  <c:pt idx="5">
+                    <c:v>Yr 6</c:v>
+                  </c:pt>
+                  <c:pt idx="6">
+                    <c:v>Yr 7</c:v>
+                  </c:pt>
+                  <c:pt idx="7">
+                    <c:v>Yr 8</c:v>
+                  </c:pt>
+                  <c:pt idx="8">
+                    <c:v>Yr 9</c:v>
+                  </c:pt>
+                </c:lvl>
+              </c:multiLvlStrCache>
+            </c:multiLvlStrRef>
+          </c:cat>
+          <c:val>
+            <c:numRef>
+              <c:f>Sheet1!$C$2:$C$10</c:f>
+              <c:numCache>
+                <c:formatCode>General</c:formatCode>
+                <c:ptCount val="9"/>
+                <c:pt idx="0">
+                  <c:v>-0.41</c:v>
+                </c:pt>
+                <c:pt idx="1">
+                  <c:v>-0.05</c:v>
+                </c:pt>
+                <c:pt idx="2">
+                  <c:v>0.35</c:v>
+                </c:pt>
+                <c:pt idx="3">
+                  <c:v>0.51</c:v>
+                </c:pt>
+                <c:pt idx="4">
+                  <c:v>0.75</c:v>
+                </c:pt>
+                <c:pt idx="5">
+                  <c:v>0.81</c:v>
+                </c:pt>
+                <c:pt idx="6">
+                  <c:v>1</c:v>
+                </c:pt>
+                <c:pt idx="7">
+                  <c:v>1.01</c:v>
+                </c:pt>
+                <c:pt idx="8">
+                  <c:v>1.15</c:v>
+                </c:pt>
+              </c:numCache>
+            </c:numRef>
+          </c:val>
+        </c:ser>
+        <c:dLbls>
+          <c:numFmt formatCode="0.00" sourceLinked="0"/>
+          <c:txPr>
+            <a:bodyPr/>
+            <a:lstStyle/>
+            <a:p>
+              <a:pPr>
+                <a:defRPr b="0" i="0" strike="noStrike" sz="900" u="none">
+                  <a:solidFill>
+                    <a:srgbClr val="3B4660"/>
+                  </a:solidFill>
+                  <a:latin typeface="Calibri"/>
+                </a:defRPr>
+              </a:pPr>
+            </a:p>
+          </c:txPr>
+          <c:showLegendKey val="0"/>
+          <c:showVal val="1"/>
+          <c:showCatName val="0"/>
+          <c:showSerName val="0"/>
+          <c:showPercent val="0"/>
+          <c:showBubbleSize val="0"/>
+          <c:showLeaderLines val="0"/>
+        </c:dLbls>
+        <c:gapWidth val="45"/>
+        <c:overlap val="0"/>
+        <c:axId val="2094734554"/>
+        <c:axId val="2094734552"/>
+        <c:axId val="2094734556"/>
+      </c:barChart>
+      <c:catAx>
+        <c:axId val="2094734554"/>
+        <c:scaling>
+          <c:orientation val="minMax"/>
+        </c:scaling>
+        <c:delete val="0"/>
+        <c:axPos val="b"/>
+        <c:numFmt formatCode="General" sourceLinked="1"/>
+        <c:majorTickMark val="out"/>
+        <c:minorTickMark val="none"/>
+        <c:tickLblPos val="low"/>
+        <c:spPr>
+          <a:ln w="12700" cap="flat">
+            <a:solidFill>
+              <a:srgbClr val="888888"/>
+            </a:solidFill>
+            <a:prstDash val="solid"/>
+            <a:round/>
+          </a:ln>
+        </c:spPr>
+        <c:txPr>
+          <a:bodyPr/>
+          <a:lstStyle/>
+          <a:p>
+            <a:pPr>
+              <a:defRPr sz="1000" b="0" i="0" u="none" strike="noStrike">
+                <a:solidFill>
+                  <a:srgbClr val="3B4660"/>
+                </a:solidFill>
+                <a:latin typeface="Calibri"/>
+              </a:defRPr>
+            </a:pPr>
+            <a:endParaRPr lang="en-US"/>
+          </a:p>
+        </c:txPr>
+        <c:crossAx val="2094734552"/>
+        <c:crosses val="autoZero"/>
+        <c:auto val="1"/>
+        <c:lblAlgn val="ctr"/>
+        <c:noMultiLvlLbl val="1"/>
+      </c:catAx>
+      <c:valAx>
+        <c:axId val="2094734552"/>
+        <c:scaling>
+          <c:orientation val="minMax"/>
+        </c:scaling>
+        <c:delete val="0"/>
+        <c:axPos val="l"/>
+        <c:majorGridlines>
+          <c:spPr>
+            <a:ln w="12700" cap="flat">
+              <a:solidFill>
+                <a:srgbClr val="E2E4EA"/>
+              </a:solidFill>
+              <a:prstDash val="solid"/>
+              <a:round/>
+            </a:ln>
+          </c:spPr>
+        </c:majorGridlines>
+        <c:title>
+          <c:tx>
+            <c:rich>
+              <a:bodyPr/>
+              <a:lstStyle/>
+              <a:p>
+                <a:pPr>
+                  <a:defRPr sz="1000" b="0" i="0" u="none" strike="noStrike">
+                    <a:solidFill>
+                      <a:srgbClr val="6E7689"/>
+                    </a:solidFill>
+                    <a:latin typeface="Calibri"/>
+                  </a:defRPr>
+                </a:pPr>
+                <a:r>
+                  <a:rPr sz="1000" b="0" i="0" u="none" strike="noStrike">
+                    <a:solidFill>
+                      <a:srgbClr val="6E7689"/>
+                    </a:solidFill>
+                    <a:latin typeface="Calibri"/>
+                  </a:rPr>
+                  <a:t>₹ crore</a:t>
+                </a:r>
+              </a:p>
+            </c:rich>
+          </c:tx>
+          <c:layout/>
+          <c:overlay val="0"/>
+        </c:title>
+        <c:numFmt formatCode="General" sourceLinked="0"/>
+        <c:majorTickMark val="out"/>
+        <c:minorTickMark val="none"/>
+        <c:tickLblPos val="nextTo"/>
+        <c:spPr>
+          <a:ln w="12700" cap="flat">
+            <a:solidFill>
+              <a:srgbClr val="888888"/>
+            </a:solidFill>
+            <a:prstDash val="solid"/>
+            <a:round/>
+          </a:ln>
+        </c:spPr>
+        <c:txPr>
+          <a:bodyPr/>
+          <a:lstStyle/>
+          <a:p>
+            <a:pPr>
+              <a:defRPr sz="1000" b="0" i="0" u="none" strike="noStrike">
+                <a:solidFill>
+                  <a:srgbClr val="6E7689"/>
+                </a:solidFill>
+                <a:latin typeface="Calibri"/>
+              </a:defRPr>
+            </a:pPr>
+            <a:endParaRPr lang="en-US"/>
+          </a:p>
+        </c:txPr>
+        <c:crossAx val="2094734554"/>
+        <c:crosses val="autoZero"/>
+        <c:crossBetween val="between"/>
+      </c:valAx>
+      <c:spPr>
+        <a:solidFill>
+          <a:srgbClr val="FFFFFF"/>
+        </a:solidFill>
+        <a:ln w="12700" cap="flat">
+          <a:solidFill>
+            <a:srgbClr val="363636"/>
+          </a:solidFill>
+        </a:ln>
+        <a:effectLst/>
+      </c:spPr>
+    </c:plotArea>
+    <c:legend>
+      <c:legendPos val="t"/>
+      <c:overlay val="0"/>
+      <c:txPr>
+        <a:bodyPr/>
+        <a:lstStyle/>
+        <a:p>
+          <a:pPr>
+            <a:defRPr sz="1000">
+              <a:solidFill>
+                <a:srgbClr val="3B4660"/>
+              </a:solidFill>
+              <a:latin typeface="Calibri"/>
+              <a:cs typeface="Calibri"/>
+            </a:defRPr>
+          </a:pPr>
+          <a:endParaRPr lang="en-US"/>
+        </a:p>
+      </c:txPr>
+    </c:legend>
     <c:plotVisOnly val="1"/>
     <c:dispBlanksAs val="span"/>
   </c:chart>

--- a/pptx/EOD-Ramayan-Vatika-Project-Finance.pptx
+++ b/pptx/EOD-Ramayan-Vatika-Project-Finance.pptx
@@ -11971,11 +11971,11 @@
         <p:spPr>
           <a:xfrm>
             <a:off x="566928" y="4956048"/>
-            <a:ext cx="11057839" cy="1287363"/>
+            <a:ext cx="11057839" cy="1234664"/>
           </a:xfrm>
           <a:prstGeom prst="roundRect">
             <a:avLst>
-              <a:gd name="adj" fmla="val 3551"/>
+              <a:gd name="adj" fmla="val 3703"/>
             </a:avLst>
           </a:prstGeom>
           <a:solidFill>
@@ -12037,7 +12037,7 @@
         <p:spPr>
           <a:xfrm>
             <a:off x="804672" y="5248656"/>
-            <a:ext cx="10582351" cy="288595"/>
+            <a:ext cx="10582351" cy="273406"/>
           </a:xfrm>
           <a:prstGeom prst="rect">
             <a:avLst/>
@@ -12051,12 +12051,12 @@
           <a:p>
             <a:pPr indent="0" marL="0">
               <a:lnSpc>
-                <a:spcPts val="2185"/>
+                <a:spcPts val="2070"/>
               </a:lnSpc>
               <a:buNone/>
             </a:pPr>
             <a:r>
-              <a:rPr lang="en-US" sz="1900" b="1" dirty="0">
+              <a:rPr lang="en-US" sz="1800" b="1" dirty="0">
                 <a:solidFill>
                   <a:srgbClr val="0A1426"/>
                 </a:solidFill>
@@ -12066,7 +12066,7 @@
               </a:rPr>
               <a:t>What would change the recommendation</a:t>
             </a:r>
-            <a:endParaRPr lang="en-US" sz="1900" dirty="0"/>
+            <a:endParaRPr lang="en-US" sz="1800" dirty="0"/>
           </a:p>
         </p:txBody>
       </p:sp>
@@ -12078,8 +12078,8 @@
         </p:nvSpPr>
         <p:spPr>
           <a:xfrm>
-            <a:off x="804672" y="5592115"/>
-            <a:ext cx="10582351" cy="578145"/>
+            <a:off x="804672" y="5576926"/>
+            <a:ext cx="10582351" cy="540634"/>
           </a:xfrm>
           <a:prstGeom prst="rect">
             <a:avLst/>
@@ -12093,12 +12093,12 @@
           <a:p>
             <a:pPr indent="0" marL="0">
               <a:lnSpc>
-                <a:spcPts val="1704"/>
+                <a:spcPts val="1562"/>
               </a:lnSpc>
               <a:buNone/>
             </a:pPr>
             <a:r>
-              <a:rPr lang="en-US" sz="1200" dirty="0">
+              <a:rPr lang="en-US" sz="1100" dirty="0">
                 <a:solidFill>
                   <a:srgbClr val="3B4660"/>
                 </a:solidFill>
@@ -12108,7 +12108,7 @@
               </a:rPr>
               <a:t>Three written answers from BDA move this from marginal to clearly fundable: the show's capacity, slot count and any soft-launch footfall; an agreed tariff with a contractual escalation path; and resolution of the five-versus-seven-year lock-in conflict. All three are free to ask.</a:t>
             </a:r>
-            <a:endParaRPr lang="en-US" sz="1200" dirty="0"/>
+            <a:endParaRPr lang="en-US" sz="1100" dirty="0"/>
           </a:p>
         </p:txBody>
       </p:sp>
@@ -13466,11 +13466,11 @@
         <p:spPr>
           <a:xfrm>
             <a:off x="566928" y="4501388"/>
-            <a:ext cx="11057839" cy="1853590"/>
+            <a:ext cx="11057839" cy="1791513"/>
           </a:xfrm>
           <a:prstGeom prst="roundRect">
             <a:avLst>
-              <a:gd name="adj" fmla="val 2467"/>
+              <a:gd name="adj" fmla="val 2552"/>
             </a:avLst>
           </a:prstGeom>
           <a:solidFill>
@@ -13532,7 +13532,7 @@
         <p:spPr>
           <a:xfrm>
             <a:off x="804672" y="4793996"/>
-            <a:ext cx="10582351" cy="273406"/>
+            <a:ext cx="10582351" cy="258216"/>
           </a:xfrm>
           <a:prstGeom prst="rect">
             <a:avLst/>
@@ -13546,12 +13546,12 @@
           <a:p>
             <a:pPr indent="0" marL="0">
               <a:lnSpc>
-                <a:spcPts val="2070"/>
+                <a:spcPts val="1955"/>
               </a:lnSpc>
               <a:buNone/>
             </a:pPr>
             <a:r>
-              <a:rPr lang="en-US" sz="1800" b="1" dirty="0">
+              <a:rPr lang="en-US" sz="1700" b="1" dirty="0">
                 <a:solidFill>
                   <a:srgbClr val="0A1426"/>
                 </a:solidFill>
@@ -13561,7 +13561,7 @@
               </a:rPr>
               <a:t>Two clauses that decide how this can be financed</a:t>
             </a:r>
-            <a:endParaRPr lang="en-US" sz="1800" dirty="0"/>
+            <a:endParaRPr lang="en-US" sz="1700" dirty="0"/>
           </a:p>
         </p:txBody>
       </p:sp>
@@ -13573,8 +13573,8 @@
         </p:nvSpPr>
         <p:spPr>
           <a:xfrm>
-            <a:off x="804672" y="5122266"/>
-            <a:ext cx="10582351" cy="1159561"/>
+            <a:off x="804672" y="5107076"/>
+            <a:ext cx="10582351" cy="1112672"/>
           </a:xfrm>
           <a:prstGeom prst="rect">
             <a:avLst/>
@@ -13588,12 +13588,12 @@
           <a:p>
             <a:pPr indent="0" marL="0">
               <a:lnSpc>
-                <a:spcPts val="1562"/>
+                <a:spcPts val="1491"/>
               </a:lnSpc>
               <a:buNone/>
             </a:pPr>
             <a:r>
-              <a:rPr lang="en-US" sz="1100" dirty="0">
+              <a:rPr lang="en-US" sz="1050" dirty="0">
                 <a:solidFill>
                   <a:srgbClr val="3B4660"/>
                 </a:solidFill>
@@ -13603,26 +13603,26 @@
               </a:rPr>
               <a:t>No charge over the asset. The Vatika cannot be mortgaged, pledged or hypothecated to any bank, FI or NBFC. That removes conventional project finance and leaves a collateral-free CGTMSE facility as the only sensible debt route — the guarantee substitutes for the security the contract forbids.</a:t>
             </a:r>
-            <a:endParaRPr lang="en-US" sz="1100" dirty="0"/>
+            <a:endParaRPr lang="en-US" sz="1050" dirty="0"/>
           </a:p>
           <a:p>
             <a:pPr indent="0" marL="0">
               <a:lnSpc>
-                <a:spcPts val="1562"/>
+                <a:spcPts val="1491"/>
               </a:lnSpc>
               <a:buNone/>
             </a:pPr>
-            <a:endParaRPr lang="en-US" sz="1100" dirty="0"/>
+            <a:endParaRPr lang="en-US" sz="1050" dirty="0"/>
           </a:p>
           <a:p>
             <a:pPr indent="0" marL="0">
               <a:lnSpc>
-                <a:spcPts val="1562"/>
+                <a:spcPts val="1491"/>
               </a:lnSpc>
               <a:buNone/>
             </a:pPr>
             <a:r>
-              <a:rPr lang="en-US" sz="1100" dirty="0">
+              <a:rPr lang="en-US" sz="1050" dirty="0">
                 <a:solidFill>
                   <a:srgbClr val="3B4660"/>
                 </a:solidFill>
@@ -13632,7 +13632,7 @@
               </a:rPr>
               <a:t>No change of control without consent. No change in ownership pattern, shareholding structure or controlling interest during the lock-in without BDA's prior written approval. That is a condition precedent on Options A and C, not a footnote.</a:t>
             </a:r>
-            <a:endParaRPr lang="en-US" sz="1100" dirty="0"/>
+            <a:endParaRPr lang="en-US" sz="1050" dirty="0"/>
           </a:p>
         </p:txBody>
       </p:sp>
@@ -15299,11 +15299,11 @@
         <p:spPr>
           <a:xfrm>
             <a:off x="566928" y="5255260"/>
-            <a:ext cx="11057839" cy="954654"/>
+            <a:ext cx="11057839" cy="1098885"/>
           </a:xfrm>
           <a:prstGeom prst="roundRect">
             <a:avLst>
-              <a:gd name="adj" fmla="val 4789"/>
+              <a:gd name="adj" fmla="val 4161"/>
             </a:avLst>
           </a:prstGeom>
           <a:solidFill>
@@ -15365,7 +15365,7 @@
         <p:spPr>
           <a:xfrm>
             <a:off x="804672" y="5547868"/>
-            <a:ext cx="10582351" cy="227838"/>
+            <a:ext cx="10582351" cy="212649"/>
           </a:xfrm>
           <a:prstGeom prst="rect">
             <a:avLst/>
@@ -15379,12 +15379,12 @@
           <a:p>
             <a:pPr indent="0" marL="0">
               <a:lnSpc>
-                <a:spcPts val="1725"/>
+                <a:spcPts val="1610"/>
               </a:lnSpc>
               <a:buNone/>
             </a:pPr>
             <a:r>
-              <a:rPr lang="en-US" sz="1500" b="1" dirty="0">
+              <a:rPr lang="en-US" sz="1400" b="1" dirty="0">
                 <a:solidFill>
                   <a:srgbClr val="0A1426"/>
                 </a:solidFill>
@@ -15394,7 +15394,7 @@
               </a:rPr>
               <a:t>The performance security is the hidden cost</a:t>
             </a:r>
-            <a:endParaRPr lang="en-US" sz="1500" dirty="0"/>
+            <a:endParaRPr lang="en-US" sz="1400" dirty="0"/>
           </a:p>
         </p:txBody>
       </p:sp>
@@ -15406,8 +15406,8 @@
         </p:nvSpPr>
         <p:spPr>
           <a:xfrm>
-            <a:off x="804672" y="5830570"/>
-            <a:ext cx="10582351" cy="306192"/>
+            <a:off x="804672" y="5815381"/>
+            <a:ext cx="10582351" cy="465612"/>
           </a:xfrm>
           <a:prstGeom prst="rect">
             <a:avLst/>
@@ -15421,12 +15421,12 @@
           <a:p>
             <a:pPr indent="0" marL="0">
               <a:lnSpc>
-                <a:spcPts val="1349"/>
+                <a:spcPts val="1278"/>
               </a:lnSpc>
               <a:buNone/>
             </a:pPr>
             <a:r>
-              <a:rPr lang="en-US" sz="950" dirty="0">
+              <a:rPr lang="en-US" sz="900" dirty="0">
                 <a:solidFill>
                   <a:srgbClr val="3B4660"/>
                 </a:solidFill>
@@ -15436,7 +15436,7 @@
               </a:rPr>
               <a:t>₹30 L sits with BDA interest-free for fifteen years — roughly ₹52 lakh of foregone return at an 11.5% opportunity cost, more than a year and a half of licence fee. Price it into the bid.</a:t>
             </a:r>
-            <a:endParaRPr lang="en-US" sz="950" dirty="0"/>
+            <a:endParaRPr lang="en-US" sz="900" dirty="0"/>
           </a:p>
         </p:txBody>
       </p:sp>
@@ -20581,11 +20581,11 @@
         <p:spPr>
           <a:xfrm>
             <a:off x="566928" y="5012182"/>
-            <a:ext cx="11057839" cy="1234664"/>
+            <a:ext cx="11057839" cy="1166774"/>
           </a:xfrm>
           <a:prstGeom prst="roundRect">
             <a:avLst>
-              <a:gd name="adj" fmla="val 3703"/>
+              <a:gd name="adj" fmla="val 3918"/>
             </a:avLst>
           </a:prstGeom>
           <a:solidFill>
@@ -20647,7 +20647,7 @@
         <p:spPr>
           <a:xfrm>
             <a:off x="804672" y="5304790"/>
-            <a:ext cx="10582351" cy="273406"/>
+            <a:ext cx="10582351" cy="243027"/>
           </a:xfrm>
           <a:prstGeom prst="rect">
             <a:avLst/>
@@ -20661,12 +20661,12 @@
           <a:p>
             <a:pPr indent="0" marL="0">
               <a:lnSpc>
-                <a:spcPts val="2070"/>
+                <a:spcPts val="1840"/>
               </a:lnSpc>
               <a:buNone/>
             </a:pPr>
             <a:r>
-              <a:rPr lang="en-US" sz="1800" b="1" dirty="0">
+              <a:rPr lang="en-US" sz="1600" b="1" dirty="0">
                 <a:solidFill>
                   <a:srgbClr val="0A1426"/>
                 </a:solidFill>
@@ -20676,7 +20676,7 @@
               </a:rPr>
               <a:t>The manpower floor is contractual, not discretionary</a:t>
             </a:r>
-            <a:endParaRPr lang="en-US" sz="1800" dirty="0"/>
+            <a:endParaRPr lang="en-US" sz="1600" dirty="0"/>
           </a:p>
         </p:txBody>
       </p:sp>
@@ -20688,8 +20688,8 @@
         </p:nvSpPr>
         <p:spPr>
           <a:xfrm>
-            <a:off x="804672" y="5633060"/>
-            <a:ext cx="10582351" cy="540634"/>
+            <a:off x="804672" y="5602681"/>
+            <a:ext cx="10582351" cy="503123"/>
           </a:xfrm>
           <a:prstGeom prst="rect">
             <a:avLst/>
@@ -20703,12 +20703,12 @@
           <a:p>
             <a:pPr indent="0" marL="0">
               <a:lnSpc>
-                <a:spcPts val="1562"/>
+                <a:spcPts val="1420"/>
               </a:lnSpc>
               <a:buNone/>
             </a:pPr>
             <a:r>
-              <a:rPr lang="en-US" sz="1100" dirty="0">
+              <a:rPr lang="en-US" sz="1000" dirty="0">
                 <a:solidFill>
                   <a:srgbClr val="3B4660"/>
                 </a:solidFill>
@@ -20718,7 +20718,7 @@
               </a:rPr>
               <a:t>BDA prescribes 4 sweepers and 5 security per shift plus 8 gardeners, a site manager, an electrician and a plumber per day — about 29 heads before a ticket is sold, and roughly 37 with ticketing and show staff. Payroll cannot flex in a bad season. That is why the margin here is thinner than at Geeta Govind Vatika.</a:t>
             </a:r>
-            <a:endParaRPr lang="en-US" sz="1100" dirty="0"/>
+            <a:endParaRPr lang="en-US" sz="1000" dirty="0"/>
           </a:p>
         </p:txBody>
       </p:sp>
@@ -20900,7 +20900,7 @@
         <p:spPr>
           <a:xfrm>
             <a:off x="566928" y="950976"/>
-            <a:ext cx="11057839" cy="231140"/>
+            <a:ext cx="11057839" cy="462280"/>
           </a:xfrm>
           <a:prstGeom prst="rect">
             <a:avLst/>
@@ -20940,7 +20940,7 @@
           <p:nvPr/>
         </p:nvGraphicFramePr>
         <p:xfrm>
-          <a:off x="566928" y="1310132"/>
+          <a:off x="566928" y="1541272"/>
           <a:ext cx="11057839" cy="2697480"/>
         </p:xfrm>
         <a:graphic xmlns:a="http://schemas.openxmlformats.org/drawingml/2006/main">
@@ -22397,7 +22397,7 @@
         <p:spPr>
           <a:xfrm>
             <a:off x="566928" y="950976"/>
-            <a:ext cx="11057839" cy="231140"/>
+            <a:ext cx="11057839" cy="462280"/>
           </a:xfrm>
           <a:prstGeom prst="rect">
             <a:avLst/>
@@ -22437,7 +22437,7 @@
           <p:nvPr/>
         </p:nvGraphicFramePr>
         <p:xfrm>
-          <a:off x="566928" y="1310132"/>
+          <a:off x="566928" y="1541272"/>
           <a:ext cx="11057839" cy="1965960"/>
         </p:xfrm>
         <a:graphic xmlns:a="http://schemas.openxmlformats.org/drawingml/2006/main">
@@ -22461,7 +22461,7 @@
           </p:nvPr>
         </p:nvGraphicFramePr>
         <p:xfrm>
-          <a:off x="566928" y="3504692"/>
+          <a:off x="566928" y="3735832"/>
           <a:ext cx="11057839" cy="914400"/>
         </p:xfrm>
         <a:graphic>
@@ -23845,7 +23845,7 @@
         </p:nvSpPr>
         <p:spPr>
           <a:xfrm>
-            <a:off x="566928" y="3605276"/>
+            <a:off x="566928" y="3836416"/>
             <a:ext cx="11057839" cy="1062299"/>
           </a:xfrm>
           <a:prstGeom prst="roundRect">
@@ -23872,7 +23872,7 @@
         </p:nvSpPr>
         <p:spPr>
           <a:xfrm>
-            <a:off x="804672" y="3715004"/>
+            <a:off x="804672" y="3946144"/>
             <a:ext cx="2743200" cy="182880"/>
           </a:xfrm>
           <a:prstGeom prst="rect">
@@ -23911,7 +23911,7 @@
         </p:nvSpPr>
         <p:spPr>
           <a:xfrm>
-            <a:off x="804672" y="3897884"/>
+            <a:off x="804672" y="4129024"/>
             <a:ext cx="10582351" cy="288595"/>
           </a:xfrm>
           <a:prstGeom prst="rect">
@@ -23953,7 +23953,7 @@
         </p:nvSpPr>
         <p:spPr>
           <a:xfrm>
-            <a:off x="804672" y="4241343"/>
+            <a:off x="804672" y="4472483"/>
             <a:ext cx="10582351" cy="353080"/>
           </a:xfrm>
           <a:prstGeom prst="rect">

--- a/pptx/EOD-Ramayan-Vatika-Project-Finance.pptx
+++ b/pptx/EOD-Ramayan-Vatika-Project-Finance.pptx
@@ -4900,7 +4900,7 @@
                 <a:ea typeface="Calibri" pitchFamily="34" charset="-122"/>
                 <a:cs typeface="Calibri" pitchFamily="34" charset="-120"/>
               </a:rPr>
-              <a:t>WALK-AWAY LICENCE FEE</a:t>
+              <a:t>RESERVE LICENCE FEE</a:t>
             </a:r>
             <a:endParaRPr lang="en-US" sz="950" dirty="0"/>
           </a:p>
@@ -4939,7 +4939,7 @@
                 <a:ea typeface="Calibri" pitchFamily="34" charset="-122"/>
                 <a:cs typeface="Calibri" pitchFamily="34" charset="-120"/>
               </a:rPr>
-              <a:t>₹35.5 L</a:t>
+              <a:t>₹30 L</a:t>
             </a:r>
             <a:endParaRPr lang="en-US" sz="2900" dirty="0"/>
           </a:p>
@@ -4981,7 +4981,7 @@
                 <a:ea typeface="Calibri" pitchFamily="34" charset="-122"/>
                 <a:cs typeface="Calibri" pitchFamily="34" charset="-120"/>
               </a:rPr>
-              <a:t>₹2.96 L a month</a:t>
+              <a:t>BDA's floor in a sealed highest-bid process</a:t>
             </a:r>
             <a:endParaRPr lang="en-US" sz="1000" dirty="0"/>
           </a:p>
@@ -10349,11 +10349,11 @@
         <p:spPr>
           <a:xfrm>
             <a:off x="566928" y="4224528"/>
-            <a:ext cx="11057839" cy="1737492"/>
+            <a:ext cx="11057839" cy="1962556"/>
           </a:xfrm>
           <a:prstGeom prst="roundRect">
             <a:avLst>
-              <a:gd name="adj" fmla="val 2631"/>
+              <a:gd name="adj" fmla="val 2330"/>
             </a:avLst>
           </a:prstGeom>
           <a:solidFill>
@@ -10457,7 +10457,7 @@
         <p:spPr>
           <a:xfrm>
             <a:off x="804672" y="4860595"/>
-            <a:ext cx="10582351" cy="1028273"/>
+            <a:ext cx="10582351" cy="1253338"/>
           </a:xfrm>
           <a:prstGeom prst="rect">
             <a:avLst/>
@@ -10484,7 +10484,7 @@
                 <a:ea typeface="Calibri" pitchFamily="34" charset="-122"/>
                 <a:cs typeface="Calibri" pitchFamily="34" charset="-120"/>
               </a:rPr>
-              <a:t>Of the three structures only debt is both viable and permitted without BDA's consent — and viable only if the facility is sanctioned at ₹4.17 Cr but committed at ₹2.81 Cr. The binding condition sits earlier than the financing: break-even licence fee is ₹35.5 L a year against a ₹30 L reserve — 18% of headroom in a sealed highest-bid process. Bid at or barely above reserve, or do not bid. On a contract with a five-year lock-in and a fifteen-year restoration obligation, winning at the wrong price is worse than losing.</a:t>
+              <a:t>Of the three structures only debt is both viable and permitted without BDA's consent — and viable only if the facility is sanctioned at ₹4.17 Cr but committed at ₹2.81 Cr. The binding condition sits earlier than the financing: at BDA's ₹30 L reserve the project returns 11.4% against 12.50% guaranteed debt, so it does not cover the money that funds it before a rupee of premium is bid. Bid at or barely above reserve, or do not bid. On a contract with a five-year lock-in and a fifteen-year restoration obligation, winning at the wrong price is worse than losing.</a:t>
             </a:r>
             <a:endParaRPr lang="en-US" sz="1200" dirty="0"/>
           </a:p>
@@ -10855,7 +10855,7 @@
                 <a:ea typeface="Calibri" pitchFamily="34" charset="-122"/>
                 <a:cs typeface="Calibri" pitchFamily="34" charset="-120"/>
               </a:rPr>
-              <a:t>Break-even is ₹35.5 L against a ₹30 L reserve, in a format that rewards the highest bid. Mitigation: a board-approved ceiling before the bid is sealed.</a:t>
+              <a:t>The base case already returns 11.4% against 12.50% debt at the ₹30 L reserve, and the fee escalates for the full term, in a format that rewards the highest bid. Mitigation: a board-approved ceiling before the bid is sealed.</a:t>
             </a:r>
             <a:endParaRPr lang="en-US" sz="1050" dirty="0"/>
           </a:p>
@@ -11509,7 +11509,7 @@
                 <a:ea typeface="Calibri" pitchFamily="34" charset="-122"/>
                 <a:cs typeface="Calibri" pitchFamily="34" charset="-120"/>
               </a:rPr>
-              <a:t>The three financing structures are set out in full because they were asked for, and because the project does work on BDA's own revenue assumptions. But the bid discipline is the part that matters: the model solves the break-even licence fee at ₹35.5 L a year against BDA's ₹30 L reserve — 18% of headroom in a sealed highest-bid process.</a:t>
+              <a:t>The three financing structures are set out in full because they were asked for, and because the project does work on BDA's own revenue assumptions. But the bid discipline is the part that matters: at BDA's ₹30 L reserve the project already returns less than its own cost of debt, and the fee escalates for the full term — so every rupee of premium in a sealed highest-bid process compounds against it.</a:t>
             </a:r>
             <a:endParaRPr lang="en-US" sz="1200" dirty="0"/>
           </a:p>

--- a/pptx/EOD-Ramayan-Vatika-Project-Finance.pptx
+++ b/pptx/EOD-Ramayan-Vatika-Project-Finance.pptx
@@ -4699,7 +4699,7 @@
                 <a:ea typeface="Calibri" pitchFamily="34" charset="-122"/>
                 <a:cs typeface="Calibri" pitchFamily="34" charset="-120"/>
               </a:rPr>
-              <a:t>₹2.81 Cr</a:t>
+              <a:t>₹3.40 Cr</a:t>
             </a:r>
             <a:endParaRPr lang="en-US" sz="2900" dirty="0"/>
           </a:p>
@@ -6971,7 +6971,7 @@
                 <a:ea typeface="Calibri" pitchFamily="34" charset="-122"/>
                 <a:cs typeface="Calibri" pitchFamily="34" charset="-120"/>
               </a:rPr>
-              <a:t>₹2.81 Cr</a:t>
+              <a:t>₹3.40 Cr</a:t>
             </a:r>
             <a:endParaRPr lang="en-US" sz="2600" dirty="0"/>
           </a:p>
@@ -7163,7 +7163,7 @@
                 <a:ea typeface="Calibri" pitchFamily="34" charset="-122"/>
                 <a:cs typeface="Calibri" pitchFamily="34" charset="-120"/>
               </a:rPr>
-              <a:t>At ₹4.17 Cr the minimum post-moratorium DSCR is 1.09×; banks underwrite to 1.30×. The workable structure sanctions ₹4.17 Cr but commits ₹2.81 Cr. Two full years of opex presented as committed term money will be declined.</a:t>
+              <a:t>At ₹4.17 Cr the minimum post-moratorium DSCR is 1.09×; banks underwrite to 1.30×. The workable structure sanctions ₹4.17 Cr but commits ₹3.40 Cr. Two full years of opex presented as committed term money will be declined.</a:t>
             </a:r>
             <a:endParaRPr lang="en-US" sz="1200" dirty="0"/>
           </a:p>
@@ -10442,7 +10442,7 @@
                 <a:ea typeface="Calibri" pitchFamily="34" charset="-122"/>
                 <a:cs typeface="Calibri" pitchFamily="34" charset="-120"/>
               </a:rPr>
-              <a:t>Bid at reserve. Fund with a CGTMSE limit, committed at ₹2.81 Cr.</a:t>
+              <a:t>Bid at reserve. Fund with a CGTMSE limit, committed at ₹3.40 Cr.</a:t>
             </a:r>
             <a:endParaRPr lang="en-US" sz="1900" dirty="0"/>
           </a:p>
@@ -10484,7 +10484,7 @@
                 <a:ea typeface="Calibri" pitchFamily="34" charset="-122"/>
                 <a:cs typeface="Calibri" pitchFamily="34" charset="-120"/>
               </a:rPr>
-              <a:t>Of the three structures only debt is both viable and permitted without BDA's consent — and viable only if the facility is sanctioned at ₹4.17 Cr but committed at ₹2.81 Cr. The binding condition sits earlier than the financing: at BDA's ₹30 L reserve the project returns 11.4% against 12.50% guaranteed debt, so it does not cover the money that funds it before a rupee of premium is bid. Bid at or barely above reserve, or do not bid. On a contract with a five-year lock-in and a fifteen-year restoration obligation, winning at the wrong price is worse than losing.</a:t>
+              <a:t>Of the three structures only debt is both viable and permitted without BDA's consent — and viable only if the facility is sanctioned at ₹4.17 Cr but committed at ₹3.40 Cr. The binding condition sits earlier than the financing: at BDA's ₹30 L reserve the project returns 11.4% against 12.50% guaranteed debt, so it does not cover the money that funds it before a rupee of premium is bid. Bid at or barely above reserve, or do not bid. On a contract with a five-year lock-in and a fifteen-year restoration obligation, winning at the wrong price is worse than losing.</a:t>
             </a:r>
             <a:endParaRPr lang="en-US" sz="1200" dirty="0"/>
           </a:p>
@@ -11480,7 +11480,7 @@
                 <a:ea typeface="Calibri" pitchFamily="34" charset="-122"/>
                 <a:cs typeface="Calibri" pitchFamily="34" charset="-120"/>
               </a:rPr>
-              <a:t>This deck does not conclude that Ramayan Vatika should be funded on the terms briefed. On the base assumptions the project returns 11.4% against a 12.50% cost of guaranteed debt, and services ₹2.81 Cr of facility against the ₹4.17 Cr asked for.</a:t>
+              <a:t>This deck does not conclude that Ramayan Vatika should be funded on the terms briefed. On the base assumptions the project returns 11.4% against a 12.50% cost of guaranteed debt, and services ₹3.40 Cr of facility against the ₹4.17 Cr asked for.</a:t>
             </a:r>
             <a:endParaRPr lang="en-US" sz="1200" dirty="0"/>
           </a:p>
@@ -13841,7 +13841,7 @@
                 <a:ea typeface="Calibri" pitchFamily="34" charset="-122"/>
                 <a:cs typeface="Calibri" pitchFamily="34" charset="-120"/>
               </a:rPr>
-              <a:t>The brief was two years of opex. Sized literally that is ₹4.17 Cr. The project's capacity to service debt is ₹2.81 Cr. The gap between those two numbers is the whole question.</a:t>
+              <a:t>The brief was two years of opex. Sized literally that is ₹4.17 Cr. The project's capacity to service debt is ₹3.40 Cr. The gap between those two numbers is the whole question.</a:t>
             </a:r>
             <a:endParaRPr lang="en-US" sz="1250" dirty="0"/>
           </a:p>
@@ -14246,7 +14246,7 @@
                 <a:ea typeface="Calibri" pitchFamily="34" charset="-122"/>
                 <a:cs typeface="Calibri" pitchFamily="34" charset="-120"/>
               </a:rPr>
-              <a:t>₹2.81 Cr</a:t>
+              <a:t>₹3.40 Cr</a:t>
             </a:r>
             <a:endParaRPr lang="en-US" sz="2600" dirty="0"/>
           </a:p>
@@ -14288,7 +14288,7 @@
                 <a:ea typeface="Calibri" pitchFamily="34" charset="-122"/>
                 <a:cs typeface="Calibri" pitchFamily="34" charset="-120"/>
               </a:rPr>
-              <a:t>Gap to the brief: ₹1.36 Cr</a:t>
+              <a:t>Gap to the brief: ₹0.77 Cr</a:t>
             </a:r>
             <a:endParaRPr lang="en-US" sz="950" dirty="0"/>
           </a:p>

--- a/pptx/EOD-Ramayan-Vatika-Project-Finance.pptx
+++ b/pptx/EOD-Ramayan-Vatika-Project-Finance.pptx
@@ -22438,7 +22438,7 @@
         </p:nvGraphicFramePr>
         <p:xfrm>
           <a:off x="566928" y="1541272"/>
-          <a:ext cx="11057839" cy="1965960"/>
+          <a:ext cx="11057839" cy="1691640"/>
         </p:xfrm>
         <a:graphic xmlns:a="http://schemas.openxmlformats.org/drawingml/2006/main">
           <a:graphicData uri="http://schemas.openxmlformats.org/drawingml/2006/chart">
@@ -22461,7 +22461,7 @@
           </p:nvPr>
         </p:nvGraphicFramePr>
         <p:xfrm>
-          <a:off x="566928" y="3735832"/>
+          <a:off x="566928" y="3461512"/>
           <a:ext cx="11057839" cy="914400"/>
         </p:xfrm>
         <a:graphic>
@@ -22474,7 +22474,7 @@
                 <a:gridCol w="2588666"/>
                 <a:gridCol w="2588666"/>
               </a:tblGrid>
-              <a:tr h="292608">
+              <a:tr h="256032">
                 <a:tc>
                   <a:txBody>
                     <a:bodyPr/>
@@ -22737,7 +22737,7 @@
                   </a:tcPr>
                 </a:tc>
               </a:tr>
-              <a:tr h="292608">
+              <a:tr h="256032">
                 <a:tc>
                   <a:txBody>
                     <a:bodyPr/>
@@ -22747,7 +22747,7 @@
                         <a:buNone/>
                       </a:pPr>
                       <a:r>
-                        <a:rPr lang="en-US" sz="1100" dirty="0">
+                        <a:rPr lang="en-US" sz="1050" dirty="0">
                           <a:solidFill>
                             <a:srgbClr val="3B4660"/>
                           </a:solidFill>
@@ -22757,7 +22757,7 @@
                         </a:rPr>
                         <a:t>Year 1 EBITDA</a:t>
                       </a:r>
-                      <a:endParaRPr lang="en-US" sz="1100" dirty="0">
+                      <a:endParaRPr lang="en-US" sz="1050" dirty="0">
                         <a:latin typeface="Calibri" charset="0"/>
                         <a:ea typeface="Calibri" charset="0"/>
                         <a:cs typeface="Calibri" charset="0"/>
@@ -22815,7 +22815,7 @@
                         <a:buNone/>
                       </a:pPr>
                       <a:r>
-                        <a:rPr lang="en-US" sz="1100" dirty="0">
+                        <a:rPr lang="en-US" sz="1050" dirty="0">
                           <a:solidFill>
                             <a:srgbClr val="3B4660"/>
                           </a:solidFill>
@@ -22825,7 +22825,7 @@
                         </a:rPr>
                         <a:t>₹-0.86 Cr</a:t>
                       </a:r>
-                      <a:endParaRPr lang="en-US" sz="1100" dirty="0">
+                      <a:endParaRPr lang="en-US" sz="1050" dirty="0">
                         <a:latin typeface="Calibri" charset="0"/>
                         <a:ea typeface="Calibri" charset="0"/>
                         <a:cs typeface="Calibri" charset="0"/>
@@ -22883,7 +22883,7 @@
                         <a:buNone/>
                       </a:pPr>
                       <a:r>
-                        <a:rPr lang="en-US" sz="1100" dirty="0">
+                        <a:rPr lang="en-US" sz="1050" dirty="0">
                           <a:solidFill>
                             <a:srgbClr val="3B4660"/>
                           </a:solidFill>
@@ -22893,7 +22893,7 @@
                         </a:rPr>
                         <a:t>₹-0.41 Cr</a:t>
                       </a:r>
-                      <a:endParaRPr lang="en-US" sz="1100" dirty="0">
+                      <a:endParaRPr lang="en-US" sz="1050" dirty="0">
                         <a:latin typeface="Calibri" charset="0"/>
                         <a:ea typeface="Calibri" charset="0"/>
                         <a:cs typeface="Calibri" charset="0"/>
@@ -22951,7 +22951,7 @@
                         <a:buNone/>
                       </a:pPr>
                       <a:r>
-                        <a:rPr lang="en-US" sz="1100" dirty="0">
+                        <a:rPr lang="en-US" sz="1050" dirty="0">
                           <a:solidFill>
                             <a:srgbClr val="3B4660"/>
                           </a:solidFill>
@@ -22961,7 +22961,7 @@
                         </a:rPr>
                         <a:t>₹0.03 Cr</a:t>
                       </a:r>
-                      <a:endParaRPr lang="en-US" sz="1100" dirty="0">
+                      <a:endParaRPr lang="en-US" sz="1050" dirty="0">
                         <a:latin typeface="Calibri" charset="0"/>
                         <a:ea typeface="Calibri" charset="0"/>
                         <a:cs typeface="Calibri" charset="0"/>
@@ -23011,7 +23011,7 @@
                   </a:tcPr>
                 </a:tc>
               </a:tr>
-              <a:tr h="292608">
+              <a:tr h="256032">
                 <a:tc>
                   <a:txBody>
                     <a:bodyPr/>
@@ -23021,7 +23021,7 @@
                         <a:buNone/>
                       </a:pPr>
                       <a:r>
-                        <a:rPr lang="en-US" sz="1100" dirty="0">
+                        <a:rPr lang="en-US" sz="1050" dirty="0">
                           <a:solidFill>
                             <a:srgbClr val="3B4660"/>
                           </a:solidFill>
@@ -23031,7 +23031,7 @@
                         </a:rPr>
                         <a:t>Stabilised revenue</a:t>
                       </a:r>
-                      <a:endParaRPr lang="en-US" sz="1100" dirty="0">
+                      <a:endParaRPr lang="en-US" sz="1050" dirty="0">
                         <a:latin typeface="Calibri" charset="0"/>
                         <a:ea typeface="Calibri" charset="0"/>
                         <a:cs typeface="Calibri" charset="0"/>
@@ -23089,7 +23089,7 @@
                         <a:buNone/>
                       </a:pPr>
                       <a:r>
-                        <a:rPr lang="en-US" sz="1100" dirty="0">
+                        <a:rPr lang="en-US" sz="1050" dirty="0">
                           <a:solidFill>
                             <a:srgbClr val="3B4660"/>
                           </a:solidFill>
@@ -23099,7 +23099,7 @@
                         </a:rPr>
                         <a:t>₹3.02 Cr</a:t>
                       </a:r>
-                      <a:endParaRPr lang="en-US" sz="1100" dirty="0">
+                      <a:endParaRPr lang="en-US" sz="1050" dirty="0">
                         <a:latin typeface="Calibri" charset="0"/>
                         <a:ea typeface="Calibri" charset="0"/>
                         <a:cs typeface="Calibri" charset="0"/>
@@ -23157,7 +23157,7 @@
                         <a:buNone/>
                       </a:pPr>
                       <a:r>
-                        <a:rPr lang="en-US" sz="1100" dirty="0">
+                        <a:rPr lang="en-US" sz="1050" dirty="0">
                           <a:solidFill>
                             <a:srgbClr val="3B4660"/>
                           </a:solidFill>
@@ -23167,7 +23167,7 @@
                         </a:rPr>
                         <a:t>₹3.70 Cr</a:t>
                       </a:r>
-                      <a:endParaRPr lang="en-US" sz="1100" dirty="0">
+                      <a:endParaRPr lang="en-US" sz="1050" dirty="0">
                         <a:latin typeface="Calibri" charset="0"/>
                         <a:ea typeface="Calibri" charset="0"/>
                         <a:cs typeface="Calibri" charset="0"/>
@@ -23225,7 +23225,7 @@
                         <a:buNone/>
                       </a:pPr>
                       <a:r>
-                        <a:rPr lang="en-US" sz="1100" dirty="0">
+                        <a:rPr lang="en-US" sz="1050" dirty="0">
                           <a:solidFill>
                             <a:srgbClr val="3B4660"/>
                           </a:solidFill>
@@ -23235,7 +23235,7 @@
                         </a:rPr>
                         <a:t>₹4.90 Cr</a:t>
                       </a:r>
-                      <a:endParaRPr lang="en-US" sz="1100" dirty="0">
+                      <a:endParaRPr lang="en-US" sz="1050" dirty="0">
                         <a:latin typeface="Calibri" charset="0"/>
                         <a:ea typeface="Calibri" charset="0"/>
                         <a:cs typeface="Calibri" charset="0"/>
@@ -23285,7 +23285,7 @@
                   </a:tcPr>
                 </a:tc>
               </a:tr>
-              <a:tr h="292608">
+              <a:tr h="256032">
                 <a:tc>
                   <a:txBody>
                     <a:bodyPr/>
@@ -23295,7 +23295,7 @@
                         <a:buNone/>
                       </a:pPr>
                       <a:r>
-                        <a:rPr lang="en-US" sz="1100" dirty="0">
+                        <a:rPr lang="en-US" sz="1050" dirty="0">
                           <a:solidFill>
                             <a:srgbClr val="3B4660"/>
                           </a:solidFill>
@@ -23305,7 +23305,7 @@
                         </a:rPr>
                         <a:t>Stabilised EBITDA margin</a:t>
                       </a:r>
-                      <a:endParaRPr lang="en-US" sz="1100" dirty="0">
+                      <a:endParaRPr lang="en-US" sz="1050" dirty="0">
                         <a:latin typeface="Calibri" charset="0"/>
                         <a:ea typeface="Calibri" charset="0"/>
                         <a:cs typeface="Calibri" charset="0"/>
@@ -23363,7 +23363,7 @@
                         <a:buNone/>
                       </a:pPr>
                       <a:r>
-                        <a:rPr lang="en-US" sz="1100" dirty="0">
+                        <a:rPr lang="en-US" sz="1050" dirty="0">
                           <a:solidFill>
                             <a:srgbClr val="3B4660"/>
                           </a:solidFill>
@@ -23373,7 +23373,7 @@
                         </a:rPr>
                         <a:t>-2.3%</a:t>
                       </a:r>
-                      <a:endParaRPr lang="en-US" sz="1100" dirty="0">
+                      <a:endParaRPr lang="en-US" sz="1050" dirty="0">
                         <a:latin typeface="Calibri" charset="0"/>
                         <a:ea typeface="Calibri" charset="0"/>
                         <a:cs typeface="Calibri" charset="0"/>
@@ -23431,7 +23431,7 @@
                         <a:buNone/>
                       </a:pPr>
                       <a:r>
-                        <a:rPr lang="en-US" sz="1100" dirty="0">
+                        <a:rPr lang="en-US" sz="1050" dirty="0">
                           <a:solidFill>
                             <a:srgbClr val="3B4660"/>
                           </a:solidFill>
@@ -23441,7 +23441,7 @@
                         </a:rPr>
                         <a:t>20.3%</a:t>
                       </a:r>
-                      <a:endParaRPr lang="en-US" sz="1100" dirty="0">
+                      <a:endParaRPr lang="en-US" sz="1050" dirty="0">
                         <a:latin typeface="Calibri" charset="0"/>
                         <a:ea typeface="Calibri" charset="0"/>
                         <a:cs typeface="Calibri" charset="0"/>
@@ -23499,7 +23499,7 @@
                         <a:buNone/>
                       </a:pPr>
                       <a:r>
-                        <a:rPr lang="en-US" sz="1100" dirty="0">
+                        <a:rPr lang="en-US" sz="1050" dirty="0">
                           <a:solidFill>
                             <a:srgbClr val="3B4660"/>
                           </a:solidFill>
@@ -23509,7 +23509,7 @@
                         </a:rPr>
                         <a:t>36.5%</a:t>
                       </a:r>
-                      <a:endParaRPr lang="en-US" sz="1100" dirty="0">
+                      <a:endParaRPr lang="en-US" sz="1050" dirty="0">
                         <a:latin typeface="Calibri" charset="0"/>
                         <a:ea typeface="Calibri" charset="0"/>
                         <a:cs typeface="Calibri" charset="0"/>
@@ -23559,7 +23559,7 @@
                   </a:tcPr>
                 </a:tc>
               </a:tr>
-              <a:tr h="292608">
+              <a:tr h="256032">
                 <a:tc>
                   <a:txBody>
                     <a:bodyPr/>
@@ -23569,7 +23569,7 @@
                         <a:buNone/>
                       </a:pPr>
                       <a:r>
-                        <a:rPr lang="en-US" sz="1100" b="1" dirty="0">
+                        <a:rPr lang="en-US" sz="1050" b="1" dirty="0">
                           <a:solidFill>
                             <a:srgbClr val="0A1426"/>
                           </a:solidFill>
@@ -23579,7 +23579,7 @@
                         </a:rPr>
                         <a:t>Payback</a:t>
                       </a:r>
-                      <a:endParaRPr lang="en-US" sz="1100" dirty="0">
+                      <a:endParaRPr lang="en-US" sz="1050" dirty="0">
                         <a:latin typeface="Calibri" charset="0"/>
                         <a:ea typeface="Calibri" charset="0"/>
                         <a:cs typeface="Calibri" charset="0"/>
@@ -23637,7 +23637,7 @@
                         <a:buNone/>
                       </a:pPr>
                       <a:r>
-                        <a:rPr lang="en-US" sz="1100" b="1" dirty="0">
+                        <a:rPr lang="en-US" sz="1050" b="1" dirty="0">
                           <a:solidFill>
                             <a:srgbClr val="0A1426"/>
                           </a:solidFill>
@@ -23647,7 +23647,7 @@
                         </a:rPr>
                         <a:t>Not within term</a:t>
                       </a:r>
-                      <a:endParaRPr lang="en-US" sz="1100" dirty="0">
+                      <a:endParaRPr lang="en-US" sz="1050" dirty="0">
                         <a:latin typeface="Calibri" charset="0"/>
                         <a:ea typeface="Calibri" charset="0"/>
                         <a:cs typeface="Calibri" charset="0"/>
@@ -23705,7 +23705,7 @@
                         <a:buNone/>
                       </a:pPr>
                       <a:r>
-                        <a:rPr lang="en-US" sz="1100" b="1" dirty="0">
+                        <a:rPr lang="en-US" sz="1050" b="1" dirty="0">
                           <a:solidFill>
                             <a:srgbClr val="0A1426"/>
                           </a:solidFill>
@@ -23715,7 +23715,7 @@
                         </a:rPr>
                         <a:t>7.0 yrs</a:t>
                       </a:r>
-                      <a:endParaRPr lang="en-US" sz="1100" dirty="0">
+                      <a:endParaRPr lang="en-US" sz="1050" dirty="0">
                         <a:latin typeface="Calibri" charset="0"/>
                         <a:ea typeface="Calibri" charset="0"/>
                         <a:cs typeface="Calibri" charset="0"/>
@@ -23773,7 +23773,7 @@
                         <a:buNone/>
                       </a:pPr>
                       <a:r>
-                        <a:rPr lang="en-US" sz="1100" b="1" dirty="0">
+                        <a:rPr lang="en-US" sz="1050" b="1" dirty="0">
                           <a:solidFill>
                             <a:srgbClr val="0A1426"/>
                           </a:solidFill>
@@ -23783,7 +23783,7 @@
                         </a:rPr>
                         <a:t>3.6 yrs</a:t>
                       </a:r>
-                      <a:endParaRPr lang="en-US" sz="1100" dirty="0">
+                      <a:endParaRPr lang="en-US" sz="1050" dirty="0">
                         <a:latin typeface="Calibri" charset="0"/>
                         <a:ea typeface="Calibri" charset="0"/>
                         <a:cs typeface="Calibri" charset="0"/>
@@ -23845,7 +23845,7 @@
         </p:nvSpPr>
         <p:spPr>
           <a:xfrm>
-            <a:off x="566928" y="3836416"/>
+            <a:off x="566928" y="5215636"/>
             <a:ext cx="11057839" cy="1062299"/>
           </a:xfrm>
           <a:prstGeom prst="roundRect">
@@ -23872,7 +23872,7 @@
         </p:nvSpPr>
         <p:spPr>
           <a:xfrm>
-            <a:off x="804672" y="3946144"/>
+            <a:off x="804672" y="5325364"/>
             <a:ext cx="2743200" cy="182880"/>
           </a:xfrm>
           <a:prstGeom prst="rect">
@@ -23911,7 +23911,7 @@
         </p:nvSpPr>
         <p:spPr>
           <a:xfrm>
-            <a:off x="804672" y="4129024"/>
+            <a:off x="804672" y="5508244"/>
             <a:ext cx="10582351" cy="288595"/>
           </a:xfrm>
           <a:prstGeom prst="rect">
@@ -23953,7 +23953,7 @@
         </p:nvSpPr>
         <p:spPr>
           <a:xfrm>
-            <a:off x="804672" y="4472483"/>
+            <a:off x="804672" y="5851703"/>
             <a:ext cx="10582351" cy="353080"/>
           </a:xfrm>
           <a:prstGeom prst="rect">
